--- a/week-4/CCA-F_Module4_Prompt_Engineering_Structured_Output.pptx
+++ b/week-4/CCA-F_Module4_Prompt_Engineering_Structured_Output.pptx
@@ -5,35 +5,35 @@
     <p:sldMasterId id="2147483648" r:id="rId1"/>
   </p:sldMasterIdLst>
   <p:sldIdLst>
-    <p:sldId id="256" r:id="rId7"/>
-    <p:sldId id="257" r:id="rId8"/>
-    <p:sldId id="258" r:id="rId9"/>
-    <p:sldId id="259" r:id="rId10"/>
-    <p:sldId id="260" r:id="rId11"/>
-    <p:sldId id="261" r:id="rId12"/>
-    <p:sldId id="262" r:id="rId13"/>
-    <p:sldId id="263" r:id="rId14"/>
-    <p:sldId id="264" r:id="rId15"/>
-    <p:sldId id="265" r:id="rId16"/>
-    <p:sldId id="266" r:id="rId17"/>
-    <p:sldId id="267" r:id="rId18"/>
-    <p:sldId id="268" r:id="rId19"/>
-    <p:sldId id="269" r:id="rId20"/>
-    <p:sldId id="270" r:id="rId21"/>
-    <p:sldId id="271" r:id="rId22"/>
-    <p:sldId id="272" r:id="rId23"/>
-    <p:sldId id="273" r:id="rId24"/>
-    <p:sldId id="274" r:id="rId25"/>
-    <p:sldId id="275" r:id="rId26"/>
-    <p:sldId id="276" r:id="rId27"/>
-    <p:sldId id="277" r:id="rId28"/>
-    <p:sldId id="278" r:id="rId29"/>
-    <p:sldId id="279" r:id="rId30"/>
-    <p:sldId id="280" r:id="rId31"/>
-    <p:sldId id="281" r:id="rId32"/>
-    <p:sldId id="282" r:id="rId33"/>
+    <p:sldId id="256" r:id="rId2"/>
+    <p:sldId id="257" r:id="rId3"/>
+    <p:sldId id="258" r:id="rId4"/>
+    <p:sldId id="259" r:id="rId5"/>
+    <p:sldId id="260" r:id="rId6"/>
+    <p:sldId id="261" r:id="rId7"/>
+    <p:sldId id="262" r:id="rId8"/>
+    <p:sldId id="263" r:id="rId9"/>
+    <p:sldId id="264" r:id="rId10"/>
+    <p:sldId id="265" r:id="rId11"/>
+    <p:sldId id="266" r:id="rId12"/>
+    <p:sldId id="267" r:id="rId13"/>
+    <p:sldId id="268" r:id="rId14"/>
+    <p:sldId id="269" r:id="rId15"/>
+    <p:sldId id="270" r:id="rId16"/>
+    <p:sldId id="271" r:id="rId17"/>
+    <p:sldId id="272" r:id="rId18"/>
+    <p:sldId id="273" r:id="rId19"/>
+    <p:sldId id="274" r:id="rId20"/>
+    <p:sldId id="275" r:id="rId21"/>
+    <p:sldId id="276" r:id="rId22"/>
+    <p:sldId id="277" r:id="rId23"/>
+    <p:sldId id="278" r:id="rId24"/>
+    <p:sldId id="279" r:id="rId25"/>
+    <p:sldId id="280" r:id="rId26"/>
+    <p:sldId id="281" r:id="rId27"/>
+    <p:sldId id="282" r:id="rId28"/>
   </p:sldIdLst>
-  <p:sldSz cx="12191695" cy="6858000" type="screen4x3"/>
+  <p:sldSz cx="12192000" cy="6858000"/>
   <p:notesSz cx="6858000" cy="9144000"/>
   <p:defaultTextStyle>
     <a:defPPr>
@@ -130,6 +130,22 @@
       </a:defRPr>
     </a:lvl9pPr>
   </p:defaultTextStyle>
+  <p:extLst>
+    <p:ext uri="{EFAFB233-063F-42B5-8137-9DF3F51BA10A}">
+      <p15:sldGuideLst xmlns:p15="http://schemas.microsoft.com/office/powerpoint/2012/main">
+        <p15:guide id="1" orient="horz" pos="2160">
+          <p15:clr>
+            <a:srgbClr val="A4A3A4"/>
+          </p15:clr>
+        </p15:guide>
+        <p15:guide id="2" pos="2880">
+          <p15:clr>
+            <a:srgbClr val="A4A3A4"/>
+          </p15:clr>
+        </p15:guide>
+      </p15:sldGuideLst>
+    </p:ext>
+  </p:extLst>
 </p:presentation>
 </file>
 
@@ -171,10 +187,9 @@
           <a:lstStyle/>
           <a:p>
             <a:r>
-              <a:rPr lang="en-US" smtClean="0"/>
+              <a:rPr lang="en-US"/>
               <a:t>Click to edit Master title style</a:t>
             </a:r>
-            <a:endParaRPr lang="en-US"/>
           </a:p>
         </p:txBody>
       </p:sp>
@@ -290,10 +305,9 @@
           </a:lstStyle>
           <a:p>
             <a:r>
-              <a:rPr lang="en-US" smtClean="0"/>
+              <a:rPr lang="en-US"/>
               <a:t>Click to edit Master subtitle style</a:t>
             </a:r>
-            <a:endParaRPr lang="en-US"/>
           </a:p>
         </p:txBody>
       </p:sp>
@@ -314,7 +328,7 @@
           <a:p>
             <a:fld id="{5BCAD085-E8A6-8845-BD4E-CB4CCA059FC4}" type="datetimeFigureOut">
               <a:rPr lang="en-US" smtClean="0"/>
-              <a:t>1/27/13</a:t>
+              <a:t>7/24/26</a:t>
             </a:fld>
             <a:endParaRPr lang="en-US"/>
           </a:p>
@@ -408,10 +422,9 @@
           <a:lstStyle/>
           <a:p>
             <a:r>
-              <a:rPr lang="en-US" smtClean="0"/>
+              <a:rPr lang="en-US"/>
               <a:t>Click to edit Master title style</a:t>
             </a:r>
-            <a:endParaRPr lang="en-US"/>
           </a:p>
         </p:txBody>
       </p:sp>
@@ -432,38 +445,37 @@
           <a:p>
             <a:pPr lvl="0"/>
             <a:r>
-              <a:rPr lang="en-US" smtClean="0"/>
+              <a:rPr lang="en-US"/>
               <a:t>Click to edit Master text styles</a:t>
             </a:r>
           </a:p>
           <a:p>
             <a:pPr lvl="1"/>
             <a:r>
-              <a:rPr lang="en-US" smtClean="0"/>
+              <a:rPr lang="en-US"/>
               <a:t>Second level</a:t>
             </a:r>
           </a:p>
           <a:p>
             <a:pPr lvl="2"/>
             <a:r>
-              <a:rPr lang="en-US" smtClean="0"/>
+              <a:rPr lang="en-US"/>
               <a:t>Third level</a:t>
             </a:r>
           </a:p>
           <a:p>
             <a:pPr lvl="3"/>
             <a:r>
-              <a:rPr lang="en-US" smtClean="0"/>
+              <a:rPr lang="en-US"/>
               <a:t>Fourth level</a:t>
             </a:r>
           </a:p>
           <a:p>
             <a:pPr lvl="4"/>
             <a:r>
-              <a:rPr lang="en-US" smtClean="0"/>
+              <a:rPr lang="en-US"/>
               <a:t>Fifth level</a:t>
             </a:r>
-            <a:endParaRPr lang="en-US"/>
           </a:p>
         </p:txBody>
       </p:sp>
@@ -484,7 +496,7 @@
           <a:p>
             <a:fld id="{5BCAD085-E8A6-8845-BD4E-CB4CCA059FC4}" type="datetimeFigureOut">
               <a:rPr lang="en-US" smtClean="0"/>
-              <a:t>1/27/13</a:t>
+              <a:t>7/24/26</a:t>
             </a:fld>
             <a:endParaRPr lang="en-US"/>
           </a:p>
@@ -583,10 +595,9 @@
           <a:lstStyle/>
           <a:p>
             <a:r>
-              <a:rPr lang="en-US" smtClean="0"/>
+              <a:rPr lang="en-US"/>
               <a:t>Click to edit Master title style</a:t>
             </a:r>
-            <a:endParaRPr lang="en-US"/>
           </a:p>
         </p:txBody>
       </p:sp>
@@ -612,38 +623,37 @@
           <a:p>
             <a:pPr lvl="0"/>
             <a:r>
-              <a:rPr lang="en-US" smtClean="0"/>
+              <a:rPr lang="en-US"/>
               <a:t>Click to edit Master text styles</a:t>
             </a:r>
           </a:p>
           <a:p>
             <a:pPr lvl="1"/>
             <a:r>
-              <a:rPr lang="en-US" smtClean="0"/>
+              <a:rPr lang="en-US"/>
               <a:t>Second level</a:t>
             </a:r>
           </a:p>
           <a:p>
             <a:pPr lvl="2"/>
             <a:r>
-              <a:rPr lang="en-US" smtClean="0"/>
+              <a:rPr lang="en-US"/>
               <a:t>Third level</a:t>
             </a:r>
           </a:p>
           <a:p>
             <a:pPr lvl="3"/>
             <a:r>
-              <a:rPr lang="en-US" smtClean="0"/>
+              <a:rPr lang="en-US"/>
               <a:t>Fourth level</a:t>
             </a:r>
           </a:p>
           <a:p>
             <a:pPr lvl="4"/>
             <a:r>
-              <a:rPr lang="en-US" smtClean="0"/>
+              <a:rPr lang="en-US"/>
               <a:t>Fifth level</a:t>
             </a:r>
-            <a:endParaRPr lang="en-US"/>
           </a:p>
         </p:txBody>
       </p:sp>
@@ -664,7 +674,7 @@
           <a:p>
             <a:fld id="{5BCAD085-E8A6-8845-BD4E-CB4CCA059FC4}" type="datetimeFigureOut">
               <a:rPr lang="en-US" smtClean="0"/>
-              <a:t>1/27/13</a:t>
+              <a:t>7/24/26</a:t>
             </a:fld>
             <a:endParaRPr lang="en-US"/>
           </a:p>
@@ -758,10 +768,9 @@
           <a:lstStyle/>
           <a:p>
             <a:r>
-              <a:rPr lang="en-US" smtClean="0"/>
+              <a:rPr lang="en-US"/>
               <a:t>Click to edit Master title style</a:t>
             </a:r>
-            <a:endParaRPr lang="en-US"/>
           </a:p>
         </p:txBody>
       </p:sp>
@@ -782,38 +791,37 @@
           <a:p>
             <a:pPr lvl="0"/>
             <a:r>
-              <a:rPr lang="en-US" smtClean="0"/>
+              <a:rPr lang="en-US"/>
               <a:t>Click to edit Master text styles</a:t>
             </a:r>
           </a:p>
           <a:p>
             <a:pPr lvl="1"/>
             <a:r>
-              <a:rPr lang="en-US" smtClean="0"/>
+              <a:rPr lang="en-US"/>
               <a:t>Second level</a:t>
             </a:r>
           </a:p>
           <a:p>
             <a:pPr lvl="2"/>
             <a:r>
-              <a:rPr lang="en-US" smtClean="0"/>
+              <a:rPr lang="en-US"/>
               <a:t>Third level</a:t>
             </a:r>
           </a:p>
           <a:p>
             <a:pPr lvl="3"/>
             <a:r>
-              <a:rPr lang="en-US" smtClean="0"/>
+              <a:rPr lang="en-US"/>
               <a:t>Fourth level</a:t>
             </a:r>
           </a:p>
           <a:p>
             <a:pPr lvl="4"/>
             <a:r>
-              <a:rPr lang="en-US" smtClean="0"/>
+              <a:rPr lang="en-US"/>
               <a:t>Fifth level</a:t>
             </a:r>
-            <a:endParaRPr lang="en-US"/>
           </a:p>
         </p:txBody>
       </p:sp>
@@ -834,7 +842,7 @@
           <a:p>
             <a:fld id="{5BCAD085-E8A6-8845-BD4E-CB4CCA059FC4}" type="datetimeFigureOut">
               <a:rPr lang="en-US" smtClean="0"/>
-              <a:t>1/27/13</a:t>
+              <a:t>7/24/26</a:t>
             </a:fld>
             <a:endParaRPr lang="en-US"/>
           </a:p>
@@ -937,10 +945,9 @@
           </a:lstStyle>
           <a:p>
             <a:r>
-              <a:rPr lang="en-US" smtClean="0"/>
+              <a:rPr lang="en-US"/>
               <a:t>Click to edit Master title style</a:t>
             </a:r>
-            <a:endParaRPr lang="en-US"/>
           </a:p>
         </p:txBody>
       </p:sp>
@@ -1057,7 +1064,7 @@
           <a:p>
             <a:pPr lvl="0"/>
             <a:r>
-              <a:rPr lang="en-US" smtClean="0"/>
+              <a:rPr lang="en-US"/>
               <a:t>Click to edit Master text styles</a:t>
             </a:r>
           </a:p>
@@ -1080,7 +1087,7 @@
           <a:p>
             <a:fld id="{5BCAD085-E8A6-8845-BD4E-CB4CCA059FC4}" type="datetimeFigureOut">
               <a:rPr lang="en-US" smtClean="0"/>
-              <a:t>1/27/13</a:t>
+              <a:t>7/24/26</a:t>
             </a:fld>
             <a:endParaRPr lang="en-US"/>
           </a:p>
@@ -1174,10 +1181,9 @@
           <a:lstStyle/>
           <a:p>
             <a:r>
-              <a:rPr lang="en-US" smtClean="0"/>
+              <a:rPr lang="en-US"/>
               <a:t>Click to edit Master title style</a:t>
             </a:r>
-            <a:endParaRPr lang="en-US"/>
           </a:p>
         </p:txBody>
       </p:sp>
@@ -1231,38 +1237,37 @@
           <a:p>
             <a:pPr lvl="0"/>
             <a:r>
-              <a:rPr lang="en-US" smtClean="0"/>
+              <a:rPr lang="en-US"/>
               <a:t>Click to edit Master text styles</a:t>
             </a:r>
           </a:p>
           <a:p>
             <a:pPr lvl="1"/>
             <a:r>
-              <a:rPr lang="en-US" smtClean="0"/>
+              <a:rPr lang="en-US"/>
               <a:t>Second level</a:t>
             </a:r>
           </a:p>
           <a:p>
             <a:pPr lvl="2"/>
             <a:r>
-              <a:rPr lang="en-US" smtClean="0"/>
+              <a:rPr lang="en-US"/>
               <a:t>Third level</a:t>
             </a:r>
           </a:p>
           <a:p>
             <a:pPr lvl="3"/>
             <a:r>
-              <a:rPr lang="en-US" smtClean="0"/>
+              <a:rPr lang="en-US"/>
               <a:t>Fourth level</a:t>
             </a:r>
           </a:p>
           <a:p>
             <a:pPr lvl="4"/>
             <a:r>
-              <a:rPr lang="en-US" smtClean="0"/>
+              <a:rPr lang="en-US"/>
               <a:t>Fifth level</a:t>
             </a:r>
-            <a:endParaRPr lang="en-US"/>
           </a:p>
         </p:txBody>
       </p:sp>
@@ -1316,38 +1321,37 @@
           <a:p>
             <a:pPr lvl="0"/>
             <a:r>
-              <a:rPr lang="en-US" smtClean="0"/>
+              <a:rPr lang="en-US"/>
               <a:t>Click to edit Master text styles</a:t>
             </a:r>
           </a:p>
           <a:p>
             <a:pPr lvl="1"/>
             <a:r>
-              <a:rPr lang="en-US" smtClean="0"/>
+              <a:rPr lang="en-US"/>
               <a:t>Second level</a:t>
             </a:r>
           </a:p>
           <a:p>
             <a:pPr lvl="2"/>
             <a:r>
-              <a:rPr lang="en-US" smtClean="0"/>
+              <a:rPr lang="en-US"/>
               <a:t>Third level</a:t>
             </a:r>
           </a:p>
           <a:p>
             <a:pPr lvl="3"/>
             <a:r>
-              <a:rPr lang="en-US" smtClean="0"/>
+              <a:rPr lang="en-US"/>
               <a:t>Fourth level</a:t>
             </a:r>
           </a:p>
           <a:p>
             <a:pPr lvl="4"/>
             <a:r>
-              <a:rPr lang="en-US" smtClean="0"/>
+              <a:rPr lang="en-US"/>
               <a:t>Fifth level</a:t>
             </a:r>
-            <a:endParaRPr lang="en-US"/>
           </a:p>
         </p:txBody>
       </p:sp>
@@ -1368,7 +1372,7 @@
           <a:p>
             <a:fld id="{5BCAD085-E8A6-8845-BD4E-CB4CCA059FC4}" type="datetimeFigureOut">
               <a:rPr lang="en-US" smtClean="0"/>
-              <a:t>1/27/13</a:t>
+              <a:t>7/24/26</a:t>
             </a:fld>
             <a:endParaRPr lang="en-US"/>
           </a:p>
@@ -1466,10 +1470,9 @@
           </a:lstStyle>
           <a:p>
             <a:r>
-              <a:rPr lang="en-US" smtClean="0"/>
+              <a:rPr lang="en-US"/>
               <a:t>Click to edit Master title style</a:t>
             </a:r>
-            <a:endParaRPr lang="en-US"/>
           </a:p>
         </p:txBody>
       </p:sp>
@@ -1532,7 +1535,7 @@
           <a:p>
             <a:pPr lvl="0"/>
             <a:r>
-              <a:rPr lang="en-US" smtClean="0"/>
+              <a:rPr lang="en-US"/>
               <a:t>Click to edit Master text styles</a:t>
             </a:r>
           </a:p>
@@ -1588,38 +1591,37 @@
           <a:p>
             <a:pPr lvl="0"/>
             <a:r>
-              <a:rPr lang="en-US" smtClean="0"/>
+              <a:rPr lang="en-US"/>
               <a:t>Click to edit Master text styles</a:t>
             </a:r>
           </a:p>
           <a:p>
             <a:pPr lvl="1"/>
             <a:r>
-              <a:rPr lang="en-US" smtClean="0"/>
+              <a:rPr lang="en-US"/>
               <a:t>Second level</a:t>
             </a:r>
           </a:p>
           <a:p>
             <a:pPr lvl="2"/>
             <a:r>
-              <a:rPr lang="en-US" smtClean="0"/>
+              <a:rPr lang="en-US"/>
               <a:t>Third level</a:t>
             </a:r>
           </a:p>
           <a:p>
             <a:pPr lvl="3"/>
             <a:r>
-              <a:rPr lang="en-US" smtClean="0"/>
+              <a:rPr lang="en-US"/>
               <a:t>Fourth level</a:t>
             </a:r>
           </a:p>
           <a:p>
             <a:pPr lvl="4"/>
             <a:r>
-              <a:rPr lang="en-US" smtClean="0"/>
+              <a:rPr lang="en-US"/>
               <a:t>Fifth level</a:t>
             </a:r>
-            <a:endParaRPr lang="en-US"/>
           </a:p>
         </p:txBody>
       </p:sp>
@@ -1682,7 +1684,7 @@
           <a:p>
             <a:pPr lvl="0"/>
             <a:r>
-              <a:rPr lang="en-US" smtClean="0"/>
+              <a:rPr lang="en-US"/>
               <a:t>Click to edit Master text styles</a:t>
             </a:r>
           </a:p>
@@ -1738,38 +1740,37 @@
           <a:p>
             <a:pPr lvl="0"/>
             <a:r>
-              <a:rPr lang="en-US" smtClean="0"/>
+              <a:rPr lang="en-US"/>
               <a:t>Click to edit Master text styles</a:t>
             </a:r>
           </a:p>
           <a:p>
             <a:pPr lvl="1"/>
             <a:r>
-              <a:rPr lang="en-US" smtClean="0"/>
+              <a:rPr lang="en-US"/>
               <a:t>Second level</a:t>
             </a:r>
           </a:p>
           <a:p>
             <a:pPr lvl="2"/>
             <a:r>
-              <a:rPr lang="en-US" smtClean="0"/>
+              <a:rPr lang="en-US"/>
               <a:t>Third level</a:t>
             </a:r>
           </a:p>
           <a:p>
             <a:pPr lvl="3"/>
             <a:r>
-              <a:rPr lang="en-US" smtClean="0"/>
+              <a:rPr lang="en-US"/>
               <a:t>Fourth level</a:t>
             </a:r>
           </a:p>
           <a:p>
             <a:pPr lvl="4"/>
             <a:r>
-              <a:rPr lang="en-US" smtClean="0"/>
+              <a:rPr lang="en-US"/>
               <a:t>Fifth level</a:t>
             </a:r>
-            <a:endParaRPr lang="en-US"/>
           </a:p>
         </p:txBody>
       </p:sp>
@@ -1790,7 +1791,7 @@
           <a:p>
             <a:fld id="{5BCAD085-E8A6-8845-BD4E-CB4CCA059FC4}" type="datetimeFigureOut">
               <a:rPr lang="en-US" smtClean="0"/>
-              <a:t>1/27/13</a:t>
+              <a:t>7/24/26</a:t>
             </a:fld>
             <a:endParaRPr lang="en-US"/>
           </a:p>
@@ -1884,10 +1885,9 @@
           <a:lstStyle/>
           <a:p>
             <a:r>
-              <a:rPr lang="en-US" smtClean="0"/>
+              <a:rPr lang="en-US"/>
               <a:t>Click to edit Master title style</a:t>
             </a:r>
-            <a:endParaRPr lang="en-US"/>
           </a:p>
         </p:txBody>
       </p:sp>
@@ -1908,7 +1908,7 @@
           <a:p>
             <a:fld id="{5BCAD085-E8A6-8845-BD4E-CB4CCA059FC4}" type="datetimeFigureOut">
               <a:rPr lang="en-US" smtClean="0"/>
-              <a:t>1/27/13</a:t>
+              <a:t>7/24/26</a:t>
             </a:fld>
             <a:endParaRPr lang="en-US"/>
           </a:p>
@@ -2003,7 +2003,7 @@
           <a:p>
             <a:fld id="{5BCAD085-E8A6-8845-BD4E-CB4CCA059FC4}" type="datetimeFigureOut">
               <a:rPr lang="en-US" smtClean="0"/>
-              <a:t>1/27/13</a:t>
+              <a:t>7/24/26</a:t>
             </a:fld>
             <a:endParaRPr lang="en-US"/>
           </a:p>
@@ -2106,10 +2106,9 @@
           </a:lstStyle>
           <a:p>
             <a:r>
-              <a:rPr lang="en-US" smtClean="0"/>
+              <a:rPr lang="en-US"/>
               <a:t>Click to edit Master title style</a:t>
             </a:r>
-            <a:endParaRPr lang="en-US"/>
           </a:p>
         </p:txBody>
       </p:sp>
@@ -2163,38 +2162,37 @@
           <a:p>
             <a:pPr lvl="0"/>
             <a:r>
-              <a:rPr lang="en-US" smtClean="0"/>
+              <a:rPr lang="en-US"/>
               <a:t>Click to edit Master text styles</a:t>
             </a:r>
           </a:p>
           <a:p>
             <a:pPr lvl="1"/>
             <a:r>
-              <a:rPr lang="en-US" smtClean="0"/>
+              <a:rPr lang="en-US"/>
               <a:t>Second level</a:t>
             </a:r>
           </a:p>
           <a:p>
             <a:pPr lvl="2"/>
             <a:r>
-              <a:rPr lang="en-US" smtClean="0"/>
+              <a:rPr lang="en-US"/>
               <a:t>Third level</a:t>
             </a:r>
           </a:p>
           <a:p>
             <a:pPr lvl="3"/>
             <a:r>
-              <a:rPr lang="en-US" smtClean="0"/>
+              <a:rPr lang="en-US"/>
               <a:t>Fourth level</a:t>
             </a:r>
           </a:p>
           <a:p>
             <a:pPr lvl="4"/>
             <a:r>
-              <a:rPr lang="en-US" smtClean="0"/>
+              <a:rPr lang="en-US"/>
               <a:t>Fifth level</a:t>
             </a:r>
-            <a:endParaRPr lang="en-US"/>
           </a:p>
         </p:txBody>
       </p:sp>
@@ -2257,7 +2255,7 @@
           <a:p>
             <a:pPr lvl="0"/>
             <a:r>
-              <a:rPr lang="en-US" smtClean="0"/>
+              <a:rPr lang="en-US"/>
               <a:t>Click to edit Master text styles</a:t>
             </a:r>
           </a:p>
@@ -2280,7 +2278,7 @@
           <a:p>
             <a:fld id="{5BCAD085-E8A6-8845-BD4E-CB4CCA059FC4}" type="datetimeFigureOut">
               <a:rPr lang="en-US" smtClean="0"/>
-              <a:t>1/27/13</a:t>
+              <a:t>7/24/26</a:t>
             </a:fld>
             <a:endParaRPr lang="en-US"/>
           </a:p>
@@ -2383,10 +2381,9 @@
           </a:lstStyle>
           <a:p>
             <a:r>
-              <a:rPr lang="en-US" smtClean="0"/>
+              <a:rPr lang="en-US"/>
               <a:t>Click to edit Master title style</a:t>
             </a:r>
-            <a:endParaRPr lang="en-US"/>
           </a:p>
         </p:txBody>
       </p:sp>
@@ -2510,7 +2507,7 @@
           <a:p>
             <a:pPr lvl="0"/>
             <a:r>
-              <a:rPr lang="en-US" smtClean="0"/>
+              <a:rPr lang="en-US"/>
               <a:t>Click to edit Master text styles</a:t>
             </a:r>
           </a:p>
@@ -2533,7 +2530,7 @@
           <a:p>
             <a:fld id="{5BCAD085-E8A6-8845-BD4E-CB4CCA059FC4}" type="datetimeFigureOut">
               <a:rPr lang="en-US" smtClean="0"/>
-              <a:t>1/27/13</a:t>
+              <a:t>7/24/26</a:t>
             </a:fld>
             <a:endParaRPr lang="en-US"/>
           </a:p>
@@ -2642,10 +2639,9 @@
           <a:lstStyle/>
           <a:p>
             <a:r>
-              <a:rPr lang="en-US" smtClean="0"/>
+              <a:rPr lang="en-US"/>
               <a:t>Click to edit Master title style</a:t>
             </a:r>
-            <a:endParaRPr lang="en-US"/>
           </a:p>
         </p:txBody>
       </p:sp>
@@ -2676,38 +2672,37 @@
           <a:p>
             <a:pPr lvl="0"/>
             <a:r>
-              <a:rPr lang="en-US" smtClean="0"/>
+              <a:rPr lang="en-US"/>
               <a:t>Click to edit Master text styles</a:t>
             </a:r>
           </a:p>
           <a:p>
             <a:pPr lvl="1"/>
             <a:r>
-              <a:rPr lang="en-US" smtClean="0"/>
+              <a:rPr lang="en-US"/>
               <a:t>Second level</a:t>
             </a:r>
           </a:p>
           <a:p>
             <a:pPr lvl="2"/>
             <a:r>
-              <a:rPr lang="en-US" smtClean="0"/>
+              <a:rPr lang="en-US"/>
               <a:t>Third level</a:t>
             </a:r>
           </a:p>
           <a:p>
             <a:pPr lvl="3"/>
             <a:r>
-              <a:rPr lang="en-US" smtClean="0"/>
+              <a:rPr lang="en-US"/>
               <a:t>Fourth level</a:t>
             </a:r>
           </a:p>
           <a:p>
             <a:pPr lvl="4"/>
             <a:r>
-              <a:rPr lang="en-US" smtClean="0"/>
+              <a:rPr lang="en-US"/>
               <a:t>Fifth level</a:t>
             </a:r>
-            <a:endParaRPr lang="en-US"/>
           </a:p>
         </p:txBody>
       </p:sp>
@@ -2746,7 +2741,7 @@
           <a:p>
             <a:fld id="{5BCAD085-E8A6-8845-BD4E-CB4CCA059FC4}" type="datetimeFigureOut">
               <a:rPr lang="en-US" smtClean="0"/>
-              <a:t>1/27/13</a:t>
+              <a:t>7/24/26</a:t>
             </a:fld>
             <a:endParaRPr lang="en-US"/>
           </a:p>
@@ -3105,7 +3100,7 @@
 </file>
 
 <file path=ppt/slides/slide1.xml><?xml version="1.0" encoding="utf-8"?>
-<p:sld xmlns:a="http://schemas.openxmlformats.org/drawingml/2006/main" xmlns:p="http://schemas.openxmlformats.org/presentationml/2006/main" xmlns:r="http://schemas.openxmlformats.org/officeDocument/2006/relationships">
+<p:sld xmlns:a="http://schemas.openxmlformats.org/drawingml/2006/main" xmlns:r="http://schemas.openxmlformats.org/officeDocument/2006/relationships" xmlns:p="http://schemas.openxmlformats.org/presentationml/2006/main">
   <p:cSld>
     <p:bg>
       <p:bgPr>
@@ -3121,7 +3116,14 @@
         <p:cNvGrpSpPr/>
         <p:nvPr/>
       </p:nvGrpSpPr>
-      <p:grpSpPr/>
+      <p:grpSpPr>
+        <a:xfrm>
+          <a:off x="0" y="0"/>
+          <a:ext cx="0" cy="0"/>
+          <a:chOff x="0" y="0"/>
+          <a:chExt cx="0" cy="0"/>
+        </a:xfrm>
+      </p:grpSpPr>
       <p:sp>
         <p:nvSpPr>
           <p:cNvPr id="2" name="TextBox 1"/>
@@ -3234,6 +3236,7 @@
           <a:lstStyle/>
           <a:p>
             <a:pPr algn="ctr"/>
+            <a:endParaRPr/>
           </a:p>
         </p:txBody>
       </p:sp>
@@ -3345,7 +3348,7 @@
           </a:fontRef>
         </p:style>
         <p:txBody>
-          <a:bodyPr rtlCol="0" anchor="ctr" wrap="square"/>
+          <a:bodyPr wrap="square" rtlCol="0" anchor="ctr"/>
           <a:lstStyle/>
           <a:p>
             <a:pPr algn="ctr">
@@ -3402,7 +3405,7 @@
           </a:fontRef>
         </p:style>
         <p:txBody>
-          <a:bodyPr rtlCol="0" anchor="ctr" wrap="square"/>
+          <a:bodyPr wrap="square" rtlCol="0" anchor="ctr"/>
           <a:lstStyle/>
           <a:p>
             <a:pPr algn="ctr">
@@ -3459,7 +3462,7 @@
           </a:fontRef>
         </p:style>
         <p:txBody>
-          <a:bodyPr rtlCol="0" anchor="ctr" wrap="square"/>
+          <a:bodyPr wrap="square" rtlCol="0" anchor="ctr"/>
           <a:lstStyle/>
           <a:p>
             <a:pPr algn="ctr">
@@ -3516,7 +3519,7 @@
           </a:fontRef>
         </p:style>
         <p:txBody>
-          <a:bodyPr rtlCol="0" anchor="ctr" wrap="square"/>
+          <a:bodyPr wrap="square" rtlCol="0" anchor="ctr"/>
           <a:lstStyle/>
           <a:p>
             <a:pPr algn="ctr">
@@ -3573,7 +3576,7 @@
           </a:fontRef>
         </p:style>
         <p:txBody>
-          <a:bodyPr rtlCol="0" anchor="ctr" wrap="square"/>
+          <a:bodyPr wrap="square" rtlCol="0" anchor="ctr"/>
           <a:lstStyle/>
           <a:p>
             <a:pPr algn="ctr">
@@ -3630,7 +3633,7 @@
           </a:fontRef>
         </p:style>
         <p:txBody>
-          <a:bodyPr rtlCol="0" anchor="ctr" wrap="square"/>
+          <a:bodyPr wrap="square" rtlCol="0" anchor="ctr"/>
           <a:lstStyle/>
           <a:p>
             <a:pPr algn="ctr">
@@ -3660,7 +3663,7 @@
 </file>
 
 <file path=ppt/slides/slide10.xml><?xml version="1.0" encoding="utf-8"?>
-<p:sld xmlns:a="http://schemas.openxmlformats.org/drawingml/2006/main" xmlns:p="http://schemas.openxmlformats.org/presentationml/2006/main" xmlns:r="http://schemas.openxmlformats.org/officeDocument/2006/relationships">
+<p:sld xmlns:a="http://schemas.openxmlformats.org/drawingml/2006/main" xmlns:r="http://schemas.openxmlformats.org/officeDocument/2006/relationships" xmlns:p="http://schemas.openxmlformats.org/presentationml/2006/main">
   <p:cSld>
     <p:bg>
       <p:bgPr>
@@ -3676,7 +3679,14 @@
         <p:cNvGrpSpPr/>
         <p:nvPr/>
       </p:nvGrpSpPr>
-      <p:grpSpPr/>
+      <p:grpSpPr>
+        <a:xfrm>
+          <a:off x="0" y="0"/>
+          <a:ext cx="0" cy="0"/>
+          <a:chOff x="0" y="0"/>
+          <a:chExt cx="0" cy="0"/>
+        </a:xfrm>
+      </p:grpSpPr>
       <p:sp>
         <p:nvSpPr>
           <p:cNvPr id="2" name="Rounded Rectangle 1"/>
@@ -3717,6 +3727,7 @@
           <a:lstStyle/>
           <a:p>
             <a:pPr algn="ctr"/>
+            <a:endParaRPr/>
           </a:p>
         </p:txBody>
       </p:sp>
@@ -3870,6 +3881,7 @@
           <a:lstStyle/>
           <a:p>
             <a:pPr algn="ctr"/>
+            <a:endParaRPr/>
           </a:p>
         </p:txBody>
       </p:sp>
@@ -3974,6 +3986,7 @@
                 <a:latin typeface="Calibri"/>
               </a:defRPr>
             </a:pPr>
+            <a:endParaRPr/>
           </a:p>
           <a:p>
             <a:pPr>
@@ -4051,6 +4064,7 @@
                 <a:latin typeface="Calibri"/>
               </a:defRPr>
             </a:pPr>
+            <a:endParaRPr/>
           </a:p>
           <a:p>
             <a:pPr>
@@ -4128,6 +4142,7 @@
           <a:lstStyle/>
           <a:p>
             <a:pPr algn="ctr"/>
+            <a:endParaRPr/>
           </a:p>
         </p:txBody>
       </p:sp>
@@ -4264,6 +4279,7 @@
                 <a:latin typeface="Calibri"/>
               </a:defRPr>
             </a:pPr>
+            <a:endParaRPr/>
           </a:p>
           <a:p>
             <a:pPr>
@@ -4373,6 +4389,7 @@
           <a:lstStyle/>
           <a:p>
             <a:pPr algn="ctr"/>
+            <a:endParaRPr/>
           </a:p>
         </p:txBody>
       </p:sp>
@@ -4477,6 +4494,7 @@
                 <a:latin typeface="Calibri"/>
               </a:defRPr>
             </a:pPr>
+            <a:endParaRPr/>
           </a:p>
           <a:p>
             <a:pPr>
@@ -4538,6 +4556,7 @@
                 <a:latin typeface="Calibri"/>
               </a:defRPr>
             </a:pPr>
+            <a:endParaRPr/>
           </a:p>
           <a:p>
             <a:pPr>
@@ -4615,6 +4634,7 @@
           <a:lstStyle/>
           <a:p>
             <a:pPr algn="ctr"/>
+            <a:endParaRPr/>
           </a:p>
         </p:txBody>
       </p:sp>
@@ -4735,6 +4755,7 @@
                 <a:latin typeface="Calibri"/>
               </a:defRPr>
             </a:pPr>
+            <a:endParaRPr/>
           </a:p>
           <a:p>
             <a:pPr>
@@ -4763,7 +4784,7 @@
 </file>
 
 <file path=ppt/slides/slide11.xml><?xml version="1.0" encoding="utf-8"?>
-<p:sld xmlns:a="http://schemas.openxmlformats.org/drawingml/2006/main" xmlns:p="http://schemas.openxmlformats.org/presentationml/2006/main" xmlns:r="http://schemas.openxmlformats.org/officeDocument/2006/relationships">
+<p:sld xmlns:a="http://schemas.openxmlformats.org/drawingml/2006/main" xmlns:r="http://schemas.openxmlformats.org/officeDocument/2006/relationships" xmlns:p="http://schemas.openxmlformats.org/presentationml/2006/main">
   <p:cSld>
     <p:bg>
       <p:bgPr>
@@ -4779,7 +4800,14 @@
         <p:cNvGrpSpPr/>
         <p:nvPr/>
       </p:nvGrpSpPr>
-      <p:grpSpPr/>
+      <p:grpSpPr>
+        <a:xfrm>
+          <a:off x="0" y="0"/>
+          <a:ext cx="0" cy="0"/>
+          <a:chOff x="0" y="0"/>
+          <a:chExt cx="0" cy="0"/>
+        </a:xfrm>
+      </p:grpSpPr>
       <p:sp>
         <p:nvSpPr>
           <p:cNvPr id="2" name="Oval 1"/>
@@ -4816,7 +4844,7 @@
           </a:fontRef>
         </p:style>
         <p:txBody>
-          <a:bodyPr rtlCol="0" anchor="ctr" wrap="square"/>
+          <a:bodyPr wrap="square" rtlCol="0" anchor="ctr"/>
           <a:lstStyle/>
           <a:p>
             <a:pPr algn="ctr">
@@ -4920,7 +4948,7 @@
 </file>
 
 <file path=ppt/slides/slide12.xml><?xml version="1.0" encoding="utf-8"?>
-<p:sld xmlns:a="http://schemas.openxmlformats.org/drawingml/2006/main" xmlns:p="http://schemas.openxmlformats.org/presentationml/2006/main" xmlns:r="http://schemas.openxmlformats.org/officeDocument/2006/relationships">
+<p:sld xmlns:a="http://schemas.openxmlformats.org/drawingml/2006/main" xmlns:r="http://schemas.openxmlformats.org/officeDocument/2006/relationships" xmlns:p="http://schemas.openxmlformats.org/presentationml/2006/main">
   <p:cSld>
     <p:bg>
       <p:bgPr>
@@ -4936,7 +4964,14 @@
         <p:cNvGrpSpPr/>
         <p:nvPr/>
       </p:nvGrpSpPr>
-      <p:grpSpPr/>
+      <p:grpSpPr>
+        <a:xfrm>
+          <a:off x="0" y="0"/>
+          <a:ext cx="0" cy="0"/>
+          <a:chOff x="0" y="0"/>
+          <a:chExt cx="0" cy="0"/>
+        </a:xfrm>
+      </p:grpSpPr>
       <p:sp>
         <p:nvSpPr>
           <p:cNvPr id="2" name="Rounded Rectangle 1"/>
@@ -4977,6 +5012,7 @@
           <a:lstStyle/>
           <a:p>
             <a:pPr algn="ctr"/>
+            <a:endParaRPr/>
           </a:p>
         </p:txBody>
       </p:sp>
@@ -5094,6 +5130,7 @@
           <a:lstStyle/>
           <a:p>
             <a:pPr algn="ctr"/>
+            <a:endParaRPr/>
           </a:p>
         </p:txBody>
       </p:sp>
@@ -5240,7 +5277,7 @@
           </a:fontRef>
         </p:style>
         <p:txBody>
-          <a:bodyPr rtlCol="0" anchor="ctr" wrap="square"/>
+          <a:bodyPr wrap="square" rtlCol="0" anchor="ctr"/>
           <a:lstStyle/>
           <a:p>
             <a:pPr algn="ctr">
@@ -5341,6 +5378,7 @@
           <a:lstStyle/>
           <a:p>
             <a:pPr algn="ctr"/>
+            <a:endParaRPr/>
           </a:p>
         </p:txBody>
       </p:sp>
@@ -5380,7 +5418,7 @@
           </a:fontRef>
         </p:style>
         <p:txBody>
-          <a:bodyPr rtlCol="0" anchor="ctr" wrap="square"/>
+          <a:bodyPr wrap="square" rtlCol="0" anchor="ctr"/>
           <a:lstStyle/>
           <a:p>
             <a:pPr algn="ctr">
@@ -5481,6 +5519,7 @@
           <a:lstStyle/>
           <a:p>
             <a:pPr algn="ctr"/>
+            <a:endParaRPr/>
           </a:p>
         </p:txBody>
       </p:sp>
@@ -5520,7 +5559,7 @@
           </a:fontRef>
         </p:style>
         <p:txBody>
-          <a:bodyPr rtlCol="0" anchor="ctr" wrap="square"/>
+          <a:bodyPr wrap="square" rtlCol="0" anchor="ctr"/>
           <a:lstStyle/>
           <a:p>
             <a:pPr algn="ctr">
@@ -5621,6 +5660,7 @@
           <a:lstStyle/>
           <a:p>
             <a:pPr algn="ctr"/>
+            <a:endParaRPr/>
           </a:p>
         </p:txBody>
       </p:sp>
@@ -5660,7 +5700,7 @@
           </a:fontRef>
         </p:style>
         <p:txBody>
-          <a:bodyPr rtlCol="0" anchor="ctr" wrap="square"/>
+          <a:bodyPr wrap="square" rtlCol="0" anchor="ctr"/>
           <a:lstStyle/>
           <a:p>
             <a:pPr algn="ctr">
@@ -5763,6 +5803,7 @@
           <a:lstStyle/>
           <a:p>
             <a:pPr algn="ctr"/>
+            <a:endParaRPr/>
           </a:p>
         </p:txBody>
       </p:sp>
@@ -5883,6 +5924,7 @@
                 <a:latin typeface="Courier New"/>
               </a:defRPr>
             </a:pPr>
+            <a:endParaRPr/>
           </a:p>
           <a:p>
             <a:pPr>
@@ -5944,6 +5986,7 @@
           <a:lstStyle/>
           <a:p>
             <a:pPr algn="ctr"/>
+            <a:endParaRPr/>
           </a:p>
         </p:txBody>
       </p:sp>
@@ -6080,6 +6123,7 @@
                 <a:latin typeface="Courier New"/>
               </a:defRPr>
             </a:pPr>
+            <a:endParaRPr/>
           </a:p>
           <a:p>
             <a:pPr>
@@ -6108,7 +6152,7 @@
 </file>
 
 <file path=ppt/slides/slide13.xml><?xml version="1.0" encoding="utf-8"?>
-<p:sld xmlns:a="http://schemas.openxmlformats.org/drawingml/2006/main" xmlns:p="http://schemas.openxmlformats.org/presentationml/2006/main" xmlns:r="http://schemas.openxmlformats.org/officeDocument/2006/relationships">
+<p:sld xmlns:a="http://schemas.openxmlformats.org/drawingml/2006/main" xmlns:r="http://schemas.openxmlformats.org/officeDocument/2006/relationships" xmlns:p="http://schemas.openxmlformats.org/presentationml/2006/main">
   <p:cSld>
     <p:bg>
       <p:bgPr>
@@ -6124,7 +6168,14 @@
         <p:cNvGrpSpPr/>
         <p:nvPr/>
       </p:nvGrpSpPr>
-      <p:grpSpPr/>
+      <p:grpSpPr>
+        <a:xfrm>
+          <a:off x="0" y="0"/>
+          <a:ext cx="0" cy="0"/>
+          <a:chOff x="0" y="0"/>
+          <a:chExt cx="0" cy="0"/>
+        </a:xfrm>
+      </p:grpSpPr>
       <p:sp>
         <p:nvSpPr>
           <p:cNvPr id="2" name="Rounded Rectangle 1"/>
@@ -6165,6 +6216,7 @@
           <a:lstStyle/>
           <a:p>
             <a:pPr algn="ctr"/>
+            <a:endParaRPr/>
           </a:p>
         </p:txBody>
       </p:sp>
@@ -6312,7 +6364,7 @@
           </a:fontRef>
         </p:style>
         <p:txBody>
-          <a:bodyPr rtlCol="0" anchor="ctr" wrap="square"/>
+          <a:bodyPr wrap="square" rtlCol="0" anchor="ctr"/>
           <a:lstStyle/>
           <a:p>
             <a:pPr algn="ctr">
@@ -6411,6 +6463,7 @@
           <a:lstStyle/>
           <a:p>
             <a:pPr algn="ctr"/>
+            <a:endParaRPr/>
           </a:p>
         </p:txBody>
       </p:sp>
@@ -6494,7 +6547,7 @@
           </a:fontRef>
         </p:style>
         <p:txBody>
-          <a:bodyPr rtlCol="0" anchor="ctr" wrap="square"/>
+          <a:bodyPr wrap="square" rtlCol="0" anchor="ctr"/>
           <a:lstStyle/>
           <a:p>
             <a:pPr algn="ctr">
@@ -6547,7 +6600,7 @@
           </a:fontRef>
         </p:style>
         <p:txBody>
-          <a:bodyPr rtlCol="0" anchor="ctr" wrap="square"/>
+          <a:bodyPr wrap="square" rtlCol="0" anchor="ctr"/>
           <a:lstStyle/>
           <a:p>
             <a:pPr algn="ctr">
@@ -6646,6 +6699,7 @@
           <a:lstStyle/>
           <a:p>
             <a:pPr algn="ctr"/>
+            <a:endParaRPr/>
           </a:p>
         </p:txBody>
       </p:sp>
@@ -6729,7 +6783,7 @@
           </a:fontRef>
         </p:style>
         <p:txBody>
-          <a:bodyPr rtlCol="0" anchor="ctr" wrap="square"/>
+          <a:bodyPr wrap="square" rtlCol="0" anchor="ctr"/>
           <a:lstStyle/>
           <a:p>
             <a:pPr algn="ctr">
@@ -6782,7 +6836,7 @@
           </a:fontRef>
         </p:style>
         <p:txBody>
-          <a:bodyPr rtlCol="0" anchor="ctr" wrap="square"/>
+          <a:bodyPr wrap="square" rtlCol="0" anchor="ctr"/>
           <a:lstStyle/>
           <a:p>
             <a:pPr algn="ctr">
@@ -6885,6 +6939,7 @@
           <a:lstStyle/>
           <a:p>
             <a:pPr algn="ctr"/>
+            <a:endParaRPr/>
           </a:p>
         </p:txBody>
       </p:sp>
@@ -6968,7 +7023,7 @@
           </a:fontRef>
         </p:style>
         <p:txBody>
-          <a:bodyPr rtlCol="0" anchor="ctr" wrap="square"/>
+          <a:bodyPr wrap="square" rtlCol="0" anchor="ctr"/>
           <a:lstStyle/>
           <a:p>
             <a:pPr algn="ctr">
@@ -7021,7 +7076,7 @@
           </a:fontRef>
         </p:style>
         <p:txBody>
-          <a:bodyPr rtlCol="0" anchor="ctr" wrap="square"/>
+          <a:bodyPr wrap="square" rtlCol="0" anchor="ctr"/>
           <a:lstStyle/>
           <a:p>
             <a:pPr algn="ctr">
@@ -7120,6 +7175,7 @@
           <a:lstStyle/>
           <a:p>
             <a:pPr algn="ctr"/>
+            <a:endParaRPr/>
           </a:p>
         </p:txBody>
       </p:sp>
@@ -7203,7 +7259,7 @@
           </a:fontRef>
         </p:style>
         <p:txBody>
-          <a:bodyPr rtlCol="0" anchor="ctr" wrap="square"/>
+          <a:bodyPr wrap="square" rtlCol="0" anchor="ctr"/>
           <a:lstStyle/>
           <a:p>
             <a:pPr algn="ctr">
@@ -7262,6 +7318,7 @@
           <a:lstStyle/>
           <a:p>
             <a:pPr algn="ctr"/>
+            <a:endParaRPr/>
           </a:p>
         </p:txBody>
       </p:sp>
@@ -7398,6 +7455,7 @@
                 <a:latin typeface="Calibri"/>
               </a:defRPr>
             </a:pPr>
+            <a:endParaRPr/>
           </a:p>
           <a:p>
             <a:pPr>
@@ -7426,7 +7484,7 @@
 </file>
 
 <file path=ppt/slides/slide14.xml><?xml version="1.0" encoding="utf-8"?>
-<p:sld xmlns:a="http://schemas.openxmlformats.org/drawingml/2006/main" xmlns:p="http://schemas.openxmlformats.org/presentationml/2006/main" xmlns:r="http://schemas.openxmlformats.org/officeDocument/2006/relationships">
+<p:sld xmlns:a="http://schemas.openxmlformats.org/drawingml/2006/main" xmlns:r="http://schemas.openxmlformats.org/officeDocument/2006/relationships" xmlns:p="http://schemas.openxmlformats.org/presentationml/2006/main">
   <p:cSld>
     <p:bg>
       <p:bgPr>
@@ -7442,7 +7500,14 @@
         <p:cNvGrpSpPr/>
         <p:nvPr/>
       </p:nvGrpSpPr>
-      <p:grpSpPr/>
+      <p:grpSpPr>
+        <a:xfrm>
+          <a:off x="0" y="0"/>
+          <a:ext cx="0" cy="0"/>
+          <a:chOff x="0" y="0"/>
+          <a:chExt cx="0" cy="0"/>
+        </a:xfrm>
+      </p:grpSpPr>
       <p:sp>
         <p:nvSpPr>
           <p:cNvPr id="2" name="Rounded Rectangle 1"/>
@@ -7483,6 +7548,7 @@
           <a:lstStyle/>
           <a:p>
             <a:pPr algn="ctr"/>
+            <a:endParaRPr/>
           </a:p>
         </p:txBody>
       </p:sp>
@@ -7634,6 +7700,7 @@
           <a:lstStyle/>
           <a:p>
             <a:pPr algn="ctr"/>
+            <a:endParaRPr/>
           </a:p>
         </p:txBody>
       </p:sp>
@@ -7686,6 +7753,7 @@
                 <a:latin typeface="Courier New"/>
               </a:defRPr>
             </a:pPr>
+            <a:endParaRPr/>
           </a:p>
           <a:p>
             <a:pPr>
@@ -7795,6 +7863,7 @@
                 <a:latin typeface="Courier New"/>
               </a:defRPr>
             </a:pPr>
+            <a:endParaRPr/>
           </a:p>
           <a:p>
             <a:pPr>
@@ -7888,6 +7957,7 @@
                 <a:latin typeface="Courier New"/>
               </a:defRPr>
             </a:pPr>
+            <a:endParaRPr/>
           </a:p>
           <a:p>
             <a:pPr>
@@ -7981,6 +8051,7 @@
                 <a:latin typeface="Courier New"/>
               </a:defRPr>
             </a:pPr>
+            <a:endParaRPr/>
           </a:p>
           <a:p>
             <a:pPr>
@@ -8042,6 +8113,7 @@
                 <a:latin typeface="Courier New"/>
               </a:defRPr>
             </a:pPr>
+            <a:endParaRPr/>
           </a:p>
           <a:p>
             <a:pPr>
@@ -8245,7 +8317,7 @@
           </a:fontRef>
         </p:style>
         <p:txBody>
-          <a:bodyPr rtlCol="0" anchor="ctr" wrap="square"/>
+          <a:bodyPr wrap="square" rtlCol="0" anchor="ctr"/>
           <a:lstStyle/>
           <a:p>
             <a:pPr algn="ctr">
@@ -8346,7 +8418,7 @@
           </a:fontRef>
         </p:style>
         <p:txBody>
-          <a:bodyPr rtlCol="0" anchor="ctr" wrap="square"/>
+          <a:bodyPr wrap="square" rtlCol="0" anchor="ctr"/>
           <a:lstStyle/>
           <a:p>
             <a:pPr algn="ctr">
@@ -8447,7 +8519,7 @@
           </a:fontRef>
         </p:style>
         <p:txBody>
-          <a:bodyPr rtlCol="0" anchor="ctr" wrap="square"/>
+          <a:bodyPr wrap="square" rtlCol="0" anchor="ctr"/>
           <a:lstStyle/>
           <a:p>
             <a:pPr algn="ctr">
@@ -8554,6 +8626,7 @@
           <a:lstStyle/>
           <a:p>
             <a:pPr algn="ctr"/>
+            <a:endParaRPr/>
           </a:p>
         </p:txBody>
       </p:sp>
@@ -8602,7 +8675,7 @@
 </file>
 
 <file path=ppt/slides/slide15.xml><?xml version="1.0" encoding="utf-8"?>
-<p:sld xmlns:a="http://schemas.openxmlformats.org/drawingml/2006/main" xmlns:p="http://schemas.openxmlformats.org/presentationml/2006/main" xmlns:r="http://schemas.openxmlformats.org/officeDocument/2006/relationships">
+<p:sld xmlns:a="http://schemas.openxmlformats.org/drawingml/2006/main" xmlns:r="http://schemas.openxmlformats.org/officeDocument/2006/relationships" xmlns:p="http://schemas.openxmlformats.org/presentationml/2006/main">
   <p:cSld>
     <p:bg>
       <p:bgPr>
@@ -8618,7 +8691,14 @@
         <p:cNvGrpSpPr/>
         <p:nvPr/>
       </p:nvGrpSpPr>
-      <p:grpSpPr/>
+      <p:grpSpPr>
+        <a:xfrm>
+          <a:off x="0" y="0"/>
+          <a:ext cx="0" cy="0"/>
+          <a:chOff x="0" y="0"/>
+          <a:chExt cx="0" cy="0"/>
+        </a:xfrm>
+      </p:grpSpPr>
       <p:sp>
         <p:nvSpPr>
           <p:cNvPr id="2" name="Oval 1"/>
@@ -8655,7 +8735,7 @@
           </a:fontRef>
         </p:style>
         <p:txBody>
-          <a:bodyPr rtlCol="0" anchor="ctr" wrap="square"/>
+          <a:bodyPr wrap="square" rtlCol="0" anchor="ctr"/>
           <a:lstStyle/>
           <a:p>
             <a:pPr algn="ctr">
@@ -8759,7 +8839,7 @@
 </file>
 
 <file path=ppt/slides/slide16.xml><?xml version="1.0" encoding="utf-8"?>
-<p:sld xmlns:a="http://schemas.openxmlformats.org/drawingml/2006/main" xmlns:p="http://schemas.openxmlformats.org/presentationml/2006/main" xmlns:r="http://schemas.openxmlformats.org/officeDocument/2006/relationships">
+<p:sld xmlns:a="http://schemas.openxmlformats.org/drawingml/2006/main" xmlns:r="http://schemas.openxmlformats.org/officeDocument/2006/relationships" xmlns:p="http://schemas.openxmlformats.org/presentationml/2006/main">
   <p:cSld>
     <p:bg>
       <p:bgPr>
@@ -8775,7 +8855,14 @@
         <p:cNvGrpSpPr/>
         <p:nvPr/>
       </p:nvGrpSpPr>
-      <p:grpSpPr/>
+      <p:grpSpPr>
+        <a:xfrm>
+          <a:off x="0" y="0"/>
+          <a:ext cx="0" cy="0"/>
+          <a:chOff x="0" y="0"/>
+          <a:chExt cx="0" cy="0"/>
+        </a:xfrm>
+      </p:grpSpPr>
       <p:sp>
         <p:nvSpPr>
           <p:cNvPr id="2" name="Rounded Rectangle 1"/>
@@ -8816,6 +8903,7 @@
           <a:lstStyle/>
           <a:p>
             <a:pPr algn="ctr"/>
+            <a:endParaRPr/>
           </a:p>
         </p:txBody>
       </p:sp>
@@ -8969,6 +9057,7 @@
           <a:lstStyle/>
           <a:p>
             <a:pPr algn="ctr"/>
+            <a:endParaRPr/>
           </a:p>
         </p:txBody>
       </p:sp>
@@ -9057,6 +9146,7 @@
                 <a:latin typeface="Calibri"/>
               </a:defRPr>
             </a:pPr>
+            <a:endParaRPr/>
           </a:p>
           <a:p>
             <a:pPr>
@@ -9134,6 +9224,7 @@
                 <a:latin typeface="Calibri"/>
               </a:defRPr>
             </a:pPr>
+            <a:endParaRPr/>
           </a:p>
           <a:p>
             <a:pPr>
@@ -9179,6 +9270,7 @@
                 <a:latin typeface="Calibri"/>
               </a:defRPr>
             </a:pPr>
+            <a:endParaRPr/>
           </a:p>
           <a:p>
             <a:pPr>
@@ -9240,6 +9332,7 @@
           <a:lstStyle/>
           <a:p>
             <a:pPr algn="ctr"/>
+            <a:endParaRPr/>
           </a:p>
         </p:txBody>
       </p:sp>
@@ -9328,6 +9421,7 @@
                 <a:latin typeface="Calibri"/>
               </a:defRPr>
             </a:pPr>
+            <a:endParaRPr/>
           </a:p>
           <a:p>
             <a:pPr>
@@ -9405,6 +9499,7 @@
                 <a:latin typeface="Calibri"/>
               </a:defRPr>
             </a:pPr>
+            <a:endParaRPr/>
           </a:p>
           <a:p>
             <a:pPr>
@@ -9450,6 +9545,7 @@
                 <a:latin typeface="Calibri"/>
               </a:defRPr>
             </a:pPr>
+            <a:endParaRPr/>
           </a:p>
           <a:p>
             <a:pPr>
@@ -9511,6 +9607,7 @@
           <a:lstStyle/>
           <a:p>
             <a:pPr algn="ctr"/>
+            <a:endParaRPr/>
           </a:p>
         </p:txBody>
       </p:sp>
@@ -9615,6 +9712,7 @@
                 <a:latin typeface="Calibri"/>
               </a:defRPr>
             </a:pPr>
+            <a:endParaRPr/>
           </a:p>
           <a:p>
             <a:pPr>
@@ -9659,7 +9757,7 @@
 </file>
 
 <file path=ppt/slides/slide17.xml><?xml version="1.0" encoding="utf-8"?>
-<p:sld xmlns:a="http://schemas.openxmlformats.org/drawingml/2006/main" xmlns:p="http://schemas.openxmlformats.org/presentationml/2006/main" xmlns:r="http://schemas.openxmlformats.org/officeDocument/2006/relationships">
+<p:sld xmlns:a="http://schemas.openxmlformats.org/drawingml/2006/main" xmlns:r="http://schemas.openxmlformats.org/officeDocument/2006/relationships" xmlns:p="http://schemas.openxmlformats.org/presentationml/2006/main">
   <p:cSld>
     <p:bg>
       <p:bgPr>
@@ -9675,7 +9773,14 @@
         <p:cNvGrpSpPr/>
         <p:nvPr/>
       </p:nvGrpSpPr>
-      <p:grpSpPr/>
+      <p:grpSpPr>
+        <a:xfrm>
+          <a:off x="0" y="0"/>
+          <a:ext cx="0" cy="0"/>
+          <a:chOff x="0" y="0"/>
+          <a:chExt cx="0" cy="0"/>
+        </a:xfrm>
+      </p:grpSpPr>
       <p:sp>
         <p:nvSpPr>
           <p:cNvPr id="2" name="Rounded Rectangle 1"/>
@@ -9716,6 +9821,7 @@
           <a:lstStyle/>
           <a:p>
             <a:pPr algn="ctr"/>
+            <a:endParaRPr/>
           </a:p>
         </p:txBody>
       </p:sp>
@@ -9863,7 +9969,7 @@
           </a:fontRef>
         </p:style>
         <p:txBody>
-          <a:bodyPr rtlCol="0" anchor="ctr" wrap="square"/>
+          <a:bodyPr wrap="square" rtlCol="0" anchor="ctr"/>
           <a:lstStyle/>
           <a:p>
             <a:pPr algn="ctr">
@@ -9924,6 +10030,7 @@
           <a:lstStyle/>
           <a:p>
             <a:pPr algn="ctr"/>
+            <a:endParaRPr/>
           </a:p>
         </p:txBody>
       </p:sp>
@@ -9963,7 +10070,7 @@
           </a:fontRef>
         </p:style>
         <p:txBody>
-          <a:bodyPr rtlCol="0" anchor="ctr" wrap="square"/>
+          <a:bodyPr wrap="square" rtlCol="0" anchor="ctr"/>
           <a:lstStyle/>
           <a:p>
             <a:pPr algn="ctr">
@@ -10024,6 +10131,7 @@
           <a:lstStyle/>
           <a:p>
             <a:pPr algn="ctr"/>
+            <a:endParaRPr/>
           </a:p>
         </p:txBody>
       </p:sp>
@@ -10063,7 +10171,7 @@
           </a:fontRef>
         </p:style>
         <p:txBody>
-          <a:bodyPr rtlCol="0" anchor="ctr" wrap="square"/>
+          <a:bodyPr wrap="square" rtlCol="0" anchor="ctr"/>
           <a:lstStyle/>
           <a:p>
             <a:pPr algn="ctr">
@@ -10124,6 +10232,7 @@
           <a:lstStyle/>
           <a:p>
             <a:pPr algn="ctr"/>
+            <a:endParaRPr/>
           </a:p>
         </p:txBody>
       </p:sp>
@@ -10163,7 +10272,7 @@
           </a:fontRef>
         </p:style>
         <p:txBody>
-          <a:bodyPr rtlCol="0" anchor="ctr" wrap="square"/>
+          <a:bodyPr wrap="square" rtlCol="0" anchor="ctr"/>
           <a:lstStyle/>
           <a:p>
             <a:pPr algn="ctr">
@@ -10224,6 +10333,7 @@
           <a:lstStyle/>
           <a:p>
             <a:pPr algn="ctr"/>
+            <a:endParaRPr/>
           </a:p>
         </p:txBody>
       </p:sp>
@@ -10263,7 +10373,7 @@
           </a:fontRef>
         </p:style>
         <p:txBody>
-          <a:bodyPr rtlCol="0" anchor="ctr" wrap="square"/>
+          <a:bodyPr wrap="square" rtlCol="0" anchor="ctr"/>
           <a:lstStyle/>
           <a:p>
             <a:pPr algn="ctr">
@@ -10360,6 +10470,7 @@
           <a:lstStyle/>
           <a:p>
             <a:pPr algn="ctr"/>
+            <a:endParaRPr/>
           </a:p>
         </p:txBody>
       </p:sp>
@@ -10412,6 +10523,7 @@
                 <a:latin typeface="Courier New"/>
               </a:defRPr>
             </a:pPr>
+            <a:endParaRPr/>
           </a:p>
           <a:p>
             <a:pPr>
@@ -10473,6 +10585,7 @@
                 <a:latin typeface="Courier New"/>
               </a:defRPr>
             </a:pPr>
+            <a:endParaRPr/>
           </a:p>
           <a:p>
             <a:pPr>
@@ -10534,6 +10647,7 @@
                 <a:latin typeface="Courier New"/>
               </a:defRPr>
             </a:pPr>
+            <a:endParaRPr/>
           </a:p>
           <a:p>
             <a:pPr>
@@ -10753,7 +10867,7 @@
           </a:fontRef>
         </p:style>
         <p:txBody>
-          <a:bodyPr rtlCol="0" anchor="ctr" wrap="square"/>
+          <a:bodyPr wrap="square" rtlCol="0" anchor="ctr"/>
           <a:lstStyle/>
           <a:p>
             <a:pPr algn="ctr">
@@ -10850,7 +10964,7 @@
           </a:fontRef>
         </p:style>
         <p:txBody>
-          <a:bodyPr rtlCol="0" anchor="ctr" wrap="square"/>
+          <a:bodyPr wrap="square" rtlCol="0" anchor="ctr"/>
           <a:lstStyle/>
           <a:p>
             <a:pPr algn="ctr">
@@ -10947,7 +11061,7 @@
           </a:fontRef>
         </p:style>
         <p:txBody>
-          <a:bodyPr rtlCol="0" anchor="ctr" wrap="square"/>
+          <a:bodyPr wrap="square" rtlCol="0" anchor="ctr"/>
           <a:lstStyle/>
           <a:p>
             <a:pPr algn="ctr">
@@ -11021,7 +11135,7 @@
 </file>
 
 <file path=ppt/slides/slide18.xml><?xml version="1.0" encoding="utf-8"?>
-<p:sld xmlns:a="http://schemas.openxmlformats.org/drawingml/2006/main" xmlns:p="http://schemas.openxmlformats.org/presentationml/2006/main" xmlns:r="http://schemas.openxmlformats.org/officeDocument/2006/relationships">
+<p:sld xmlns:a="http://schemas.openxmlformats.org/drawingml/2006/main" xmlns:r="http://schemas.openxmlformats.org/officeDocument/2006/relationships" xmlns:p="http://schemas.openxmlformats.org/presentationml/2006/main">
   <p:cSld>
     <p:bg>
       <p:bgPr>
@@ -11037,7 +11151,14 @@
         <p:cNvGrpSpPr/>
         <p:nvPr/>
       </p:nvGrpSpPr>
-      <p:grpSpPr/>
+      <p:grpSpPr>
+        <a:xfrm>
+          <a:off x="0" y="0"/>
+          <a:ext cx="0" cy="0"/>
+          <a:chOff x="0" y="0"/>
+          <a:chExt cx="0" cy="0"/>
+        </a:xfrm>
+      </p:grpSpPr>
       <p:sp>
         <p:nvSpPr>
           <p:cNvPr id="2" name="Rounded Rectangle 1"/>
@@ -11078,6 +11199,7 @@
           <a:lstStyle/>
           <a:p>
             <a:pPr algn="ctr"/>
+            <a:endParaRPr/>
           </a:p>
         </p:txBody>
       </p:sp>
@@ -11195,6 +11317,7 @@
           <a:lstStyle/>
           <a:p>
             <a:pPr algn="ctr"/>
+            <a:endParaRPr/>
           </a:p>
         </p:txBody>
       </p:sp>
@@ -11267,6 +11390,7 @@
                 <a:latin typeface="Calibri"/>
               </a:defRPr>
             </a:pPr>
+            <a:endParaRPr/>
           </a:p>
           <a:p>
             <a:pPr>
@@ -11344,6 +11468,7 @@
                 <a:latin typeface="Calibri"/>
               </a:defRPr>
             </a:pPr>
+            <a:endParaRPr/>
           </a:p>
           <a:p>
             <a:pPr>
@@ -11421,6 +11546,7 @@
                 <a:latin typeface="Calibri"/>
               </a:defRPr>
             </a:pPr>
+            <a:endParaRPr/>
           </a:p>
           <a:p>
             <a:pPr>
@@ -11482,6 +11608,7 @@
                 <a:latin typeface="Calibri"/>
               </a:defRPr>
             </a:pPr>
+            <a:endParaRPr/>
           </a:p>
           <a:p>
             <a:pPr>
@@ -11526,7 +11653,7 @@
 </file>
 
 <file path=ppt/slides/slide19.xml><?xml version="1.0" encoding="utf-8"?>
-<p:sld xmlns:a="http://schemas.openxmlformats.org/drawingml/2006/main" xmlns:p="http://schemas.openxmlformats.org/presentationml/2006/main" xmlns:r="http://schemas.openxmlformats.org/officeDocument/2006/relationships">
+<p:sld xmlns:a="http://schemas.openxmlformats.org/drawingml/2006/main" xmlns:r="http://schemas.openxmlformats.org/officeDocument/2006/relationships" xmlns:p="http://schemas.openxmlformats.org/presentationml/2006/main">
   <p:cSld>
     <p:bg>
       <p:bgPr>
@@ -11542,7 +11669,14 @@
         <p:cNvGrpSpPr/>
         <p:nvPr/>
       </p:nvGrpSpPr>
-      <p:grpSpPr/>
+      <p:grpSpPr>
+        <a:xfrm>
+          <a:off x="0" y="0"/>
+          <a:ext cx="0" cy="0"/>
+          <a:chOff x="0" y="0"/>
+          <a:chExt cx="0" cy="0"/>
+        </a:xfrm>
+      </p:grpSpPr>
       <p:sp>
         <p:nvSpPr>
           <p:cNvPr id="2" name="Oval 1"/>
@@ -11579,7 +11713,7 @@
           </a:fontRef>
         </p:style>
         <p:txBody>
-          <a:bodyPr rtlCol="0" anchor="ctr" wrap="square"/>
+          <a:bodyPr wrap="square" rtlCol="0" anchor="ctr"/>
           <a:lstStyle/>
           <a:p>
             <a:pPr algn="ctr">
@@ -11683,7 +11817,7 @@
 </file>
 
 <file path=ppt/slides/slide2.xml><?xml version="1.0" encoding="utf-8"?>
-<p:sld xmlns:a="http://schemas.openxmlformats.org/drawingml/2006/main" xmlns:p="http://schemas.openxmlformats.org/presentationml/2006/main" xmlns:r="http://schemas.openxmlformats.org/officeDocument/2006/relationships">
+<p:sld xmlns:a="http://schemas.openxmlformats.org/drawingml/2006/main" xmlns:r="http://schemas.openxmlformats.org/officeDocument/2006/relationships" xmlns:p="http://schemas.openxmlformats.org/presentationml/2006/main">
   <p:cSld>
     <p:bg>
       <p:bgPr>
@@ -11699,7 +11833,14 @@
         <p:cNvGrpSpPr/>
         <p:nvPr/>
       </p:nvGrpSpPr>
-      <p:grpSpPr/>
+      <p:grpSpPr>
+        <a:xfrm>
+          <a:off x="0" y="0"/>
+          <a:ext cx="0" cy="0"/>
+          <a:chOff x="0" y="0"/>
+          <a:chExt cx="0" cy="0"/>
+        </a:xfrm>
+      </p:grpSpPr>
       <p:sp>
         <p:nvSpPr>
           <p:cNvPr id="2" name="Rounded Rectangle 1"/>
@@ -11740,6 +11881,7 @@
           <a:lstStyle/>
           <a:p>
             <a:pPr algn="ctr"/>
+            <a:endParaRPr/>
           </a:p>
         </p:txBody>
       </p:sp>
@@ -11815,7 +11957,7 @@
           </a:fontRef>
         </p:style>
         <p:txBody>
-          <a:bodyPr rtlCol="0" anchor="ctr" wrap="square"/>
+          <a:bodyPr wrap="square" rtlCol="0" anchor="ctr"/>
           <a:lstStyle/>
           <a:p>
             <a:pPr algn="ctr">
@@ -11876,6 +12018,7 @@
           <a:lstStyle/>
           <a:p>
             <a:pPr algn="ctr"/>
+            <a:endParaRPr/>
           </a:p>
         </p:txBody>
       </p:sp>
@@ -11915,7 +12058,7 @@
           </a:fontRef>
         </p:style>
         <p:txBody>
-          <a:bodyPr rtlCol="0" anchor="ctr" wrap="square"/>
+          <a:bodyPr wrap="square" rtlCol="0" anchor="ctr"/>
           <a:lstStyle/>
           <a:p>
             <a:pPr algn="ctr">
@@ -11972,6 +12115,7 @@
           <a:lstStyle/>
           <a:p>
             <a:pPr algn="ctr"/>
+            <a:endParaRPr/>
           </a:p>
         </p:txBody>
       </p:sp>
@@ -12011,7 +12155,7 @@
           </a:fontRef>
         </p:style>
         <p:txBody>
-          <a:bodyPr rtlCol="0" anchor="ctr" wrap="square"/>
+          <a:bodyPr wrap="square" rtlCol="0" anchor="ctr"/>
           <a:lstStyle/>
           <a:p>
             <a:pPr algn="ctr">
@@ -12072,6 +12216,7 @@
           <a:lstStyle/>
           <a:p>
             <a:pPr algn="ctr"/>
+            <a:endParaRPr/>
           </a:p>
         </p:txBody>
       </p:sp>
@@ -12111,7 +12256,7 @@
           </a:fontRef>
         </p:style>
         <p:txBody>
-          <a:bodyPr rtlCol="0" anchor="ctr" wrap="square"/>
+          <a:bodyPr wrap="square" rtlCol="0" anchor="ctr"/>
           <a:lstStyle/>
           <a:p>
             <a:pPr algn="ctr">
@@ -12168,6 +12313,7 @@
           <a:lstStyle/>
           <a:p>
             <a:pPr algn="ctr"/>
+            <a:endParaRPr/>
           </a:p>
         </p:txBody>
       </p:sp>
@@ -12207,7 +12353,7 @@
           </a:fontRef>
         </p:style>
         <p:txBody>
-          <a:bodyPr rtlCol="0" anchor="ctr" wrap="square"/>
+          <a:bodyPr wrap="square" rtlCol="0" anchor="ctr"/>
           <a:lstStyle/>
           <a:p>
             <a:pPr algn="ctr">
@@ -12296,7 +12442,7 @@
           </a:fontRef>
         </p:style>
         <p:txBody>
-          <a:bodyPr rtlCol="0" anchor="ctr" wrap="square"/>
+          <a:bodyPr wrap="square" rtlCol="0" anchor="ctr"/>
           <a:lstStyle/>
           <a:p>
             <a:pPr algn="ctr">
@@ -12459,7 +12605,7 @@
           </a:fontRef>
         </p:style>
         <p:txBody>
-          <a:bodyPr rtlCol="0" anchor="ctr" wrap="square"/>
+          <a:bodyPr wrap="square" rtlCol="0" anchor="ctr"/>
           <a:lstStyle/>
           <a:p>
             <a:pPr algn="ctr">
@@ -12584,7 +12730,7 @@
           </a:fontRef>
         </p:style>
         <p:txBody>
-          <a:bodyPr rtlCol="0" anchor="ctr" wrap="square"/>
+          <a:bodyPr wrap="square" rtlCol="0" anchor="ctr"/>
           <a:lstStyle/>
           <a:p>
             <a:pPr algn="ctr">
@@ -12709,7 +12855,7 @@
           </a:fontRef>
         </p:style>
         <p:txBody>
-          <a:bodyPr rtlCol="0" anchor="ctr" wrap="square"/>
+          <a:bodyPr wrap="square" rtlCol="0" anchor="ctr"/>
           <a:lstStyle/>
           <a:p>
             <a:pPr algn="ctr">
@@ -12870,7 +13016,7 @@
           </a:fontRef>
         </p:style>
         <p:txBody>
-          <a:bodyPr rtlCol="0" anchor="ctr" wrap="square"/>
+          <a:bodyPr wrap="square" rtlCol="0" anchor="ctr"/>
           <a:lstStyle/>
           <a:p>
             <a:pPr algn="ctr">
@@ -12995,7 +13141,7 @@
           </a:fontRef>
         </p:style>
         <p:txBody>
-          <a:bodyPr rtlCol="0" anchor="ctr" wrap="square"/>
+          <a:bodyPr wrap="square" rtlCol="0" anchor="ctr"/>
           <a:lstStyle/>
           <a:p>
             <a:pPr algn="ctr">
@@ -13120,7 +13266,7 @@
           </a:fontRef>
         </p:style>
         <p:txBody>
-          <a:bodyPr rtlCol="0" anchor="ctr" wrap="square"/>
+          <a:bodyPr wrap="square" rtlCol="0" anchor="ctr"/>
           <a:lstStyle/>
           <a:p>
             <a:pPr algn="ctr">
@@ -13245,7 +13391,7 @@
           </a:fontRef>
         </p:style>
         <p:txBody>
-          <a:bodyPr rtlCol="0" anchor="ctr" wrap="square"/>
+          <a:bodyPr wrap="square" rtlCol="0" anchor="ctr"/>
           <a:lstStyle/>
           <a:p>
             <a:pPr algn="ctr">
@@ -13370,7 +13516,7 @@
           </a:fontRef>
         </p:style>
         <p:txBody>
-          <a:bodyPr rtlCol="0" anchor="ctr" wrap="square"/>
+          <a:bodyPr wrap="square" rtlCol="0" anchor="ctr"/>
           <a:lstStyle/>
           <a:p>
             <a:pPr algn="ctr">
@@ -13495,7 +13641,7 @@
           </a:fontRef>
         </p:style>
         <p:txBody>
-          <a:bodyPr rtlCol="0" anchor="ctr" wrap="square"/>
+          <a:bodyPr wrap="square" rtlCol="0" anchor="ctr"/>
           <a:lstStyle/>
           <a:p>
             <a:pPr algn="ctr">
@@ -13593,7 +13739,7 @@
 </file>
 
 <file path=ppt/slides/slide20.xml><?xml version="1.0" encoding="utf-8"?>
-<p:sld xmlns:a="http://schemas.openxmlformats.org/drawingml/2006/main" xmlns:p="http://schemas.openxmlformats.org/presentationml/2006/main" xmlns:r="http://schemas.openxmlformats.org/officeDocument/2006/relationships">
+<p:sld xmlns:a="http://schemas.openxmlformats.org/drawingml/2006/main" xmlns:r="http://schemas.openxmlformats.org/officeDocument/2006/relationships" xmlns:p="http://schemas.openxmlformats.org/presentationml/2006/main">
   <p:cSld>
     <p:bg>
       <p:bgPr>
@@ -13609,7 +13755,14 @@
         <p:cNvGrpSpPr/>
         <p:nvPr/>
       </p:nvGrpSpPr>
-      <p:grpSpPr/>
+      <p:grpSpPr>
+        <a:xfrm>
+          <a:off x="0" y="0"/>
+          <a:ext cx="0" cy="0"/>
+          <a:chOff x="0" y="0"/>
+          <a:chExt cx="0" cy="0"/>
+        </a:xfrm>
+      </p:grpSpPr>
       <p:sp>
         <p:nvSpPr>
           <p:cNvPr id="2" name="Rounded Rectangle 1"/>
@@ -13650,6 +13803,7 @@
           <a:lstStyle/>
           <a:p>
             <a:pPr algn="ctr"/>
+            <a:endParaRPr/>
           </a:p>
         </p:txBody>
       </p:sp>
@@ -13767,6 +13921,7 @@
           <a:lstStyle/>
           <a:p>
             <a:pPr algn="ctr"/>
+            <a:endParaRPr/>
           </a:p>
         </p:txBody>
       </p:sp>
@@ -13919,6 +14074,7 @@
           <a:lstStyle/>
           <a:p>
             <a:pPr algn="ctr"/>
+            <a:endParaRPr/>
           </a:p>
         </p:txBody>
       </p:sp>
@@ -14071,6 +14227,7 @@
                 <a:latin typeface="Calibri"/>
               </a:defRPr>
             </a:pPr>
+            <a:endParaRPr/>
           </a:p>
           <a:p>
             <a:pPr>
@@ -14148,6 +14305,7 @@
           <a:lstStyle/>
           <a:p>
             <a:pPr algn="ctr"/>
+            <a:endParaRPr/>
           </a:p>
         </p:txBody>
       </p:sp>
@@ -14300,6 +14458,7 @@
                 <a:latin typeface="Calibri"/>
               </a:defRPr>
             </a:pPr>
+            <a:endParaRPr/>
           </a:p>
           <a:p>
             <a:pPr>
@@ -14377,6 +14536,7 @@
           <a:lstStyle/>
           <a:p>
             <a:pPr algn="ctr"/>
+            <a:endParaRPr/>
           </a:p>
         </p:txBody>
       </p:sp>
@@ -14429,7 +14589,7 @@
 </file>
 
 <file path=ppt/slides/slide21.xml><?xml version="1.0" encoding="utf-8"?>
-<p:sld xmlns:a="http://schemas.openxmlformats.org/drawingml/2006/main" xmlns:p="http://schemas.openxmlformats.org/presentationml/2006/main" xmlns:r="http://schemas.openxmlformats.org/officeDocument/2006/relationships">
+<p:sld xmlns:a="http://schemas.openxmlformats.org/drawingml/2006/main" xmlns:r="http://schemas.openxmlformats.org/officeDocument/2006/relationships" xmlns:p="http://schemas.openxmlformats.org/presentationml/2006/main">
   <p:cSld>
     <p:bg>
       <p:bgPr>
@@ -14445,7 +14605,14 @@
         <p:cNvGrpSpPr/>
         <p:nvPr/>
       </p:nvGrpSpPr>
-      <p:grpSpPr/>
+      <p:grpSpPr>
+        <a:xfrm>
+          <a:off x="0" y="0"/>
+          <a:ext cx="0" cy="0"/>
+          <a:chOff x="0" y="0"/>
+          <a:chExt cx="0" cy="0"/>
+        </a:xfrm>
+      </p:grpSpPr>
       <p:sp>
         <p:nvSpPr>
           <p:cNvPr id="2" name="Rounded Rectangle 1"/>
@@ -14486,6 +14653,7 @@
           <a:lstStyle/>
           <a:p>
             <a:pPr algn="ctr"/>
+            <a:endParaRPr/>
           </a:p>
         </p:txBody>
       </p:sp>
@@ -14601,6 +14769,7 @@
           <a:lstStyle/>
           <a:p>
             <a:pPr algn="ctr"/>
+            <a:endParaRPr/>
           </a:p>
         </p:txBody>
       </p:sp>
@@ -14653,6 +14822,7 @@
                 <a:latin typeface="Courier New"/>
               </a:defRPr>
             </a:pPr>
+            <a:endParaRPr/>
           </a:p>
           <a:p>
             <a:pPr>
@@ -14698,6 +14868,7 @@
                 <a:latin typeface="Courier New"/>
               </a:defRPr>
             </a:pPr>
+            <a:endParaRPr/>
           </a:p>
           <a:p>
             <a:pPr>
@@ -14951,6 +15122,7 @@
                 <a:latin typeface="Courier New"/>
               </a:defRPr>
             </a:pPr>
+            <a:endParaRPr/>
           </a:p>
           <a:p>
             <a:pPr>
@@ -15012,6 +15184,7 @@
                 <a:latin typeface="Courier New"/>
               </a:defRPr>
             </a:pPr>
+            <a:endParaRPr/>
           </a:p>
           <a:p>
             <a:pPr>
@@ -15119,7 +15292,7 @@
           </a:fontRef>
         </p:style>
         <p:txBody>
-          <a:bodyPr rtlCol="0" anchor="ctr" wrap="square"/>
+          <a:bodyPr wrap="square" rtlCol="0" anchor="ctr"/>
           <a:lstStyle/>
           <a:p>
             <a:pPr algn="ctr">
@@ -15216,7 +15389,7 @@
           </a:fontRef>
         </p:style>
         <p:txBody>
-          <a:bodyPr rtlCol="0" anchor="ctr" wrap="square"/>
+          <a:bodyPr wrap="square" rtlCol="0" anchor="ctr"/>
           <a:lstStyle/>
           <a:p>
             <a:pPr algn="ctr">
@@ -15313,7 +15486,7 @@
           </a:fontRef>
         </p:style>
         <p:txBody>
-          <a:bodyPr rtlCol="0" anchor="ctr" wrap="square"/>
+          <a:bodyPr wrap="square" rtlCol="0" anchor="ctr"/>
           <a:lstStyle/>
           <a:p>
             <a:pPr algn="ctr">
@@ -15410,7 +15583,7 @@
           </a:fontRef>
         </p:style>
         <p:txBody>
-          <a:bodyPr rtlCol="0" anchor="ctr" wrap="square"/>
+          <a:bodyPr wrap="square" rtlCol="0" anchor="ctr"/>
           <a:lstStyle/>
           <a:p>
             <a:pPr algn="ctr">
@@ -15513,6 +15686,7 @@
           <a:lstStyle/>
           <a:p>
             <a:pPr algn="ctr"/>
+            <a:endParaRPr/>
           </a:p>
         </p:txBody>
       </p:sp>
@@ -15632,7 +15806,7 @@
 </file>
 
 <file path=ppt/slides/slide22.xml><?xml version="1.0" encoding="utf-8"?>
-<p:sld xmlns:a="http://schemas.openxmlformats.org/drawingml/2006/main" xmlns:p="http://schemas.openxmlformats.org/presentationml/2006/main" xmlns:r="http://schemas.openxmlformats.org/officeDocument/2006/relationships">
+<p:sld xmlns:a="http://schemas.openxmlformats.org/drawingml/2006/main" xmlns:r="http://schemas.openxmlformats.org/officeDocument/2006/relationships" xmlns:p="http://schemas.openxmlformats.org/presentationml/2006/main">
   <p:cSld>
     <p:bg>
       <p:bgPr>
@@ -15648,7 +15822,14 @@
         <p:cNvGrpSpPr/>
         <p:nvPr/>
       </p:nvGrpSpPr>
-      <p:grpSpPr/>
+      <p:grpSpPr>
+        <a:xfrm>
+          <a:off x="0" y="0"/>
+          <a:ext cx="0" cy="0"/>
+          <a:chOff x="0" y="0"/>
+          <a:chExt cx="0" cy="0"/>
+        </a:xfrm>
+      </p:grpSpPr>
       <p:sp>
         <p:nvSpPr>
           <p:cNvPr id="2" name="Oval 1"/>
@@ -15685,7 +15866,7 @@
           </a:fontRef>
         </p:style>
         <p:txBody>
-          <a:bodyPr rtlCol="0" anchor="ctr" wrap="square"/>
+          <a:bodyPr wrap="square" rtlCol="0" anchor="ctr"/>
           <a:lstStyle/>
           <a:p>
             <a:pPr algn="ctr">
@@ -15789,7 +15970,7 @@
 </file>
 
 <file path=ppt/slides/slide23.xml><?xml version="1.0" encoding="utf-8"?>
-<p:sld xmlns:a="http://schemas.openxmlformats.org/drawingml/2006/main" xmlns:p="http://schemas.openxmlformats.org/presentationml/2006/main" xmlns:r="http://schemas.openxmlformats.org/officeDocument/2006/relationships">
+<p:sld xmlns:a="http://schemas.openxmlformats.org/drawingml/2006/main" xmlns:r="http://schemas.openxmlformats.org/officeDocument/2006/relationships" xmlns:p="http://schemas.openxmlformats.org/presentationml/2006/main">
   <p:cSld>
     <p:bg>
       <p:bgPr>
@@ -15805,7 +15986,14 @@
         <p:cNvGrpSpPr/>
         <p:nvPr/>
       </p:nvGrpSpPr>
-      <p:grpSpPr/>
+      <p:grpSpPr>
+        <a:xfrm>
+          <a:off x="0" y="0"/>
+          <a:ext cx="0" cy="0"/>
+          <a:chOff x="0" y="0"/>
+          <a:chExt cx="0" cy="0"/>
+        </a:xfrm>
+      </p:grpSpPr>
       <p:sp>
         <p:nvSpPr>
           <p:cNvPr id="2" name="Rounded Rectangle 1"/>
@@ -15846,6 +16034,7 @@
           <a:lstStyle/>
           <a:p>
             <a:pPr algn="ctr"/>
+            <a:endParaRPr/>
           </a:p>
         </p:txBody>
       </p:sp>
@@ -15963,6 +16152,7 @@
           <a:lstStyle/>
           <a:p>
             <a:pPr algn="ctr"/>
+            <a:endParaRPr/>
           </a:p>
         </p:txBody>
       </p:sp>
@@ -16115,6 +16305,7 @@
           <a:lstStyle/>
           <a:p>
             <a:pPr algn="ctr"/>
+            <a:endParaRPr/>
           </a:p>
         </p:txBody>
       </p:sp>
@@ -16203,6 +16394,7 @@
                 <a:latin typeface="Calibri"/>
               </a:defRPr>
             </a:pPr>
+            <a:endParaRPr/>
           </a:p>
           <a:p>
             <a:pPr>
@@ -16328,6 +16520,7 @@
           <a:lstStyle/>
           <a:p>
             <a:pPr algn="ctr"/>
+            <a:endParaRPr/>
           </a:p>
         </p:txBody>
       </p:sp>
@@ -16416,6 +16609,7 @@
                 <a:latin typeface="Calibri"/>
               </a:defRPr>
             </a:pPr>
+            <a:endParaRPr/>
           </a:p>
           <a:p>
             <a:pPr>
@@ -16541,6 +16735,7 @@
           <a:lstStyle/>
           <a:p>
             <a:pPr algn="ctr"/>
+            <a:endParaRPr/>
           </a:p>
         </p:txBody>
       </p:sp>
@@ -16593,7 +16788,7 @@
 </file>
 
 <file path=ppt/slides/slide24.xml><?xml version="1.0" encoding="utf-8"?>
-<p:sld xmlns:a="http://schemas.openxmlformats.org/drawingml/2006/main" xmlns:p="http://schemas.openxmlformats.org/presentationml/2006/main" xmlns:r="http://schemas.openxmlformats.org/officeDocument/2006/relationships">
+<p:sld xmlns:a="http://schemas.openxmlformats.org/drawingml/2006/main" xmlns:r="http://schemas.openxmlformats.org/officeDocument/2006/relationships" xmlns:p="http://schemas.openxmlformats.org/presentationml/2006/main">
   <p:cSld>
     <p:bg>
       <p:bgPr>
@@ -16609,7 +16804,14 @@
         <p:cNvGrpSpPr/>
         <p:nvPr/>
       </p:nvGrpSpPr>
-      <p:grpSpPr/>
+      <p:grpSpPr>
+        <a:xfrm>
+          <a:off x="0" y="0"/>
+          <a:ext cx="0" cy="0"/>
+          <a:chOff x="0" y="0"/>
+          <a:chExt cx="0" cy="0"/>
+        </a:xfrm>
+      </p:grpSpPr>
       <p:sp>
         <p:nvSpPr>
           <p:cNvPr id="2" name="Rounded Rectangle 1"/>
@@ -16650,6 +16852,7 @@
           <a:lstStyle/>
           <a:p>
             <a:pPr algn="ctr"/>
+            <a:endParaRPr/>
           </a:p>
         </p:txBody>
       </p:sp>
@@ -16803,6 +17006,7 @@
           <a:lstStyle/>
           <a:p>
             <a:pPr algn="ctr"/>
+            <a:endParaRPr/>
           </a:p>
         </p:txBody>
       </p:sp>
@@ -16891,6 +17095,7 @@
                 <a:latin typeface="Calibri"/>
               </a:defRPr>
             </a:pPr>
+            <a:endParaRPr/>
           </a:p>
           <a:p>
             <a:pPr>
@@ -16984,6 +17189,7 @@
                 <a:latin typeface="Calibri"/>
               </a:defRPr>
             </a:pPr>
+            <a:endParaRPr/>
           </a:p>
           <a:p>
             <a:pPr>
@@ -17059,6 +17265,7 @@
           <a:lstStyle/>
           <a:p>
             <a:pPr algn="ctr"/>
+            <a:endParaRPr/>
           </a:p>
         </p:txBody>
       </p:sp>
@@ -17104,6 +17311,7 @@
           <a:lstStyle/>
           <a:p>
             <a:pPr algn="ctr"/>
+            <a:endParaRPr/>
           </a:p>
         </p:txBody>
       </p:sp>
@@ -17192,6 +17400,7 @@
                 <a:latin typeface="Calibri"/>
               </a:defRPr>
             </a:pPr>
+            <a:endParaRPr/>
           </a:p>
           <a:p>
             <a:pPr>
@@ -17285,6 +17494,7 @@
                 <a:latin typeface="Calibri"/>
               </a:defRPr>
             </a:pPr>
+            <a:endParaRPr/>
           </a:p>
           <a:p>
             <a:pPr>
@@ -17362,6 +17572,7 @@
           <a:lstStyle/>
           <a:p>
             <a:pPr algn="ctr"/>
+            <a:endParaRPr/>
           </a:p>
         </p:txBody>
       </p:sp>
@@ -17466,6 +17677,7 @@
                 <a:latin typeface="Calibri"/>
               </a:defRPr>
             </a:pPr>
+            <a:endParaRPr/>
           </a:p>
           <a:p>
             <a:pPr>
@@ -17511,6 +17723,7 @@
                 <a:latin typeface="Calibri"/>
               </a:defRPr>
             </a:pPr>
+            <a:endParaRPr/>
           </a:p>
           <a:p>
             <a:pPr>
@@ -17539,7 +17752,7 @@
 </file>
 
 <file path=ppt/slides/slide25.xml><?xml version="1.0" encoding="utf-8"?>
-<p:sld xmlns:a="http://schemas.openxmlformats.org/drawingml/2006/main" xmlns:p="http://schemas.openxmlformats.org/presentationml/2006/main" xmlns:r="http://schemas.openxmlformats.org/officeDocument/2006/relationships">
+<p:sld xmlns:a="http://schemas.openxmlformats.org/drawingml/2006/main" xmlns:r="http://schemas.openxmlformats.org/officeDocument/2006/relationships" xmlns:p="http://schemas.openxmlformats.org/presentationml/2006/main">
   <p:cSld>
     <p:bg>
       <p:bgPr>
@@ -17555,7 +17768,14 @@
         <p:cNvGrpSpPr/>
         <p:nvPr/>
       </p:nvGrpSpPr>
-      <p:grpSpPr/>
+      <p:grpSpPr>
+        <a:xfrm>
+          <a:off x="0" y="0"/>
+          <a:ext cx="0" cy="0"/>
+          <a:chOff x="0" y="0"/>
+          <a:chExt cx="0" cy="0"/>
+        </a:xfrm>
+      </p:grpSpPr>
       <p:sp>
         <p:nvSpPr>
           <p:cNvPr id="2" name="Rounded Rectangle 1"/>
@@ -17596,6 +17816,7 @@
           <a:lstStyle/>
           <a:p>
             <a:pPr algn="ctr"/>
+            <a:endParaRPr/>
           </a:p>
         </p:txBody>
       </p:sp>
@@ -17749,6 +17970,7 @@
           <a:lstStyle/>
           <a:p>
             <a:pPr algn="ctr"/>
+            <a:endParaRPr/>
           </a:p>
         </p:txBody>
       </p:sp>
@@ -17853,6 +18075,7 @@
                 <a:latin typeface="Courier New"/>
               </a:defRPr>
             </a:pPr>
+            <a:endParaRPr/>
           </a:p>
           <a:p>
             <a:pPr>
@@ -17946,6 +18169,7 @@
                 <a:latin typeface="Courier New"/>
               </a:defRPr>
             </a:pPr>
+            <a:endParaRPr/>
           </a:p>
           <a:p>
             <a:pPr>
@@ -18023,6 +18247,7 @@
           <a:lstStyle/>
           <a:p>
             <a:pPr algn="ctr"/>
+            <a:endParaRPr/>
           </a:p>
         </p:txBody>
       </p:sp>
@@ -18127,6 +18352,7 @@
                 <a:latin typeface="Courier New"/>
               </a:defRPr>
             </a:pPr>
+            <a:endParaRPr/>
           </a:p>
           <a:p>
             <a:pPr>
@@ -18252,6 +18478,7 @@
                 <a:latin typeface="Courier New"/>
               </a:defRPr>
             </a:pPr>
+            <a:endParaRPr/>
           </a:p>
           <a:p>
             <a:pPr>
@@ -18329,6 +18556,7 @@
           <a:lstStyle/>
           <a:p>
             <a:pPr algn="ctr"/>
+            <a:endParaRPr/>
           </a:p>
         </p:txBody>
       </p:sp>
@@ -18433,6 +18661,7 @@
                 <a:latin typeface="Calibri"/>
               </a:defRPr>
             </a:pPr>
+            <a:endParaRPr/>
           </a:p>
           <a:p>
             <a:pPr>
@@ -18477,7 +18706,7 @@
 </file>
 
 <file path=ppt/slides/slide26.xml><?xml version="1.0" encoding="utf-8"?>
-<p:sld xmlns:a="http://schemas.openxmlformats.org/drawingml/2006/main" xmlns:p="http://schemas.openxmlformats.org/presentationml/2006/main" xmlns:r="http://schemas.openxmlformats.org/officeDocument/2006/relationships">
+<p:sld xmlns:a="http://schemas.openxmlformats.org/drawingml/2006/main" xmlns:r="http://schemas.openxmlformats.org/officeDocument/2006/relationships" xmlns:p="http://schemas.openxmlformats.org/presentationml/2006/main">
   <p:cSld>
     <p:bg>
       <p:bgPr>
@@ -18493,7 +18722,14 @@
         <p:cNvGrpSpPr/>
         <p:nvPr/>
       </p:nvGrpSpPr>
-      <p:grpSpPr/>
+      <p:grpSpPr>
+        <a:xfrm>
+          <a:off x="0" y="0"/>
+          <a:ext cx="0" cy="0"/>
+          <a:chOff x="0" y="0"/>
+          <a:chExt cx="0" cy="0"/>
+        </a:xfrm>
+      </p:grpSpPr>
       <p:sp>
         <p:nvSpPr>
           <p:cNvPr id="2" name="Rounded Rectangle 1"/>
@@ -18534,6 +18770,7 @@
           <a:lstStyle/>
           <a:p>
             <a:pPr algn="ctr"/>
+            <a:endParaRPr/>
           </a:p>
         </p:txBody>
       </p:sp>
@@ -18645,7 +18882,7 @@
           </a:fontRef>
         </p:style>
         <p:txBody>
-          <a:bodyPr rtlCol="0" anchor="ctr" wrap="square"/>
+          <a:bodyPr wrap="square" rtlCol="0" anchor="ctr"/>
           <a:lstStyle/>
           <a:p>
             <a:pPr algn="ctr">
@@ -18738,7 +18975,7 @@
           </a:fontRef>
         </p:style>
         <p:txBody>
-          <a:bodyPr rtlCol="0" anchor="ctr" wrap="square"/>
+          <a:bodyPr wrap="square" rtlCol="0" anchor="ctr"/>
           <a:lstStyle/>
           <a:p>
             <a:pPr algn="ctr">
@@ -18831,7 +19068,7 @@
           </a:fontRef>
         </p:style>
         <p:txBody>
-          <a:bodyPr rtlCol="0" anchor="ctr" wrap="square"/>
+          <a:bodyPr wrap="square" rtlCol="0" anchor="ctr"/>
           <a:lstStyle/>
           <a:p>
             <a:pPr algn="ctr">
@@ -18924,7 +19161,7 @@
           </a:fontRef>
         </p:style>
         <p:txBody>
-          <a:bodyPr rtlCol="0" anchor="ctr" wrap="square"/>
+          <a:bodyPr wrap="square" rtlCol="0" anchor="ctr"/>
           <a:lstStyle/>
           <a:p>
             <a:pPr algn="ctr">
@@ -19017,7 +19254,7 @@
           </a:fontRef>
         </p:style>
         <p:txBody>
-          <a:bodyPr rtlCol="0" anchor="ctr" wrap="square"/>
+          <a:bodyPr wrap="square" rtlCol="0" anchor="ctr"/>
           <a:lstStyle/>
           <a:p>
             <a:pPr algn="ctr">
@@ -19110,7 +19347,7 @@
           </a:fontRef>
         </p:style>
         <p:txBody>
-          <a:bodyPr rtlCol="0" anchor="ctr" wrap="square"/>
+          <a:bodyPr wrap="square" rtlCol="0" anchor="ctr"/>
           <a:lstStyle/>
           <a:p>
             <a:pPr algn="ctr">
@@ -19176,7 +19413,7 @@
 </file>
 
 <file path=ppt/slides/slide27.xml><?xml version="1.0" encoding="utf-8"?>
-<p:sld xmlns:a="http://schemas.openxmlformats.org/drawingml/2006/main" xmlns:p="http://schemas.openxmlformats.org/presentationml/2006/main" xmlns:r="http://schemas.openxmlformats.org/officeDocument/2006/relationships">
+<p:sld xmlns:a="http://schemas.openxmlformats.org/drawingml/2006/main" xmlns:r="http://schemas.openxmlformats.org/officeDocument/2006/relationships" xmlns:p="http://schemas.openxmlformats.org/presentationml/2006/main">
   <p:cSld>
     <p:bg>
       <p:bgPr>
@@ -19192,7 +19429,14 @@
         <p:cNvGrpSpPr/>
         <p:nvPr/>
       </p:nvGrpSpPr>
-      <p:grpSpPr/>
+      <p:grpSpPr>
+        <a:xfrm>
+          <a:off x="0" y="0"/>
+          <a:ext cx="0" cy="0"/>
+          <a:chOff x="0" y="0"/>
+          <a:chExt cx="0" cy="0"/>
+        </a:xfrm>
+      </p:grpSpPr>
       <p:sp>
         <p:nvSpPr>
           <p:cNvPr id="2" name="TextBox 1"/>
@@ -19265,7 +19509,7 @@
           </a:fontRef>
         </p:style>
         <p:txBody>
-          <a:bodyPr rtlCol="0" anchor="ctr" wrap="square"/>
+          <a:bodyPr wrap="square" rtlCol="0" anchor="ctr"/>
           <a:lstStyle/>
           <a:p>
             <a:pPr algn="ctr">
@@ -19390,7 +19634,7 @@
           </a:fontRef>
         </p:style>
         <p:txBody>
-          <a:bodyPr rtlCol="0" anchor="ctr" wrap="square"/>
+          <a:bodyPr wrap="square" rtlCol="0" anchor="ctr"/>
           <a:lstStyle/>
           <a:p>
             <a:pPr algn="ctr">
@@ -19515,7 +19759,7 @@
           </a:fontRef>
         </p:style>
         <p:txBody>
-          <a:bodyPr rtlCol="0" anchor="ctr" wrap="square"/>
+          <a:bodyPr wrap="square" rtlCol="0" anchor="ctr"/>
           <a:lstStyle/>
           <a:p>
             <a:pPr algn="ctr">
@@ -19640,7 +19884,7 @@
           </a:fontRef>
         </p:style>
         <p:txBody>
-          <a:bodyPr rtlCol="0" anchor="ctr" wrap="square"/>
+          <a:bodyPr wrap="square" rtlCol="0" anchor="ctr"/>
           <a:lstStyle/>
           <a:p>
             <a:pPr algn="ctr">
@@ -19765,7 +20009,7 @@
           </a:fontRef>
         </p:style>
         <p:txBody>
-          <a:bodyPr rtlCol="0" anchor="ctr" wrap="square"/>
+          <a:bodyPr wrap="square" rtlCol="0" anchor="ctr"/>
           <a:lstStyle/>
           <a:p>
             <a:pPr algn="ctr">
@@ -19890,7 +20134,7 @@
           </a:fontRef>
         </p:style>
         <p:txBody>
-          <a:bodyPr rtlCol="0" anchor="ctr" wrap="square"/>
+          <a:bodyPr wrap="square" rtlCol="0" anchor="ctr"/>
           <a:lstStyle/>
           <a:p>
             <a:pPr algn="ctr">
@@ -20019,6 +20263,7 @@
           <a:lstStyle/>
           <a:p>
             <a:pPr algn="ctr"/>
+            <a:endParaRPr/>
           </a:p>
         </p:txBody>
       </p:sp>
@@ -20067,7 +20312,7 @@
 </file>
 
 <file path=ppt/slides/slide3.xml><?xml version="1.0" encoding="utf-8"?>
-<p:sld xmlns:a="http://schemas.openxmlformats.org/drawingml/2006/main" xmlns:p="http://schemas.openxmlformats.org/presentationml/2006/main" xmlns:r="http://schemas.openxmlformats.org/officeDocument/2006/relationships">
+<p:sld xmlns:a="http://schemas.openxmlformats.org/drawingml/2006/main" xmlns:r="http://schemas.openxmlformats.org/officeDocument/2006/relationships" xmlns:p="http://schemas.openxmlformats.org/presentationml/2006/main">
   <p:cSld>
     <p:bg>
       <p:bgPr>
@@ -20083,7 +20328,14 @@
         <p:cNvGrpSpPr/>
         <p:nvPr/>
       </p:nvGrpSpPr>
-      <p:grpSpPr/>
+      <p:grpSpPr>
+        <a:xfrm>
+          <a:off x="0" y="0"/>
+          <a:ext cx="0" cy="0"/>
+          <a:chOff x="0" y="0"/>
+          <a:chExt cx="0" cy="0"/>
+        </a:xfrm>
+      </p:grpSpPr>
       <p:sp>
         <p:nvSpPr>
           <p:cNvPr id="2" name="Oval 1"/>
@@ -20120,7 +20372,7 @@
           </a:fontRef>
         </p:style>
         <p:txBody>
-          <a:bodyPr rtlCol="0" anchor="ctr" wrap="square"/>
+          <a:bodyPr wrap="square" rtlCol="0" anchor="ctr"/>
           <a:lstStyle/>
           <a:p>
             <a:pPr algn="ctr">
@@ -20224,7 +20476,7 @@
 </file>
 
 <file path=ppt/slides/slide4.xml><?xml version="1.0" encoding="utf-8"?>
-<p:sld xmlns:a="http://schemas.openxmlformats.org/drawingml/2006/main" xmlns:p="http://schemas.openxmlformats.org/presentationml/2006/main" xmlns:r="http://schemas.openxmlformats.org/officeDocument/2006/relationships">
+<p:sld xmlns:a="http://schemas.openxmlformats.org/drawingml/2006/main" xmlns:r="http://schemas.openxmlformats.org/officeDocument/2006/relationships" xmlns:p="http://schemas.openxmlformats.org/presentationml/2006/main">
   <p:cSld>
     <p:bg>
       <p:bgPr>
@@ -20240,7 +20492,14 @@
         <p:cNvGrpSpPr/>
         <p:nvPr/>
       </p:nvGrpSpPr>
-      <p:grpSpPr/>
+      <p:grpSpPr>
+        <a:xfrm>
+          <a:off x="0" y="0"/>
+          <a:ext cx="0" cy="0"/>
+          <a:chOff x="0" y="0"/>
+          <a:chExt cx="0" cy="0"/>
+        </a:xfrm>
+      </p:grpSpPr>
       <p:sp>
         <p:nvSpPr>
           <p:cNvPr id="2" name="Rounded Rectangle 1"/>
@@ -20281,6 +20540,7 @@
           <a:lstStyle/>
           <a:p>
             <a:pPr algn="ctr"/>
+            <a:endParaRPr/>
           </a:p>
         </p:txBody>
       </p:sp>
@@ -20398,6 +20658,7 @@
           <a:lstStyle/>
           <a:p>
             <a:pPr algn="ctr"/>
+            <a:endParaRPr/>
           </a:p>
         </p:txBody>
       </p:sp>
@@ -20544,7 +20805,7 @@
           </a:fontRef>
         </p:style>
         <p:txBody>
-          <a:bodyPr rtlCol="0" anchor="ctr" wrap="square"/>
+          <a:bodyPr wrap="square" rtlCol="0" anchor="ctr"/>
           <a:lstStyle/>
           <a:p>
             <a:pPr algn="ctr">
@@ -20607,6 +20868,7 @@
           <a:lstStyle/>
           <a:p>
             <a:pPr algn="ctr"/>
+            <a:endParaRPr/>
           </a:p>
         </p:txBody>
       </p:sp>
@@ -20705,6 +20967,7 @@
           <a:lstStyle/>
           <a:p>
             <a:pPr algn="ctr"/>
+            <a:endParaRPr/>
           </a:p>
         </p:txBody>
       </p:sp>
@@ -20792,7 +21055,7 @@
           </a:fontRef>
         </p:style>
         <p:txBody>
-          <a:bodyPr rtlCol="0" anchor="ctr" wrap="square"/>
+          <a:bodyPr wrap="square" rtlCol="0" anchor="ctr"/>
           <a:lstStyle/>
           <a:p>
             <a:pPr algn="ctr">
@@ -20855,6 +21118,7 @@
           <a:lstStyle/>
           <a:p>
             <a:pPr algn="ctr"/>
+            <a:endParaRPr/>
           </a:p>
         </p:txBody>
       </p:sp>
@@ -20953,6 +21217,7 @@
           <a:lstStyle/>
           <a:p>
             <a:pPr algn="ctr"/>
+            <a:endParaRPr/>
           </a:p>
         </p:txBody>
       </p:sp>
@@ -21040,7 +21305,7 @@
           </a:fontRef>
         </p:style>
         <p:txBody>
-          <a:bodyPr rtlCol="0" anchor="ctr" wrap="square"/>
+          <a:bodyPr wrap="square" rtlCol="0" anchor="ctr"/>
           <a:lstStyle/>
           <a:p>
             <a:pPr algn="ctr">
@@ -21103,6 +21368,7 @@
           <a:lstStyle/>
           <a:p>
             <a:pPr algn="ctr"/>
+            <a:endParaRPr/>
           </a:p>
         </p:txBody>
       </p:sp>
@@ -21197,6 +21463,7 @@
           <a:lstStyle/>
           <a:p>
             <a:pPr algn="ctr"/>
+            <a:endParaRPr/>
           </a:p>
         </p:txBody>
       </p:sp>
@@ -21253,7 +21520,7 @@
 </file>
 
 <file path=ppt/slides/slide5.xml><?xml version="1.0" encoding="utf-8"?>
-<p:sld xmlns:a="http://schemas.openxmlformats.org/drawingml/2006/main" xmlns:p="http://schemas.openxmlformats.org/presentationml/2006/main" xmlns:r="http://schemas.openxmlformats.org/officeDocument/2006/relationships">
+<p:sld xmlns:a="http://schemas.openxmlformats.org/drawingml/2006/main" xmlns:r="http://schemas.openxmlformats.org/officeDocument/2006/relationships" xmlns:p="http://schemas.openxmlformats.org/presentationml/2006/main">
   <p:cSld>
     <p:bg>
       <p:bgPr>
@@ -21269,7 +21536,14 @@
         <p:cNvGrpSpPr/>
         <p:nvPr/>
       </p:nvGrpSpPr>
-      <p:grpSpPr/>
+      <p:grpSpPr>
+        <a:xfrm>
+          <a:off x="0" y="0"/>
+          <a:ext cx="0" cy="0"/>
+          <a:chOff x="0" y="0"/>
+          <a:chExt cx="0" cy="0"/>
+        </a:xfrm>
+      </p:grpSpPr>
       <p:sp>
         <p:nvSpPr>
           <p:cNvPr id="2" name="Rounded Rectangle 1"/>
@@ -21310,6 +21584,7 @@
           <a:lstStyle/>
           <a:p>
             <a:pPr algn="ctr"/>
+            <a:endParaRPr/>
           </a:p>
         </p:txBody>
       </p:sp>
@@ -21463,6 +21738,7 @@
           <a:lstStyle/>
           <a:p>
             <a:pPr algn="ctr"/>
+            <a:endParaRPr/>
           </a:p>
         </p:txBody>
       </p:sp>
@@ -21511,7 +21787,7 @@
         <p:spPr>
           <a:xfrm>
             <a:off x="731520" y="2194560"/>
-            <a:ext cx="4846320" cy="2194560"/>
+            <a:ext cx="4846320" cy="2208297"/>
           </a:xfrm>
           <a:prstGeom prst="rect">
             <a:avLst/>
@@ -21536,6 +21812,12 @@
               </a:defRPr>
             </a:pPr>
             <a:r>
+              <a:rPr sz="1000" b="1" dirty="0">
+                <a:solidFill>
+                  <a:srgbClr val="7F8C8D"/>
+                </a:solidFill>
+                <a:latin typeface="Courier New"/>
+              </a:rPr>
               <a:t>"Review this code and find any</a:t>
             </a:r>
           </a:p>
@@ -21552,6 +21834,12 @@
               </a:defRPr>
             </a:pPr>
             <a:r>
+              <a:rPr sz="1000" b="1" dirty="0">
+                <a:solidFill>
+                  <a:srgbClr val="7F8C8D"/>
+                </a:solidFill>
+                <a:latin typeface="Courier New"/>
+              </a:rPr>
               <a:t> issues that might be important."</a:t>
             </a:r>
           </a:p>
@@ -21567,6 +21855,12 @@
                 <a:latin typeface="Courier New"/>
               </a:defRPr>
             </a:pPr>
+            <a:endParaRPr sz="1000" dirty="0">
+              <a:solidFill>
+                <a:srgbClr val="7F8C8D"/>
+              </a:solidFill>
+              <a:latin typeface="Courier New"/>
+            </a:endParaRPr>
           </a:p>
           <a:p>
             <a:pPr>
@@ -21581,6 +21875,7 @@
               </a:defRPr>
             </a:pPr>
             <a:r>
+              <a:rPr sz="1000" dirty="0"/>
               <a:t>Problems:</a:t>
             </a:r>
           </a:p>
@@ -21597,6 +21892,7 @@
               </a:defRPr>
             </a:pPr>
             <a:r>
+              <a:rPr sz="1000" dirty="0"/>
               <a:t>- What counts as 'important'?</a:t>
             </a:r>
           </a:p>
@@ -21613,6 +21909,7 @@
               </a:defRPr>
             </a:pPr>
             <a:r>
+              <a:rPr sz="1000" dirty="0"/>
               <a:t>- No categories defined</a:t>
             </a:r>
           </a:p>
@@ -21629,6 +21926,7 @@
               </a:defRPr>
             </a:pPr>
             <a:r>
+              <a:rPr sz="1000" dirty="0"/>
               <a:t>- No severity levels</a:t>
             </a:r>
           </a:p>
@@ -21645,6 +21943,7 @@
               </a:defRPr>
             </a:pPr>
             <a:r>
+              <a:rPr sz="1000" dirty="0"/>
               <a:t>- Claude guesses -&gt; inconsistent</a:t>
             </a:r>
           </a:p>
@@ -21661,6 +21960,7 @@
               </a:defRPr>
             </a:pPr>
             <a:r>
+              <a:rPr sz="1000" dirty="0"/>
               <a:t>- High false positive rate</a:t>
             </a:r>
           </a:p>
@@ -21677,6 +21977,7 @@
               </a:defRPr>
             </a:pPr>
             <a:r>
+              <a:rPr sz="1000" dirty="0"/>
               <a:t>- Different results each run!</a:t>
             </a:r>
           </a:p>
@@ -21724,6 +22025,7 @@
           <a:lstStyle/>
           <a:p>
             <a:pPr algn="ctr"/>
+            <a:endParaRPr/>
           </a:p>
         </p:txBody>
       </p:sp>
@@ -21772,7 +22074,7 @@
         <p:spPr>
           <a:xfrm>
             <a:off x="6492240" y="2194560"/>
-            <a:ext cx="4846320" cy="2194560"/>
+            <a:ext cx="4846320" cy="2208297"/>
           </a:xfrm>
           <a:prstGeom prst="rect">
             <a:avLst/>
@@ -21797,7 +22099,31 @@
               </a:defRPr>
             </a:pPr>
             <a:r>
-              <a:t>"Classify each issue as:</a:t>
+              <a:rPr sz="1000" dirty="0">
+                <a:solidFill>
+                  <a:srgbClr val="2ECC71"/>
+                </a:solidFill>
+                <a:latin typeface="Courier New"/>
+              </a:rPr>
+              <a:t>"</a:t>
+            </a:r>
+            <a:r>
+              <a:rPr sz="1000" b="1" dirty="0">
+                <a:solidFill>
+                  <a:srgbClr val="2ECC71"/>
+                </a:solidFill>
+                <a:latin typeface="Courier New"/>
+              </a:rPr>
+              <a:t>Classify each issue as</a:t>
+            </a:r>
+            <a:r>
+              <a:rPr sz="1000" dirty="0">
+                <a:solidFill>
+                  <a:srgbClr val="2ECC71"/>
+                </a:solidFill>
+                <a:latin typeface="Courier New"/>
+              </a:rPr>
+              <a:t>:</a:t>
             </a:r>
           </a:p>
           <a:p>
@@ -21813,6 +22139,7 @@
               </a:defRPr>
             </a:pPr>
             <a:r>
+              <a:rPr sz="1000" dirty="0"/>
               <a:t> SECURITY | PERFORMANCE | STYLE</a:t>
             </a:r>
           </a:p>
@@ -21829,6 +22156,7 @@
               </a:defRPr>
             </a:pPr>
             <a:r>
+              <a:rPr sz="1000" dirty="0"/>
               <a:t> Severity: CRITICAL if data loss</a:t>
             </a:r>
           </a:p>
@@ -21845,6 +22173,7 @@
               </a:defRPr>
             </a:pPr>
             <a:r>
+              <a:rPr sz="1000" dirty="0"/>
               <a:t> or injection. HIGH if feature</a:t>
             </a:r>
           </a:p>
@@ -21861,6 +22190,7 @@
               </a:defRPr>
             </a:pPr>
             <a:r>
+              <a:rPr sz="1000" dirty="0"/>
               <a:t> breaks. MEDIUM if UX degrades."</a:t>
             </a:r>
           </a:p>
@@ -21876,6 +22206,7 @@
                 <a:latin typeface="Courier New"/>
               </a:defRPr>
             </a:pPr>
+            <a:endParaRPr sz="1000" dirty="0"/>
           </a:p>
           <a:p>
             <a:pPr>
@@ -21890,6 +22221,7 @@
               </a:defRPr>
             </a:pPr>
             <a:r>
+              <a:rPr sz="1000" dirty="0"/>
               <a:t>Benefits:</a:t>
             </a:r>
           </a:p>
@@ -21906,6 +22238,7 @@
               </a:defRPr>
             </a:pPr>
             <a:r>
+              <a:rPr sz="1000" dirty="0"/>
               <a:t>- Clear categories = consistent</a:t>
             </a:r>
           </a:p>
@@ -21922,6 +22255,7 @@
               </a:defRPr>
             </a:pPr>
             <a:r>
+              <a:rPr sz="1000" dirty="0"/>
               <a:t>- Defined severity = actionable</a:t>
             </a:r>
           </a:p>
@@ -21938,6 +22272,7 @@
               </a:defRPr>
             </a:pPr>
             <a:r>
+              <a:rPr sz="1000" dirty="0"/>
               <a:t>- Reproducible across runs!</a:t>
             </a:r>
           </a:p>
@@ -21985,6 +22320,7 @@
           <a:lstStyle/>
           <a:p>
             <a:pPr algn="ctr"/>
+            <a:endParaRPr/>
           </a:p>
         </p:txBody>
       </p:sp>
@@ -22058,6 +22394,7 @@
               </a:defRPr>
             </a:pPr>
             <a:r>
+              <a:rPr dirty="0"/>
               <a:t>Vague: 'Grade these essays fairly.' -- Every teacher grades differently. No consistency!</a:t>
             </a:r>
           </a:p>
@@ -22074,6 +22411,7 @@
               </a:defRPr>
             </a:pPr>
             <a:r>
+              <a:rPr dirty="0"/>
               <a:t>Explicit: 'Use this rubric: Thesis (20pts), Evidence (30pts), Grammar (20pts), Structure (30pts)'.</a:t>
             </a:r>
           </a:p>
@@ -22090,6 +22428,7 @@
               </a:defRPr>
             </a:pPr>
             <a:r>
+              <a:rPr dirty="0"/>
               <a:t>With a rubric, ANY teacher produces consistent grades. Explicit prompts are your rubric for Claude!</a:t>
             </a:r>
           </a:p>
@@ -22105,6 +22444,7 @@
                 <a:latin typeface="Calibri"/>
               </a:defRPr>
             </a:pPr>
+            <a:endParaRPr dirty="0"/>
           </a:p>
           <a:p>
             <a:pPr>
@@ -22119,6 +22459,7 @@
               </a:defRPr>
             </a:pPr>
             <a:r>
+              <a:rPr dirty="0"/>
               <a:t>Reducing false positives = iterating on your rubric. Run it, check results, tighten the criteria.</a:t>
             </a:r>
           </a:p>
@@ -22133,7 +22474,7 @@
 </file>
 
 <file path=ppt/slides/slide6.xml><?xml version="1.0" encoding="utf-8"?>
-<p:sld xmlns:a="http://schemas.openxmlformats.org/drawingml/2006/main" xmlns:p="http://schemas.openxmlformats.org/presentationml/2006/main" xmlns:r="http://schemas.openxmlformats.org/officeDocument/2006/relationships">
+<p:sld xmlns:a="http://schemas.openxmlformats.org/drawingml/2006/main" xmlns:r="http://schemas.openxmlformats.org/officeDocument/2006/relationships" xmlns:p="http://schemas.openxmlformats.org/presentationml/2006/main">
   <p:cSld>
     <p:bg>
       <p:bgPr>
@@ -22149,7 +22490,14 @@
         <p:cNvGrpSpPr/>
         <p:nvPr/>
       </p:nvGrpSpPr>
-      <p:grpSpPr/>
+      <p:grpSpPr>
+        <a:xfrm>
+          <a:off x="0" y="0"/>
+          <a:ext cx="0" cy="0"/>
+          <a:chOff x="0" y="0"/>
+          <a:chExt cx="0" cy="0"/>
+        </a:xfrm>
+      </p:grpSpPr>
       <p:sp>
         <p:nvSpPr>
           <p:cNvPr id="2" name="Rounded Rectangle 1"/>
@@ -22190,6 +22538,7 @@
           <a:lstStyle/>
           <a:p>
             <a:pPr algn="ctr"/>
+            <a:endParaRPr/>
           </a:p>
         </p:txBody>
       </p:sp>
@@ -22341,6 +22690,7 @@
           <a:lstStyle/>
           <a:p>
             <a:pPr algn="ctr"/>
+            <a:endParaRPr/>
           </a:p>
         </p:txBody>
       </p:sp>
@@ -22353,7 +22703,7 @@
         <p:spPr>
           <a:xfrm>
             <a:off x="731520" y="1828800"/>
-            <a:ext cx="5577840" cy="3931920"/>
+            <a:ext cx="5577840" cy="3952364"/>
           </a:xfrm>
           <a:prstGeom prst="rect">
             <a:avLst/>
@@ -22378,6 +22728,7 @@
               </a:defRPr>
             </a:pPr>
             <a:r>
+              <a:rPr sz="1000" dirty="0"/>
               <a:t># Prompt with explicit severity tiers</a:t>
             </a:r>
           </a:p>
@@ -22393,6 +22744,14 @@
                 <a:latin typeface="Courier New"/>
               </a:defRPr>
             </a:pPr>
+            <a:r>
+              <a:rPr sz="1000" dirty="0" err="1"/>
+              <a:t>system_prompt</a:t>
+            </a:r>
+            <a:r>
+              <a:rPr sz="1000" dirty="0"/>
+              <a:t> = """</a:t>
+            </a:r>
           </a:p>
           <a:p>
             <a:pPr>
@@ -22407,7 +22766,8 @@
               </a:defRPr>
             </a:pPr>
             <a:r>
-              <a:t>system_prompt = """</a:t>
+              <a:rPr sz="1000" dirty="0"/>
+              <a:t>Classify each code issue found.</a:t>
             </a:r>
           </a:p>
           <a:p>
@@ -22422,296 +22782,251 @@
                 <a:latin typeface="Courier New"/>
               </a:defRPr>
             </a:pPr>
-            <a:r>
-              <a:t>Classify each code issue found.</a:t>
-            </a:r>
+            <a:endParaRPr sz="1000" dirty="0"/>
           </a:p>
           <a:p>
             <a:pPr>
               <a:spcAft>
                 <a:spcPts val="480"/>
               </a:spcAft>
+              <a:defRPr sz="1200" b="1">
+                <a:solidFill>
+                  <a:srgbClr val="2ECC71"/>
+                </a:solidFill>
+                <a:latin typeface="Courier New"/>
+              </a:defRPr>
+            </a:pPr>
+            <a:r>
+              <a:rPr sz="1000" dirty="0"/>
+              <a:t>SEVERITY DEFINITIONS:</a:t>
+            </a:r>
+          </a:p>
+          <a:p>
+            <a:pPr>
+              <a:spcAft>
+                <a:spcPts val="480"/>
+              </a:spcAft>
+              <a:defRPr sz="1200" b="1">
+                <a:solidFill>
+                  <a:srgbClr val="E74C3C"/>
+                </a:solidFill>
+                <a:latin typeface="Courier New"/>
+              </a:defRPr>
+            </a:pPr>
+            <a:r>
+              <a:rPr sz="1000" dirty="0"/>
+              <a:t>CRITICAL:</a:t>
+            </a:r>
+          </a:p>
+          <a:p>
+            <a:pPr>
+              <a:spcAft>
+                <a:spcPts val="480"/>
+              </a:spcAft>
               <a:defRPr sz="1200" b="0">
                 <a:solidFill>
+                  <a:srgbClr val="F0C674"/>
+                </a:solidFill>
+                <a:latin typeface="Courier New"/>
+              </a:defRPr>
+            </a:pPr>
+            <a:r>
+              <a:rPr sz="1000" dirty="0"/>
+              <a:t>  - SQL injection or XSS</a:t>
+            </a:r>
+          </a:p>
+          <a:p>
+            <a:pPr>
+              <a:spcAft>
+                <a:spcPts val="480"/>
+              </a:spcAft>
+              <a:defRPr sz="1200" b="0">
+                <a:solidFill>
+                  <a:srgbClr val="F0C674"/>
+                </a:solidFill>
+                <a:latin typeface="Courier New"/>
+              </a:defRPr>
+            </a:pPr>
+            <a:r>
+              <a:rPr sz="1000" dirty="0"/>
+              <a:t>  - Hardcoded secrets/passwords</a:t>
+            </a:r>
+          </a:p>
+          <a:p>
+            <a:pPr>
+              <a:spcAft>
+                <a:spcPts val="480"/>
+              </a:spcAft>
+              <a:defRPr sz="1200" b="0">
+                <a:solidFill>
+                  <a:srgbClr val="F0C674"/>
+                </a:solidFill>
+                <a:latin typeface="Courier New"/>
+              </a:defRPr>
+            </a:pPr>
+            <a:r>
+              <a:rPr sz="1000" dirty="0"/>
+              <a:t>  - Data loss or corruption risk</a:t>
+            </a:r>
+          </a:p>
+          <a:p>
+            <a:pPr>
+              <a:spcAft>
+                <a:spcPts val="480"/>
+              </a:spcAft>
+              <a:defRPr sz="1200" b="1">
+                <a:solidFill>
+                  <a:srgbClr val="E67E22"/>
+                </a:solidFill>
+                <a:latin typeface="Courier New"/>
+              </a:defRPr>
+            </a:pPr>
+            <a:r>
+              <a:rPr sz="1000" dirty="0"/>
+              <a:t>HIGH:</a:t>
+            </a:r>
+          </a:p>
+          <a:p>
+            <a:pPr>
+              <a:spcAft>
+                <a:spcPts val="480"/>
+              </a:spcAft>
+              <a:defRPr sz="1200" b="0">
+                <a:solidFill>
+                  <a:srgbClr val="F0C674"/>
+                </a:solidFill>
+                <a:latin typeface="Courier New"/>
+              </a:defRPr>
+            </a:pPr>
+            <a:r>
+              <a:rPr sz="1000" dirty="0"/>
+              <a:t>  - Feature completely broken</a:t>
+            </a:r>
+          </a:p>
+          <a:p>
+            <a:pPr>
+              <a:spcAft>
+                <a:spcPts val="480"/>
+              </a:spcAft>
+              <a:defRPr sz="1200" b="0">
+                <a:solidFill>
+                  <a:srgbClr val="F0C674"/>
+                </a:solidFill>
+                <a:latin typeface="Courier New"/>
+              </a:defRPr>
+            </a:pPr>
+            <a:r>
+              <a:rPr sz="1000" dirty="0"/>
+              <a:t>  - </a:t>
+            </a:r>
+            <a:r>
+              <a:rPr lang="en-US" sz="1000" dirty="0"/>
+              <a:t>A</a:t>
+            </a:r>
+            <a:r>
+              <a:rPr sz="1000" dirty="0"/>
+              <a:t>uthentication bypass</a:t>
+            </a:r>
+          </a:p>
+          <a:p>
+            <a:pPr>
+              <a:spcAft>
+                <a:spcPts val="480"/>
+              </a:spcAft>
+              <a:defRPr sz="1200" b="1">
+                <a:solidFill>
+                  <a:srgbClr val="3498DB"/>
+                </a:solidFill>
+                <a:latin typeface="Courier New"/>
+              </a:defRPr>
+            </a:pPr>
+            <a:r>
+              <a:rPr sz="1000" dirty="0"/>
+              <a:t>MEDIUM:</a:t>
+            </a:r>
+          </a:p>
+          <a:p>
+            <a:pPr>
+              <a:spcAft>
+                <a:spcPts val="480"/>
+              </a:spcAft>
+              <a:defRPr sz="1200" b="0">
+                <a:solidFill>
+                  <a:srgbClr val="F0C674"/>
+                </a:solidFill>
+                <a:latin typeface="Courier New"/>
+              </a:defRPr>
+            </a:pPr>
+            <a:r>
+              <a:rPr sz="1000" dirty="0"/>
+              <a:t>  - Degraded user experience</a:t>
+            </a:r>
+          </a:p>
+          <a:p>
+            <a:pPr>
+              <a:spcAft>
+                <a:spcPts val="480"/>
+              </a:spcAft>
+              <a:defRPr sz="1200" b="0">
+                <a:solidFill>
+                  <a:srgbClr val="F0C674"/>
+                </a:solidFill>
+                <a:latin typeface="Courier New"/>
+              </a:defRPr>
+            </a:pPr>
+            <a:r>
+              <a:rPr sz="1000" dirty="0"/>
+              <a:t>  - Missing error handling</a:t>
+            </a:r>
+          </a:p>
+          <a:p>
+            <a:pPr>
+              <a:spcAft>
+                <a:spcPts val="480"/>
+              </a:spcAft>
+              <a:defRPr sz="1200" b="1">
+                <a:solidFill>
+                  <a:srgbClr val="2ECC71"/>
+                </a:solidFill>
+                <a:latin typeface="Courier New"/>
+              </a:defRPr>
+            </a:pPr>
+            <a:r>
+              <a:rPr sz="1000" dirty="0"/>
+              <a:t>LOW:</a:t>
+            </a:r>
+          </a:p>
+          <a:p>
+            <a:pPr>
+              <a:spcAft>
+                <a:spcPts val="480"/>
+              </a:spcAft>
+              <a:defRPr sz="1200" b="0">
+                <a:solidFill>
+                  <a:srgbClr val="F0C674"/>
+                </a:solidFill>
+                <a:latin typeface="Courier New"/>
+              </a:defRPr>
+            </a:pPr>
+            <a:r>
+              <a:rPr sz="1000" dirty="0"/>
+              <a:t>  - Code style / naming issues</a:t>
+            </a:r>
+          </a:p>
+          <a:p>
+            <a:pPr>
+              <a:spcAft>
+                <a:spcPts val="480"/>
+              </a:spcAft>
+              <a:defRPr sz="1200" b="0">
+                <a:solidFill>
                   <a:srgbClr val="FFFFFF"/>
                 </a:solidFill>
                 <a:latin typeface="Courier New"/>
               </a:defRPr>
             </a:pPr>
-          </a:p>
-          <a:p>
-            <a:pPr>
-              <a:spcAft>
-                <a:spcPts val="480"/>
-              </a:spcAft>
-              <a:defRPr sz="1200" b="1">
-                <a:solidFill>
-                  <a:srgbClr val="2ECC71"/>
-                </a:solidFill>
-                <a:latin typeface="Courier New"/>
-              </a:defRPr>
-            </a:pPr>
-            <a:r>
-              <a:t>SEVERITY DEFINITIONS:</a:t>
-            </a:r>
-          </a:p>
-          <a:p>
-            <a:pPr>
-              <a:spcAft>
-                <a:spcPts val="480"/>
-              </a:spcAft>
-              <a:defRPr sz="1200" b="0">
-                <a:solidFill>
-                  <a:srgbClr val="FFFFFF"/>
-                </a:solidFill>
-                <a:latin typeface="Courier New"/>
-              </a:defRPr>
-            </a:pPr>
-          </a:p>
-          <a:p>
-            <a:pPr>
-              <a:spcAft>
-                <a:spcPts val="480"/>
-              </a:spcAft>
-              <a:defRPr sz="1200" b="1">
-                <a:solidFill>
-                  <a:srgbClr val="E74C3C"/>
-                </a:solidFill>
-                <a:latin typeface="Courier New"/>
-              </a:defRPr>
-            </a:pPr>
-            <a:r>
-              <a:t>CRITICAL:</a:t>
-            </a:r>
-          </a:p>
-          <a:p>
-            <a:pPr>
-              <a:spcAft>
-                <a:spcPts val="480"/>
-              </a:spcAft>
-              <a:defRPr sz="1200" b="0">
-                <a:solidFill>
-                  <a:srgbClr val="F0C674"/>
-                </a:solidFill>
-                <a:latin typeface="Courier New"/>
-              </a:defRPr>
-            </a:pPr>
-            <a:r>
-              <a:t>  - SQL injection or XSS</a:t>
-            </a:r>
-          </a:p>
-          <a:p>
-            <a:pPr>
-              <a:spcAft>
-                <a:spcPts val="480"/>
-              </a:spcAft>
-              <a:defRPr sz="1200" b="0">
-                <a:solidFill>
-                  <a:srgbClr val="F0C674"/>
-                </a:solidFill>
-                <a:latin typeface="Courier New"/>
-              </a:defRPr>
-            </a:pPr>
-            <a:r>
-              <a:t>  - Hardcoded secrets/passwords</a:t>
-            </a:r>
-          </a:p>
-          <a:p>
-            <a:pPr>
-              <a:spcAft>
-                <a:spcPts val="480"/>
-              </a:spcAft>
-              <a:defRPr sz="1200" b="0">
-                <a:solidFill>
-                  <a:srgbClr val="F0C674"/>
-                </a:solidFill>
-                <a:latin typeface="Courier New"/>
-              </a:defRPr>
-            </a:pPr>
-            <a:r>
-              <a:t>  - Data loss or corruption risk</a:t>
-            </a:r>
-          </a:p>
-          <a:p>
-            <a:pPr>
-              <a:spcAft>
-                <a:spcPts val="480"/>
-              </a:spcAft>
-              <a:defRPr sz="1200" b="0">
-                <a:solidFill>
-                  <a:srgbClr val="FFFFFF"/>
-                </a:solidFill>
-                <a:latin typeface="Courier New"/>
-              </a:defRPr>
-            </a:pPr>
-          </a:p>
-          <a:p>
-            <a:pPr>
-              <a:spcAft>
-                <a:spcPts val="480"/>
-              </a:spcAft>
-              <a:defRPr sz="1200" b="1">
-                <a:solidFill>
-                  <a:srgbClr val="E67E22"/>
-                </a:solidFill>
-                <a:latin typeface="Courier New"/>
-              </a:defRPr>
-            </a:pPr>
-            <a:r>
-              <a:t>HIGH:</a:t>
-            </a:r>
-          </a:p>
-          <a:p>
-            <a:pPr>
-              <a:spcAft>
-                <a:spcPts val="480"/>
-              </a:spcAft>
-              <a:defRPr sz="1200" b="0">
-                <a:solidFill>
-                  <a:srgbClr val="F0C674"/>
-                </a:solidFill>
-                <a:latin typeface="Courier New"/>
-              </a:defRPr>
-            </a:pPr>
-            <a:r>
-              <a:t>  - Feature completely broken</a:t>
-            </a:r>
-          </a:p>
-          <a:p>
-            <a:pPr>
-              <a:spcAft>
-                <a:spcPts val="480"/>
-              </a:spcAft>
-              <a:defRPr sz="1200" b="0">
-                <a:solidFill>
-                  <a:srgbClr val="F0C674"/>
-                </a:solidFill>
-                <a:latin typeface="Courier New"/>
-              </a:defRPr>
-            </a:pPr>
-            <a:r>
-              <a:t>  - Authentication bypass</a:t>
-            </a:r>
-          </a:p>
-          <a:p>
-            <a:pPr>
-              <a:spcAft>
-                <a:spcPts val="480"/>
-              </a:spcAft>
-              <a:defRPr sz="1200" b="0">
-                <a:solidFill>
-                  <a:srgbClr val="FFFFFF"/>
-                </a:solidFill>
-                <a:latin typeface="Courier New"/>
-              </a:defRPr>
-            </a:pPr>
-          </a:p>
-          <a:p>
-            <a:pPr>
-              <a:spcAft>
-                <a:spcPts val="480"/>
-              </a:spcAft>
-              <a:defRPr sz="1200" b="1">
-                <a:solidFill>
-                  <a:srgbClr val="3498DB"/>
-                </a:solidFill>
-                <a:latin typeface="Courier New"/>
-              </a:defRPr>
-            </a:pPr>
-            <a:r>
-              <a:t>MEDIUM:</a:t>
-            </a:r>
-          </a:p>
-          <a:p>
-            <a:pPr>
-              <a:spcAft>
-                <a:spcPts val="480"/>
-              </a:spcAft>
-              <a:defRPr sz="1200" b="0">
-                <a:solidFill>
-                  <a:srgbClr val="F0C674"/>
-                </a:solidFill>
-                <a:latin typeface="Courier New"/>
-              </a:defRPr>
-            </a:pPr>
-            <a:r>
-              <a:t>  - Degraded user experience</a:t>
-            </a:r>
-          </a:p>
-          <a:p>
-            <a:pPr>
-              <a:spcAft>
-                <a:spcPts val="480"/>
-              </a:spcAft>
-              <a:defRPr sz="1200" b="0">
-                <a:solidFill>
-                  <a:srgbClr val="F0C674"/>
-                </a:solidFill>
-                <a:latin typeface="Courier New"/>
-              </a:defRPr>
-            </a:pPr>
-            <a:r>
-              <a:t>  - Missing error handling</a:t>
-            </a:r>
-          </a:p>
-          <a:p>
-            <a:pPr>
-              <a:spcAft>
-                <a:spcPts val="480"/>
-              </a:spcAft>
-              <a:defRPr sz="1200" b="0">
-                <a:solidFill>
-                  <a:srgbClr val="FFFFFF"/>
-                </a:solidFill>
-                <a:latin typeface="Courier New"/>
-              </a:defRPr>
-            </a:pPr>
-          </a:p>
-          <a:p>
-            <a:pPr>
-              <a:spcAft>
-                <a:spcPts val="480"/>
-              </a:spcAft>
-              <a:defRPr sz="1200" b="1">
-                <a:solidFill>
-                  <a:srgbClr val="2ECC71"/>
-                </a:solidFill>
-                <a:latin typeface="Courier New"/>
-              </a:defRPr>
-            </a:pPr>
-            <a:r>
-              <a:t>LOW:</a:t>
-            </a:r>
-          </a:p>
-          <a:p>
-            <a:pPr>
-              <a:spcAft>
-                <a:spcPts val="480"/>
-              </a:spcAft>
-              <a:defRPr sz="1200" b="0">
-                <a:solidFill>
-                  <a:srgbClr val="F0C674"/>
-                </a:solidFill>
-                <a:latin typeface="Courier New"/>
-              </a:defRPr>
-            </a:pPr>
-            <a:r>
-              <a:t>  - Code style / naming issues</a:t>
-            </a:r>
-          </a:p>
-          <a:p>
-            <a:pPr>
-              <a:spcAft>
-                <a:spcPts val="480"/>
-              </a:spcAft>
-              <a:defRPr sz="1200" b="0">
-                <a:solidFill>
-                  <a:srgbClr val="FFFFFF"/>
-                </a:solidFill>
-                <a:latin typeface="Courier New"/>
-              </a:defRPr>
-            </a:pPr>
-            <a:r>
+            <a:r>
+              <a:rPr sz="1000" dirty="0"/>
               <a:t>"""</a:t>
             </a:r>
           </a:p>
@@ -22789,7 +23104,7 @@
           </a:fontRef>
         </p:style>
         <p:txBody>
-          <a:bodyPr rtlCol="0" anchor="ctr" wrap="square"/>
+          <a:bodyPr wrap="square" rtlCol="0" anchor="ctr"/>
           <a:lstStyle/>
           <a:p>
             <a:pPr algn="ctr">
@@ -22882,7 +23197,7 @@
           </a:fontRef>
         </p:style>
         <p:txBody>
-          <a:bodyPr rtlCol="0" anchor="ctr" wrap="square"/>
+          <a:bodyPr wrap="square" rtlCol="0" anchor="ctr"/>
           <a:lstStyle/>
           <a:p>
             <a:pPr algn="ctr">
@@ -22975,7 +23290,7 @@
           </a:fontRef>
         </p:style>
         <p:txBody>
-          <a:bodyPr rtlCol="0" anchor="ctr" wrap="square"/>
+          <a:bodyPr wrap="square" rtlCol="0" anchor="ctr"/>
           <a:lstStyle/>
           <a:p>
             <a:pPr algn="ctr">
@@ -23068,7 +23383,7 @@
           </a:fontRef>
         </p:style>
         <p:txBody>
-          <a:bodyPr rtlCol="0" anchor="ctr" wrap="square"/>
+          <a:bodyPr wrap="square" rtlCol="0" anchor="ctr"/>
           <a:lstStyle/>
           <a:p>
             <a:pPr algn="ctr">
@@ -23167,6 +23482,7 @@
           <a:lstStyle/>
           <a:p>
             <a:pPr algn="ctr"/>
+            <a:endParaRPr/>
           </a:p>
         </p:txBody>
       </p:sp>
@@ -23215,7 +23531,7 @@
 </file>
 
 <file path=ppt/slides/slide7.xml><?xml version="1.0" encoding="utf-8"?>
-<p:sld xmlns:a="http://schemas.openxmlformats.org/drawingml/2006/main" xmlns:p="http://schemas.openxmlformats.org/presentationml/2006/main" xmlns:r="http://schemas.openxmlformats.org/officeDocument/2006/relationships">
+<p:sld xmlns:a="http://schemas.openxmlformats.org/drawingml/2006/main" xmlns:r="http://schemas.openxmlformats.org/officeDocument/2006/relationships" xmlns:p="http://schemas.openxmlformats.org/presentationml/2006/main">
   <p:cSld>
     <p:bg>
       <p:bgPr>
@@ -23231,7 +23547,14 @@
         <p:cNvGrpSpPr/>
         <p:nvPr/>
       </p:nvGrpSpPr>
-      <p:grpSpPr/>
+      <p:grpSpPr>
+        <a:xfrm>
+          <a:off x="0" y="0"/>
+          <a:ext cx="0" cy="0"/>
+          <a:chOff x="0" y="0"/>
+          <a:chExt cx="0" cy="0"/>
+        </a:xfrm>
+      </p:grpSpPr>
       <p:sp>
         <p:nvSpPr>
           <p:cNvPr id="2" name="Oval 1"/>
@@ -23268,7 +23591,7 @@
           </a:fontRef>
         </p:style>
         <p:txBody>
-          <a:bodyPr rtlCol="0" anchor="ctr" wrap="square"/>
+          <a:bodyPr wrap="square" rtlCol="0" anchor="ctr"/>
           <a:lstStyle/>
           <a:p>
             <a:pPr algn="ctr">
@@ -23372,7 +23695,7 @@
 </file>
 
 <file path=ppt/slides/slide8.xml><?xml version="1.0" encoding="utf-8"?>
-<p:sld xmlns:a="http://schemas.openxmlformats.org/drawingml/2006/main" xmlns:p="http://schemas.openxmlformats.org/presentationml/2006/main" xmlns:r="http://schemas.openxmlformats.org/officeDocument/2006/relationships">
+<p:sld xmlns:a="http://schemas.openxmlformats.org/drawingml/2006/main" xmlns:r="http://schemas.openxmlformats.org/officeDocument/2006/relationships" xmlns:p="http://schemas.openxmlformats.org/presentationml/2006/main">
   <p:cSld>
     <p:bg>
       <p:bgPr>
@@ -23388,7 +23711,14 @@
         <p:cNvGrpSpPr/>
         <p:nvPr/>
       </p:nvGrpSpPr>
-      <p:grpSpPr/>
+      <p:grpSpPr>
+        <a:xfrm>
+          <a:off x="0" y="0"/>
+          <a:ext cx="0" cy="0"/>
+          <a:chOff x="0" y="0"/>
+          <a:chExt cx="0" cy="0"/>
+        </a:xfrm>
+      </p:grpSpPr>
       <p:sp>
         <p:nvSpPr>
           <p:cNvPr id="2" name="Rounded Rectangle 1"/>
@@ -23429,6 +23759,7 @@
           <a:lstStyle/>
           <a:p>
             <a:pPr algn="ctr"/>
+            <a:endParaRPr/>
           </a:p>
         </p:txBody>
       </p:sp>
@@ -23546,6 +23877,7 @@
           <a:lstStyle/>
           <a:p>
             <a:pPr algn="ctr"/>
+            <a:endParaRPr/>
           </a:p>
         </p:txBody>
       </p:sp>
@@ -23692,7 +24024,7 @@
           </a:fontRef>
         </p:style>
         <p:txBody>
-          <a:bodyPr rtlCol="0" anchor="ctr" wrap="square"/>
+          <a:bodyPr wrap="square" rtlCol="0" anchor="ctr"/>
           <a:lstStyle/>
           <a:p>
             <a:pPr algn="ctr">
@@ -23791,6 +24123,7 @@
           <a:lstStyle/>
           <a:p>
             <a:pPr algn="ctr"/>
+            <a:endParaRPr/>
           </a:p>
         </p:txBody>
       </p:sp>
@@ -23881,6 +24214,7 @@
           <a:lstStyle/>
           <a:p>
             <a:pPr algn="ctr"/>
+            <a:endParaRPr/>
           </a:p>
         </p:txBody>
       </p:sp>
@@ -23960,7 +24294,7 @@
           </a:fontRef>
         </p:style>
         <p:txBody>
-          <a:bodyPr rtlCol="0" anchor="ctr" wrap="square"/>
+          <a:bodyPr wrap="square" rtlCol="0" anchor="ctr"/>
           <a:lstStyle/>
           <a:p>
             <a:pPr algn="ctr">
@@ -24063,6 +24397,7 @@
           <a:lstStyle/>
           <a:p>
             <a:pPr algn="ctr"/>
+            <a:endParaRPr/>
           </a:p>
         </p:txBody>
       </p:sp>
@@ -24157,6 +24492,7 @@
           <a:lstStyle/>
           <a:p>
             <a:pPr algn="ctr"/>
+            <a:endParaRPr/>
           </a:p>
         </p:txBody>
       </p:sp>
@@ -24240,7 +24576,7 @@
           </a:fontRef>
         </p:style>
         <p:txBody>
-          <a:bodyPr rtlCol="0" anchor="ctr" wrap="square"/>
+          <a:bodyPr wrap="square" rtlCol="0" anchor="ctr"/>
           <a:lstStyle/>
           <a:p>
             <a:pPr algn="ctr">
@@ -24343,6 +24679,7 @@
           <a:lstStyle/>
           <a:p>
             <a:pPr algn="ctr"/>
+            <a:endParaRPr/>
           </a:p>
         </p:txBody>
       </p:sp>
@@ -24437,6 +24774,7 @@
           <a:lstStyle/>
           <a:p>
             <a:pPr algn="ctr"/>
+            <a:endParaRPr/>
           </a:p>
         </p:txBody>
       </p:sp>
@@ -24493,7 +24831,7 @@
 </file>
 
 <file path=ppt/slides/slide9.xml><?xml version="1.0" encoding="utf-8"?>
-<p:sld xmlns:a="http://schemas.openxmlformats.org/drawingml/2006/main" xmlns:p="http://schemas.openxmlformats.org/presentationml/2006/main" xmlns:r="http://schemas.openxmlformats.org/officeDocument/2006/relationships">
+<p:sld xmlns:a="http://schemas.openxmlformats.org/drawingml/2006/main" xmlns:r="http://schemas.openxmlformats.org/officeDocument/2006/relationships" xmlns:p="http://schemas.openxmlformats.org/presentationml/2006/main">
   <p:cSld>
     <p:bg>
       <p:bgPr>
@@ -24509,7 +24847,14 @@
         <p:cNvGrpSpPr/>
         <p:nvPr/>
       </p:nvGrpSpPr>
-      <p:grpSpPr/>
+      <p:grpSpPr>
+        <a:xfrm>
+          <a:off x="0" y="0"/>
+          <a:ext cx="0" cy="0"/>
+          <a:chOff x="0" y="0"/>
+          <a:chExt cx="0" cy="0"/>
+        </a:xfrm>
+      </p:grpSpPr>
       <p:sp>
         <p:nvSpPr>
           <p:cNvPr id="2" name="Rounded Rectangle 1"/>
@@ -24550,6 +24895,7 @@
           <a:lstStyle/>
           <a:p>
             <a:pPr algn="ctr"/>
+            <a:endParaRPr/>
           </a:p>
         </p:txBody>
       </p:sp>
@@ -24701,6 +25047,7 @@
           <a:lstStyle/>
           <a:p>
             <a:pPr algn="ctr"/>
+            <a:endParaRPr/>
           </a:p>
         </p:txBody>
       </p:sp>
@@ -24753,6 +25100,7 @@
                 <a:latin typeface="Courier New"/>
               </a:defRPr>
             </a:pPr>
+            <a:endParaRPr/>
           </a:p>
           <a:p>
             <a:pPr>
@@ -24862,6 +25210,7 @@
                 <a:latin typeface="Courier New"/>
               </a:defRPr>
             </a:pPr>
+            <a:endParaRPr/>
           </a:p>
           <a:p>
             <a:pPr>
@@ -24971,6 +25320,7 @@
                 <a:latin typeface="Courier New"/>
               </a:defRPr>
             </a:pPr>
+            <a:endParaRPr/>
           </a:p>
           <a:p>
             <a:pPr>
@@ -25080,6 +25430,7 @@
                 <a:latin typeface="Courier New"/>
               </a:defRPr>
             </a:pPr>
+            <a:endParaRPr/>
           </a:p>
           <a:p>
             <a:pPr>
@@ -25219,7 +25570,7 @@
           </a:fontRef>
         </p:style>
         <p:txBody>
-          <a:bodyPr rtlCol="0" anchor="ctr" wrap="square"/>
+          <a:bodyPr wrap="square" rtlCol="0" anchor="ctr"/>
           <a:lstStyle/>
           <a:p>
             <a:pPr algn="ctr">
@@ -25316,7 +25667,7 @@
           </a:fontRef>
         </p:style>
         <p:txBody>
-          <a:bodyPr rtlCol="0" anchor="ctr" wrap="square"/>
+          <a:bodyPr wrap="square" rtlCol="0" anchor="ctr"/>
           <a:lstStyle/>
           <a:p>
             <a:pPr algn="ctr">
@@ -25413,7 +25764,7 @@
           </a:fontRef>
         </p:style>
         <p:txBody>
-          <a:bodyPr rtlCol="0" anchor="ctr" wrap="square"/>
+          <a:bodyPr wrap="square" rtlCol="0" anchor="ctr"/>
           <a:lstStyle/>
           <a:p>
             <a:pPr algn="ctr">
@@ -25510,7 +25861,7 @@
           </a:fontRef>
         </p:style>
         <p:txBody>
-          <a:bodyPr rtlCol="0" anchor="ctr" wrap="square"/>
+          <a:bodyPr wrap="square" rtlCol="0" anchor="ctr"/>
           <a:lstStyle/>
           <a:p>
             <a:pPr algn="ctr">
@@ -25613,6 +25964,7 @@
           <a:lstStyle/>
           <a:p>
             <a:pPr algn="ctr"/>
+            <a:endParaRPr/>
           </a:p>
         </p:txBody>
       </p:sp>

--- a/week-4/CCA-F_Module4_Prompt_Engineering_Structured_Output.pptx
+++ b/week-4/CCA-F_Module4_Prompt_Engineering_Structured_Output.pptx
@@ -3762,6 +3762,7 @@
               </a:defRPr>
             </a:pPr>
             <a:r>
+              <a:rPr dirty="0"/>
               <a:t>Few-Shot Best Practices &amp; Generalization</a:t>
             </a:r>
           </a:p>
@@ -3930,7 +3931,7 @@
         <p:spPr>
           <a:xfrm>
             <a:off x="731520" y="2194560"/>
-            <a:ext cx="3017520" cy="2194560"/>
+            <a:ext cx="3017520" cy="2018501"/>
           </a:xfrm>
           <a:prstGeom prst="rect">
             <a:avLst/>
@@ -3955,6 +3956,7 @@
               </a:defRPr>
             </a:pPr>
             <a:r>
+              <a:rPr dirty="0"/>
               <a:t>2 examples: Minimum. Shows</a:t>
             </a:r>
           </a:p>
@@ -3971,6 +3973,7 @@
               </a:defRPr>
             </a:pPr>
             <a:r>
+              <a:rPr dirty="0"/>
               <a:t>   the format but limited coverage.</a:t>
             </a:r>
           </a:p>
@@ -3979,6 +3982,23 @@
               <a:spcAft>
                 <a:spcPts val="480"/>
               </a:spcAft>
+              <a:defRPr sz="1200" b="1">
+                <a:solidFill>
+                  <a:srgbClr val="2ECC71"/>
+                </a:solidFill>
+                <a:latin typeface="Calibri"/>
+              </a:defRPr>
+            </a:pPr>
+            <a:r>
+              <a:rPr dirty="0"/>
+              <a:t>3-4 examples: Sweet spot.</a:t>
+            </a:r>
+          </a:p>
+          <a:p>
+            <a:pPr>
+              <a:spcAft>
+                <a:spcPts val="480"/>
+              </a:spcAft>
               <a:defRPr sz="1200" b="0">
                 <a:solidFill>
                   <a:srgbClr val="2C3E50"/>
@@ -3986,22 +4006,26 @@
                 <a:latin typeface="Calibri"/>
               </a:defRPr>
             </a:pPr>
-            <a:endParaRPr/>
+            <a:r>
+              <a:rPr dirty="0"/>
+              <a:t>   Enough to show pattern +</a:t>
+            </a:r>
           </a:p>
           <a:p>
             <a:pPr>
               <a:spcAft>
                 <a:spcPts val="480"/>
               </a:spcAft>
-              <a:defRPr sz="1200" b="1">
-                <a:solidFill>
-                  <a:srgbClr val="2ECC71"/>
-                </a:solidFill>
-                <a:latin typeface="Calibri"/>
-              </a:defRPr>
-            </a:pPr>
-            <a:r>
-              <a:t>3-4 examples: Sweet spot.</a:t>
+              <a:defRPr sz="1200" b="0">
+                <a:solidFill>
+                  <a:srgbClr val="2C3E50"/>
+                </a:solidFill>
+                <a:latin typeface="Calibri"/>
+              </a:defRPr>
+            </a:pPr>
+            <a:r>
+              <a:rPr dirty="0"/>
+              <a:t>   edge cases without wasting</a:t>
             </a:r>
           </a:p>
           <a:p>
@@ -4017,7 +4041,8 @@
               </a:defRPr>
             </a:pPr>
             <a:r>
-              <a:t>   Enough to show pattern +</a:t>
+              <a:rPr dirty="0"/>
+              <a:t>   tokens.</a:t>
             </a:r>
           </a:p>
           <a:p>
@@ -4033,7 +4058,8 @@
               </a:defRPr>
             </a:pPr>
             <a:r>
-              <a:t>   edge cases without wasting</a:t>
+              <a:rPr dirty="0"/>
+              <a:t>5+: Diminishing returns. Only</a:t>
             </a:r>
           </a:p>
           <a:p>
@@ -4049,52 +4075,7 @@
               </a:defRPr>
             </a:pPr>
             <a:r>
-              <a:t>   tokens.</a:t>
-            </a:r>
-          </a:p>
-          <a:p>
-            <a:pPr>
-              <a:spcAft>
-                <a:spcPts val="480"/>
-              </a:spcAft>
-              <a:defRPr sz="1200" b="0">
-                <a:solidFill>
-                  <a:srgbClr val="2C3E50"/>
-                </a:solidFill>
-                <a:latin typeface="Calibri"/>
-              </a:defRPr>
-            </a:pPr>
-            <a:endParaRPr/>
-          </a:p>
-          <a:p>
-            <a:pPr>
-              <a:spcAft>
-                <a:spcPts val="480"/>
-              </a:spcAft>
-              <a:defRPr sz="1200" b="0">
-                <a:solidFill>
-                  <a:srgbClr val="2C3E50"/>
-                </a:solidFill>
-                <a:latin typeface="Calibri"/>
-              </a:defRPr>
-            </a:pPr>
-            <a:r>
-              <a:t>5+: Diminishing returns. Only</a:t>
-            </a:r>
-          </a:p>
-          <a:p>
-            <a:pPr>
-              <a:spcAft>
-                <a:spcPts val="480"/>
-              </a:spcAft>
-              <a:defRPr sz="1200" b="0">
-                <a:solidFill>
-                  <a:srgbClr val="2C3E50"/>
-                </a:solidFill>
-                <a:latin typeface="Calibri"/>
-              </a:defRPr>
-            </a:pPr>
-            <a:r>
+              <a:rPr dirty="0"/>
               <a:t>   if task is very complex.</a:t>
             </a:r>
           </a:p>
@@ -7632,7 +7613,7 @@
         </p:nvSpPr>
         <p:spPr>
           <a:xfrm>
-            <a:off x="731520" y="1097280"/>
+            <a:off x="548640" y="850392"/>
             <a:ext cx="10058400" cy="457200"/>
           </a:xfrm>
           <a:prstGeom prst="rect">
@@ -7668,8 +7649,8 @@
         </p:nvSpPr>
         <p:spPr>
           <a:xfrm>
-            <a:off x="548640" y="1737360"/>
-            <a:ext cx="5943600" cy="4572000"/>
+            <a:off x="457200" y="1391111"/>
+            <a:ext cx="5943600" cy="5120640"/>
           </a:xfrm>
           <a:prstGeom prst="roundRect">
             <a:avLst/>
@@ -7712,8 +7693,8 @@
         </p:nvSpPr>
         <p:spPr>
           <a:xfrm>
-            <a:off x="731520" y="1828800"/>
-            <a:ext cx="5577840" cy="4389120"/>
+            <a:off x="868680" y="1426465"/>
+            <a:ext cx="5009606" cy="5098832"/>
           </a:xfrm>
           <a:prstGeom prst="rect">
             <a:avLst/>
@@ -7738,6 +7719,7 @@
               </a:defRPr>
             </a:pPr>
             <a:r>
+              <a:rPr sz="800" dirty="0"/>
               <a:t># Tool schema with best practices</a:t>
             </a:r>
           </a:p>
@@ -7753,7 +7735,7 @@
                 <a:latin typeface="Courier New"/>
               </a:defRPr>
             </a:pPr>
-            <a:endParaRPr/>
+            <a:endParaRPr sz="800" dirty="0"/>
           </a:p>
           <a:p>
             <a:pPr>
@@ -7768,6 +7750,7 @@
               </a:defRPr>
             </a:pPr>
             <a:r>
+              <a:rPr sz="800" dirty="0"/>
               <a:t>tool = {</a:t>
             </a:r>
           </a:p>
@@ -7784,7 +7767,16 @@
               </a:defRPr>
             </a:pPr>
             <a:r>
-              <a:t>  "name": "classify_issue",</a:t>
+              <a:rPr sz="800" dirty="0"/>
+              <a:t>  "name": "</a:t>
+            </a:r>
+            <a:r>
+              <a:rPr sz="800" dirty="0" err="1"/>
+              <a:t>classify_issue</a:t>
+            </a:r>
+            <a:r>
+              <a:rPr sz="800" dirty="0"/>
+              <a:t>",</a:t>
             </a:r>
           </a:p>
           <a:p>
@@ -7800,6 +7792,7 @@
               </a:defRPr>
             </a:pPr>
             <a:r>
+              <a:rPr sz="800" dirty="0"/>
               <a:t>  "description": "Classify a code issue",</a:t>
             </a:r>
           </a:p>
@@ -7816,7 +7809,16 @@
               </a:defRPr>
             </a:pPr>
             <a:r>
-              <a:t>  "input_schema": {</a:t>
+              <a:rPr sz="800" dirty="0"/>
+              <a:t>  "</a:t>
+            </a:r>
+            <a:r>
+              <a:rPr sz="800" dirty="0" err="1"/>
+              <a:t>input_schema</a:t>
+            </a:r>
+            <a:r>
+              <a:rPr sz="800" dirty="0"/>
+              <a:t>": {</a:t>
             </a:r>
           </a:p>
           <a:p>
@@ -7832,6 +7834,7 @@
               </a:defRPr>
             </a:pPr>
             <a:r>
+              <a:rPr sz="800" dirty="0"/>
               <a:t>    "type": "object",</a:t>
             </a:r>
           </a:p>
@@ -7848,6 +7851,7 @@
               </a:defRPr>
             </a:pPr>
             <a:r>
+              <a:rPr sz="800" dirty="0"/>
               <a:t>    "properties": {</a:t>
             </a:r>
           </a:p>
@@ -7863,7 +7867,10 @@
                 <a:latin typeface="Courier New"/>
               </a:defRPr>
             </a:pPr>
-            <a:endParaRPr/>
+            <a:r>
+              <a:rPr sz="800" dirty="0"/>
+              <a:t>      "category": {</a:t>
+            </a:r>
           </a:p>
           <a:p>
             <a:pPr>
@@ -7878,7 +7885,8 @@
               </a:defRPr>
             </a:pPr>
             <a:r>
-              <a:t>      "category": {</a:t>
+              <a:rPr sz="800" dirty="0"/>
+              <a:t>        "type": "string",</a:t>
             </a:r>
           </a:p>
           <a:p>
@@ -7886,6 +7894,56 @@
               <a:spcAft>
                 <a:spcPts val="440"/>
               </a:spcAft>
+              <a:defRPr sz="1100" b="1">
+                <a:solidFill>
+                  <a:srgbClr val="2ECC71"/>
+                </a:solidFill>
+                <a:latin typeface="Courier New"/>
+              </a:defRPr>
+            </a:pPr>
+            <a:r>
+              <a:rPr sz="800" dirty="0"/>
+              <a:t>        "</a:t>
+            </a:r>
+            <a:r>
+              <a:rPr sz="800" dirty="0" err="1"/>
+              <a:t>enum</a:t>
+            </a:r>
+            <a:r>
+              <a:rPr sz="800" dirty="0"/>
+              <a:t>": ["security",</a:t>
+            </a:r>
+          </a:p>
+          <a:p>
+            <a:pPr>
+              <a:spcAft>
+                <a:spcPts val="440"/>
+              </a:spcAft>
+              <a:defRPr sz="1100" b="1">
+                <a:solidFill>
+                  <a:srgbClr val="2ECC71"/>
+                </a:solidFill>
+                <a:latin typeface="Courier New"/>
+              </a:defRPr>
+            </a:pPr>
+            <a:r>
+              <a:rPr sz="800" dirty="0"/>
+              <a:t>          "</a:t>
+            </a:r>
+            <a:r>
+              <a:rPr sz="800" dirty="0" err="1"/>
+              <a:t>performance","style</a:t>
+            </a:r>
+            <a:r>
+              <a:rPr sz="800" dirty="0"/>
+              <a:t>"]</a:t>
+            </a:r>
+          </a:p>
+          <a:p>
+            <a:pPr>
+              <a:spcAft>
+                <a:spcPts val="440"/>
+              </a:spcAft>
               <a:defRPr sz="1100" b="0">
                 <a:solidFill>
                   <a:srgbClr val="FFFFFF"/>
@@ -7894,6 +7952,41 @@
               </a:defRPr>
             </a:pPr>
             <a:r>
+              <a:rPr sz="800" dirty="0"/>
+              <a:t>      },</a:t>
+            </a:r>
+          </a:p>
+          <a:p>
+            <a:pPr>
+              <a:spcAft>
+                <a:spcPts val="440"/>
+              </a:spcAft>
+              <a:defRPr sz="1100" b="0">
+                <a:solidFill>
+                  <a:srgbClr val="FFFFFF"/>
+                </a:solidFill>
+                <a:latin typeface="Courier New"/>
+              </a:defRPr>
+            </a:pPr>
+            <a:r>
+              <a:rPr sz="800" dirty="0"/>
+              <a:t>      "severity": {</a:t>
+            </a:r>
+          </a:p>
+          <a:p>
+            <a:pPr>
+              <a:spcAft>
+                <a:spcPts val="440"/>
+              </a:spcAft>
+              <a:defRPr sz="1100" b="0">
+                <a:solidFill>
+                  <a:srgbClr val="FFFFFF"/>
+                </a:solidFill>
+                <a:latin typeface="Courier New"/>
+              </a:defRPr>
+            </a:pPr>
+            <a:r>
+              <a:rPr sz="800" dirty="0"/>
               <a:t>        "type": "string",</a:t>
             </a:r>
           </a:p>
@@ -7910,7 +8003,16 @@
               </a:defRPr>
             </a:pPr>
             <a:r>
-              <a:t>        "enum": ["security",</a:t>
+              <a:rPr sz="800" dirty="0"/>
+              <a:t>        "</a:t>
+            </a:r>
+            <a:r>
+              <a:rPr sz="800" dirty="0" err="1"/>
+              <a:t>enum</a:t>
+            </a:r>
+            <a:r>
+              <a:rPr sz="800" dirty="0"/>
+              <a:t>": ["critical",</a:t>
             </a:r>
           </a:p>
           <a:p>
@@ -7926,7 +8028,16 @@
               </a:defRPr>
             </a:pPr>
             <a:r>
-              <a:t>          "performance","style"]</a:t>
+              <a:rPr sz="800" dirty="0"/>
+              <a:t>          "</a:t>
+            </a:r>
+            <a:r>
+              <a:rPr sz="800" dirty="0" err="1"/>
+              <a:t>high","medium","low</a:t>
+            </a:r>
+            <a:r>
+              <a:rPr sz="800" dirty="0"/>
+              <a:t>"]</a:t>
             </a:r>
           </a:p>
           <a:p>
@@ -7942,6 +8053,7 @@
               </a:defRPr>
             </a:pPr>
             <a:r>
+              <a:rPr sz="800" dirty="0"/>
               <a:t>      },</a:t>
             </a:r>
           </a:p>
@@ -7957,13 +8069,49 @@
                 <a:latin typeface="Courier New"/>
               </a:defRPr>
             </a:pPr>
-            <a:endParaRPr/>
+            <a:r>
+              <a:rPr sz="800" dirty="0"/>
+              <a:t>      "</a:t>
+            </a:r>
+            <a:r>
+              <a:rPr sz="800" dirty="0" err="1"/>
+              <a:t>fix_suggestion</a:t>
+            </a:r>
+            <a:r>
+              <a:rPr sz="800" dirty="0"/>
+              <a:t>": {</a:t>
+            </a:r>
           </a:p>
           <a:p>
             <a:pPr>
               <a:spcAft>
                 <a:spcPts val="440"/>
               </a:spcAft>
+              <a:defRPr sz="1100" b="1">
+                <a:solidFill>
+                  <a:srgbClr val="E67E22"/>
+                </a:solidFill>
+                <a:latin typeface="Courier New"/>
+              </a:defRPr>
+            </a:pPr>
+            <a:r>
+              <a:rPr sz="800" dirty="0"/>
+              <a:t>        "type": ["</a:t>
+            </a:r>
+            <a:r>
+              <a:rPr sz="800" dirty="0" err="1"/>
+              <a:t>string","null</a:t>
+            </a:r>
+            <a:r>
+              <a:rPr sz="800" dirty="0"/>
+              <a:t>"]</a:t>
+            </a:r>
+          </a:p>
+          <a:p>
+            <a:pPr>
+              <a:spcAft>
+                <a:spcPts val="440"/>
+              </a:spcAft>
               <a:defRPr sz="1100" b="0">
                 <a:solidFill>
                   <a:srgbClr val="FFFFFF"/>
@@ -7972,7 +8120,8 @@
               </a:defRPr>
             </a:pPr>
             <a:r>
-              <a:t>      "severity": {</a:t>
+              <a:rPr sz="800" dirty="0"/>
+              <a:t>      },</a:t>
             </a:r>
           </a:p>
           <a:p>
@@ -7988,7 +8137,8 @@
               </a:defRPr>
             </a:pPr>
             <a:r>
-              <a:t>        "type": "string",</a:t>
+              <a:rPr sz="800" dirty="0"/>
+              <a:t>      "confidence": {</a:t>
             </a:r>
           </a:p>
           <a:p>
@@ -7996,15 +8146,16 @@
               <a:spcAft>
                 <a:spcPts val="440"/>
               </a:spcAft>
-              <a:defRPr sz="1100" b="1">
-                <a:solidFill>
-                  <a:srgbClr val="2ECC71"/>
+              <a:defRPr sz="1100" b="0">
+                <a:solidFill>
+                  <a:srgbClr val="FFFFFF"/>
                 </a:solidFill>
                 <a:latin typeface="Courier New"/>
               </a:defRPr>
             </a:pPr>
             <a:r>
-              <a:t>        "enum": ["critical",</a:t>
+              <a:rPr sz="800" dirty="0"/>
+              <a:t>        "type": "number"</a:t>
             </a:r>
           </a:p>
           <a:p>
@@ -8012,15 +8163,16 @@
               <a:spcAft>
                 <a:spcPts val="440"/>
               </a:spcAft>
-              <a:defRPr sz="1100" b="1">
-                <a:solidFill>
-                  <a:srgbClr val="2ECC71"/>
+              <a:defRPr sz="1100" b="0">
+                <a:solidFill>
+                  <a:srgbClr val="FFFFFF"/>
                 </a:solidFill>
                 <a:latin typeface="Courier New"/>
               </a:defRPr>
             </a:pPr>
             <a:r>
-              <a:t>          "high","medium","low"]</a:t>
+              <a:rPr sz="800" dirty="0"/>
+              <a:t>      }</a:t>
             </a:r>
           </a:p>
           <a:p>
@@ -8036,7 +8188,8 @@
               </a:defRPr>
             </a:pPr>
             <a:r>
-              <a:t>      },</a:t>
+              <a:rPr sz="800" dirty="0"/>
+              <a:t>    },</a:t>
             </a:r>
           </a:p>
           <a:p>
@@ -8046,12 +8199,57 @@
               </a:spcAft>
               <a:defRPr sz="1100" b="0">
                 <a:solidFill>
+                  <a:srgbClr val="E74C3C"/>
+                </a:solidFill>
+                <a:latin typeface="Courier New"/>
+              </a:defRPr>
+            </a:pPr>
+            <a:r>
+              <a:rPr sz="800" dirty="0"/>
+              <a:t>    "required": ["category",</a:t>
+            </a:r>
+          </a:p>
+          <a:p>
+            <a:pPr>
+              <a:spcAft>
+                <a:spcPts val="440"/>
+              </a:spcAft>
+              <a:defRPr sz="1100" b="0">
+                <a:solidFill>
+                  <a:srgbClr val="E74C3C"/>
+                </a:solidFill>
+                <a:latin typeface="Courier New"/>
+              </a:defRPr>
+            </a:pPr>
+            <a:r>
+              <a:rPr sz="800" dirty="0"/>
+              <a:t>      "</a:t>
+            </a:r>
+            <a:r>
+              <a:rPr sz="800" dirty="0" err="1"/>
+              <a:t>severity","confidence</a:t>
+            </a:r>
+            <a:r>
+              <a:rPr sz="800" dirty="0"/>
+              <a:t>"]</a:t>
+            </a:r>
+          </a:p>
+          <a:p>
+            <a:pPr>
+              <a:spcAft>
+                <a:spcPts val="440"/>
+              </a:spcAft>
+              <a:defRPr sz="1100" b="0">
+                <a:solidFill>
                   <a:srgbClr val="FFFFFF"/>
                 </a:solidFill>
                 <a:latin typeface="Courier New"/>
               </a:defRPr>
             </a:pPr>
-            <a:endParaRPr/>
+            <a:r>
+              <a:rPr sz="800" dirty="0"/>
+              <a:t>  }</a:t>
+            </a:r>
           </a:p>
           <a:p>
             <a:pPr>
@@ -8066,180 +8264,7 @@
               </a:defRPr>
             </a:pPr>
             <a:r>
-              <a:t>      "fix_suggestion": {</a:t>
-            </a:r>
-          </a:p>
-          <a:p>
-            <a:pPr>
-              <a:spcAft>
-                <a:spcPts val="440"/>
-              </a:spcAft>
-              <a:defRPr sz="1100" b="1">
-                <a:solidFill>
-                  <a:srgbClr val="E67E22"/>
-                </a:solidFill>
-                <a:latin typeface="Courier New"/>
-              </a:defRPr>
-            </a:pPr>
-            <a:r>
-              <a:t>        "type": ["string","null"]</a:t>
-            </a:r>
-          </a:p>
-          <a:p>
-            <a:pPr>
-              <a:spcAft>
-                <a:spcPts val="440"/>
-              </a:spcAft>
-              <a:defRPr sz="1100" b="0">
-                <a:solidFill>
-                  <a:srgbClr val="FFFFFF"/>
-                </a:solidFill>
-                <a:latin typeface="Courier New"/>
-              </a:defRPr>
-            </a:pPr>
-            <a:r>
-              <a:t>      },</a:t>
-            </a:r>
-          </a:p>
-          <a:p>
-            <a:pPr>
-              <a:spcAft>
-                <a:spcPts val="440"/>
-              </a:spcAft>
-              <a:defRPr sz="1100" b="0">
-                <a:solidFill>
-                  <a:srgbClr val="FFFFFF"/>
-                </a:solidFill>
-                <a:latin typeface="Courier New"/>
-              </a:defRPr>
-            </a:pPr>
-            <a:endParaRPr/>
-          </a:p>
-          <a:p>
-            <a:pPr>
-              <a:spcAft>
-                <a:spcPts val="440"/>
-              </a:spcAft>
-              <a:defRPr sz="1100" b="0">
-                <a:solidFill>
-                  <a:srgbClr val="FFFFFF"/>
-                </a:solidFill>
-                <a:latin typeface="Courier New"/>
-              </a:defRPr>
-            </a:pPr>
-            <a:r>
-              <a:t>      "confidence": {</a:t>
-            </a:r>
-          </a:p>
-          <a:p>
-            <a:pPr>
-              <a:spcAft>
-                <a:spcPts val="440"/>
-              </a:spcAft>
-              <a:defRPr sz="1100" b="0">
-                <a:solidFill>
-                  <a:srgbClr val="FFFFFF"/>
-                </a:solidFill>
-                <a:latin typeface="Courier New"/>
-              </a:defRPr>
-            </a:pPr>
-            <a:r>
-              <a:t>        "type": "number"</a:t>
-            </a:r>
-          </a:p>
-          <a:p>
-            <a:pPr>
-              <a:spcAft>
-                <a:spcPts val="440"/>
-              </a:spcAft>
-              <a:defRPr sz="1100" b="0">
-                <a:solidFill>
-                  <a:srgbClr val="FFFFFF"/>
-                </a:solidFill>
-                <a:latin typeface="Courier New"/>
-              </a:defRPr>
-            </a:pPr>
-            <a:r>
-              <a:t>      }</a:t>
-            </a:r>
-          </a:p>
-          <a:p>
-            <a:pPr>
-              <a:spcAft>
-                <a:spcPts val="440"/>
-              </a:spcAft>
-              <a:defRPr sz="1100" b="0">
-                <a:solidFill>
-                  <a:srgbClr val="FFFFFF"/>
-                </a:solidFill>
-                <a:latin typeface="Courier New"/>
-              </a:defRPr>
-            </a:pPr>
-            <a:r>
-              <a:t>    },</a:t>
-            </a:r>
-          </a:p>
-          <a:p>
-            <a:pPr>
-              <a:spcAft>
-                <a:spcPts val="440"/>
-              </a:spcAft>
-              <a:defRPr sz="1100" b="0">
-                <a:solidFill>
-                  <a:srgbClr val="E74C3C"/>
-                </a:solidFill>
-                <a:latin typeface="Courier New"/>
-              </a:defRPr>
-            </a:pPr>
-            <a:r>
-              <a:t>    "required": ["category",</a:t>
-            </a:r>
-          </a:p>
-          <a:p>
-            <a:pPr>
-              <a:spcAft>
-                <a:spcPts val="440"/>
-              </a:spcAft>
-              <a:defRPr sz="1100" b="0">
-                <a:solidFill>
-                  <a:srgbClr val="E74C3C"/>
-                </a:solidFill>
-                <a:latin typeface="Courier New"/>
-              </a:defRPr>
-            </a:pPr>
-            <a:r>
-              <a:t>      "severity","confidence"]</a:t>
-            </a:r>
-          </a:p>
-          <a:p>
-            <a:pPr>
-              <a:spcAft>
-                <a:spcPts val="440"/>
-              </a:spcAft>
-              <a:defRPr sz="1100" b="0">
-                <a:solidFill>
-                  <a:srgbClr val="FFFFFF"/>
-                </a:solidFill>
-                <a:latin typeface="Courier New"/>
-              </a:defRPr>
-            </a:pPr>
-            <a:r>
-              <a:t>  }</a:t>
-            </a:r>
-          </a:p>
-          <a:p>
-            <a:pPr>
-              <a:spcAft>
-                <a:spcPts val="440"/>
-              </a:spcAft>
-              <a:defRPr sz="1100" b="0">
-                <a:solidFill>
-                  <a:srgbClr val="FFFFFF"/>
-                </a:solidFill>
-                <a:latin typeface="Courier New"/>
-              </a:defRPr>
-            </a:pPr>
-            <a:r>
+              <a:rPr sz="800" dirty="0"/>
               <a:t>}</a:t>
             </a:r>
           </a:p>
@@ -8253,7 +8278,7 @@
         </p:nvSpPr>
         <p:spPr>
           <a:xfrm>
-            <a:off x="6858000" y="1737360"/>
+            <a:off x="6858000" y="1329146"/>
             <a:ext cx="5029200" cy="457200"/>
           </a:xfrm>
           <a:prstGeom prst="rect">
@@ -8276,6 +8301,7 @@
               </a:defRPr>
             </a:pPr>
             <a:r>
+              <a:rPr dirty="0"/>
               <a:t>Key Schema Patterns:</a:t>
             </a:r>
           </a:p>
@@ -8289,7 +8315,7 @@
         </p:nvSpPr>
         <p:spPr>
           <a:xfrm>
-            <a:off x="6858000" y="2286000"/>
+            <a:off x="6858000" y="1877786"/>
             <a:ext cx="2103120" cy="365760"/>
           </a:xfrm>
           <a:prstGeom prst="roundRect">
@@ -8342,7 +8368,7 @@
         </p:nvSpPr>
         <p:spPr>
           <a:xfrm>
-            <a:off x="6858000" y="2743200"/>
+            <a:off x="6858000" y="2334986"/>
             <a:ext cx="5029200" cy="914400"/>
           </a:xfrm>
           <a:prstGeom prst="rect">
@@ -8390,7 +8416,7 @@
         </p:nvSpPr>
         <p:spPr>
           <a:xfrm>
-            <a:off x="6858000" y="3657600"/>
+            <a:off x="6858000" y="3249386"/>
             <a:ext cx="2103120" cy="365760"/>
           </a:xfrm>
           <a:prstGeom prst="roundRect">
@@ -8443,7 +8469,7 @@
         </p:nvSpPr>
         <p:spPr>
           <a:xfrm>
-            <a:off x="6858000" y="4114800"/>
+            <a:off x="6858000" y="3706586"/>
             <a:ext cx="5029200" cy="914400"/>
           </a:xfrm>
           <a:prstGeom prst="rect">
@@ -8491,7 +8517,7 @@
         </p:nvSpPr>
         <p:spPr>
           <a:xfrm>
-            <a:off x="6858000" y="5029200"/>
+            <a:off x="6858000" y="4620986"/>
             <a:ext cx="2103120" cy="365760"/>
           </a:xfrm>
           <a:prstGeom prst="roundRect">
@@ -8544,7 +8570,7 @@
         </p:nvSpPr>
         <p:spPr>
           <a:xfrm>
-            <a:off x="6858000" y="5486400"/>
+            <a:off x="6858000" y="5078186"/>
             <a:ext cx="5029200" cy="914400"/>
           </a:xfrm>
           <a:prstGeom prst="rect">
@@ -8586,60 +8612,14 @@
       </p:sp>
       <p:sp>
         <p:nvSpPr>
-          <p:cNvPr id="15" name="Rounded Rectangle 14"/>
-          <p:cNvSpPr/>
-          <p:nvPr/>
-        </p:nvSpPr>
-        <p:spPr>
-          <a:xfrm>
-            <a:off x="548640" y="6400800"/>
-            <a:ext cx="11064240" cy="365760"/>
-          </a:xfrm>
-          <a:prstGeom prst="roundRect">
-            <a:avLst/>
-          </a:prstGeom>
-          <a:solidFill>
-            <a:srgbClr val="FAEBEB"/>
-          </a:solidFill>
-          <a:ln w="12700">
-            <a:solidFill>
-              <a:srgbClr val="E74C3C"/>
-            </a:solidFill>
-          </a:ln>
-        </p:spPr>
-        <p:style>
-          <a:lnRef idx="1">
-            <a:schemeClr val="accent1"/>
-          </a:lnRef>
-          <a:fillRef idx="3">
-            <a:schemeClr val="accent1"/>
-          </a:fillRef>
-          <a:effectRef idx="2">
-            <a:schemeClr val="accent1"/>
-          </a:effectRef>
-          <a:fontRef idx="minor">
-            <a:schemeClr val="lt1"/>
-          </a:fontRef>
-        </p:style>
-        <p:txBody>
-          <a:bodyPr rtlCol="0" anchor="ctr"/>
-          <a:lstStyle/>
-          <a:p>
-            <a:pPr algn="ctr"/>
-            <a:endParaRPr/>
-          </a:p>
-        </p:txBody>
-      </p:sp>
-      <p:sp>
-        <p:nvSpPr>
           <p:cNvPr id="16" name="TextBox 15"/>
           <p:cNvSpPr txBox="1"/>
           <p:nvPr/>
         </p:nvSpPr>
         <p:spPr>
           <a:xfrm>
-            <a:off x="822960" y="6400800"/>
-            <a:ext cx="10515600" cy="365760"/>
+            <a:off x="6858000" y="6084026"/>
+            <a:ext cx="4415246" cy="692497"/>
           </a:xfrm>
           <a:prstGeom prst="rect">
             <a:avLst/>
@@ -8661,6 +8641,7 @@
               </a:defRPr>
             </a:pPr>
             <a:r>
+              <a:rPr dirty="0"/>
               <a:t>EXAM TIP: Schema catches SYNTAX errors (wrong type, missing field). It CANNOT catch LOGIC errors (score=11 when max is 10)!</a:t>
             </a:r>
           </a:p>
@@ -9106,7 +9087,7 @@
         <p:spPr>
           <a:xfrm>
             <a:off x="731520" y="2194560"/>
-            <a:ext cx="4846320" cy="2286000"/>
+            <a:ext cx="4846320" cy="2141612"/>
           </a:xfrm>
           <a:prstGeom prst="rect">
             <a:avLst/>
@@ -9131,6 +9112,7 @@
               </a:defRPr>
             </a:pPr>
             <a:r>
+              <a:rPr dirty="0"/>
               <a:t>Checks the STRUCTURE of the data:</a:t>
             </a:r>
           </a:p>
@@ -9141,12 +9123,15 @@
               </a:spcAft>
               <a:defRPr sz="1300" b="0">
                 <a:solidFill>
-                  <a:srgbClr val="2C3E50"/>
-                </a:solidFill>
-                <a:latin typeface="Calibri"/>
-              </a:defRPr>
-            </a:pPr>
-            <a:endParaRPr/>
+                  <a:srgbClr val="7F8C8D"/>
+                </a:solidFill>
+                <a:latin typeface="Calibri"/>
+              </a:defRPr>
+            </a:pPr>
+            <a:r>
+              <a:rPr dirty="0"/>
+              <a:t>- Is it valid JSON?</a:t>
+            </a:r>
           </a:p>
           <a:p>
             <a:pPr>
@@ -9161,7 +9146,8 @@
               </a:defRPr>
             </a:pPr>
             <a:r>
-              <a:t>- Is it valid JSON?</a:t>
+              <a:rPr dirty="0"/>
+              <a:t>- Are required fields present?</a:t>
             </a:r>
           </a:p>
           <a:p>
@@ -9177,7 +9163,8 @@
               </a:defRPr>
             </a:pPr>
             <a:r>
-              <a:t>- Are required fields present?</a:t>
+              <a:rPr dirty="0"/>
+              <a:t>- Are types correct (string, number)?</a:t>
             </a:r>
           </a:p>
           <a:p>
@@ -9193,7 +9180,16 @@
               </a:defRPr>
             </a:pPr>
             <a:r>
-              <a:t>- Are types correct (string, number)?</a:t>
+              <a:rPr dirty="0"/>
+              <a:t>- Do </a:t>
+            </a:r>
+            <a:r>
+              <a:rPr dirty="0" err="1"/>
+              <a:t>enum</a:t>
+            </a:r>
+            <a:r>
+              <a:rPr dirty="0"/>
+              <a:t> values match allowed set?</a:t>
             </a:r>
           </a:p>
           <a:p>
@@ -9201,15 +9197,41 @@
               <a:spcAft>
                 <a:spcPts val="520"/>
               </a:spcAft>
+              <a:defRPr sz="1300" b="1">
+                <a:solidFill>
+                  <a:srgbClr val="3498DB"/>
+                </a:solidFill>
+                <a:latin typeface="Calibri"/>
+              </a:defRPr>
+            </a:pPr>
+            <a:r>
+              <a:rPr dirty="0"/>
+              <a:t>Catches: missing fields, wrong types,</a:t>
+            </a:r>
+          </a:p>
+          <a:p>
+            <a:pPr>
+              <a:spcAft>
+                <a:spcPts val="520"/>
+              </a:spcAft>
               <a:defRPr sz="1300" b="0">
                 <a:solidFill>
-                  <a:srgbClr val="7F8C8D"/>
-                </a:solidFill>
-                <a:latin typeface="Calibri"/>
-              </a:defRPr>
-            </a:pPr>
-            <a:r>
-              <a:t>- Do enum values match allowed set?</a:t>
+                  <a:srgbClr val="3498DB"/>
+                </a:solidFill>
+                <a:latin typeface="Calibri"/>
+              </a:defRPr>
+            </a:pPr>
+            <a:r>
+              <a:rPr dirty="0"/>
+              <a:t>invalid </a:t>
+            </a:r>
+            <a:r>
+              <a:rPr dirty="0" err="1"/>
+              <a:t>enum</a:t>
+            </a:r>
+            <a:r>
+              <a:rPr dirty="0"/>
+              <a:t> values, malformed JSON</a:t>
             </a:r>
           </a:p>
           <a:p>
@@ -9217,74 +9239,15 @@
               <a:spcAft>
                 <a:spcPts val="520"/>
               </a:spcAft>
-              <a:defRPr sz="1300" b="0">
-                <a:solidFill>
-                  <a:srgbClr val="2C3E50"/>
-                </a:solidFill>
-                <a:latin typeface="Calibri"/>
-              </a:defRPr>
-            </a:pPr>
-            <a:endParaRPr/>
-          </a:p>
-          <a:p>
-            <a:pPr>
-              <a:spcAft>
-                <a:spcPts val="520"/>
-              </a:spcAft>
               <a:defRPr sz="1300" b="1">
                 <a:solidFill>
-                  <a:srgbClr val="3498DB"/>
-                </a:solidFill>
-                <a:latin typeface="Calibri"/>
-              </a:defRPr>
-            </a:pPr>
-            <a:r>
-              <a:t>Catches: missing fields, wrong types,</a:t>
-            </a:r>
-          </a:p>
-          <a:p>
-            <a:pPr>
-              <a:spcAft>
-                <a:spcPts val="520"/>
-              </a:spcAft>
-              <a:defRPr sz="1300" b="0">
-                <a:solidFill>
-                  <a:srgbClr val="3498DB"/>
-                </a:solidFill>
-                <a:latin typeface="Calibri"/>
-              </a:defRPr>
-            </a:pPr>
-            <a:r>
-              <a:t>invalid enum values, malformed JSON</a:t>
-            </a:r>
-          </a:p>
-          <a:p>
-            <a:pPr>
-              <a:spcAft>
-                <a:spcPts val="520"/>
-              </a:spcAft>
-              <a:defRPr sz="1300" b="0">
-                <a:solidFill>
-                  <a:srgbClr val="2C3E50"/>
-                </a:solidFill>
-                <a:latin typeface="Calibri"/>
-              </a:defRPr>
-            </a:pPr>
-            <a:endParaRPr/>
-          </a:p>
-          <a:p>
-            <a:pPr>
-              <a:spcAft>
-                <a:spcPts val="520"/>
-              </a:spcAft>
-              <a:defRPr sz="1300" b="1">
-                <a:solidFill>
                   <a:srgbClr val="E74C3C"/>
                 </a:solidFill>
                 <a:latin typeface="Calibri"/>
               </a:defRPr>
             </a:pPr>
             <a:r>
+              <a:rPr dirty="0"/>
               <a:t>Cannot catch: 'score: 99' when max=10</a:t>
             </a:r>
           </a:p>
@@ -9381,7 +9344,7 @@
         <p:spPr>
           <a:xfrm>
             <a:off x="6492240" y="2194560"/>
-            <a:ext cx="4846320" cy="2286000"/>
+            <a:ext cx="4846320" cy="2141612"/>
           </a:xfrm>
           <a:prstGeom prst="rect">
             <a:avLst/>
@@ -9406,6 +9369,7 @@
               </a:defRPr>
             </a:pPr>
             <a:r>
+              <a:rPr dirty="0"/>
               <a:t>Checks the MEANING of the data:</a:t>
             </a:r>
           </a:p>
@@ -9416,12 +9380,15 @@
               </a:spcAft>
               <a:defRPr sz="1300" b="0">
                 <a:solidFill>
-                  <a:srgbClr val="2C3E50"/>
-                </a:solidFill>
-                <a:latin typeface="Calibri"/>
-              </a:defRPr>
-            </a:pPr>
-            <a:endParaRPr/>
+                  <a:srgbClr val="7F8C8D"/>
+                </a:solidFill>
+                <a:latin typeface="Calibri"/>
+              </a:defRPr>
+            </a:pPr>
+            <a:r>
+              <a:rPr dirty="0"/>
+              <a:t>- Is score between 0-10?</a:t>
+            </a:r>
           </a:p>
           <a:p>
             <a:pPr>
@@ -9436,7 +9403,24 @@
               </a:defRPr>
             </a:pPr>
             <a:r>
-              <a:t>- Is score between 0-10?</a:t>
+              <a:rPr dirty="0"/>
+              <a:t>- Does </a:t>
+            </a:r>
+            <a:r>
+              <a:rPr dirty="0" err="1"/>
+              <a:t>end_date</a:t>
+            </a:r>
+            <a:r>
+              <a:rPr dirty="0"/>
+              <a:t> come after </a:t>
+            </a:r>
+            <a:r>
+              <a:rPr dirty="0" err="1"/>
+              <a:t>start_date</a:t>
+            </a:r>
+            <a:r>
+              <a:rPr dirty="0"/>
+              <a:t>?</a:t>
             </a:r>
           </a:p>
           <a:p>
@@ -9452,7 +9436,8 @@
               </a:defRPr>
             </a:pPr>
             <a:r>
-              <a:t>- Does end_date come after start_date?</a:t>
+              <a:rPr dirty="0"/>
+              <a:t>- Is the email format valid?</a:t>
             </a:r>
           </a:p>
           <a:p>
@@ -9468,7 +9453,8 @@
               </a:defRPr>
             </a:pPr>
             <a:r>
-              <a:t>- Is the email format valid?</a:t>
+              <a:rPr dirty="0"/>
+              <a:t>- Do cross-field constraints hold?</a:t>
             </a:r>
           </a:p>
           <a:p>
@@ -9476,15 +9462,33 @@
               <a:spcAft>
                 <a:spcPts val="520"/>
               </a:spcAft>
+              <a:defRPr sz="1300" b="1">
+                <a:solidFill>
+                  <a:srgbClr val="2ECC71"/>
+                </a:solidFill>
+                <a:latin typeface="Calibri"/>
+              </a:defRPr>
+            </a:pPr>
+            <a:r>
+              <a:rPr dirty="0"/>
+              <a:t>Catches: out-of-range values, logical</a:t>
+            </a:r>
+          </a:p>
+          <a:p>
+            <a:pPr>
+              <a:spcAft>
+                <a:spcPts val="520"/>
+              </a:spcAft>
               <a:defRPr sz="1300" b="0">
                 <a:solidFill>
-                  <a:srgbClr val="7F8C8D"/>
-                </a:solidFill>
-                <a:latin typeface="Calibri"/>
-              </a:defRPr>
-            </a:pPr>
-            <a:r>
-              <a:t>- Do cross-field constraints hold?</a:t>
+                  <a:srgbClr val="2ECC71"/>
+                </a:solidFill>
+                <a:latin typeface="Calibri"/>
+              </a:defRPr>
+            </a:pPr>
+            <a:r>
+              <a:rPr dirty="0"/>
+              <a:t>contradictions, business rule violations</a:t>
             </a:r>
           </a:p>
           <a:p>
@@ -9492,74 +9496,15 @@
               <a:spcAft>
                 <a:spcPts val="520"/>
               </a:spcAft>
-              <a:defRPr sz="1300" b="0">
-                <a:solidFill>
-                  <a:srgbClr val="2C3E50"/>
-                </a:solidFill>
-                <a:latin typeface="Calibri"/>
-              </a:defRPr>
-            </a:pPr>
-            <a:endParaRPr/>
-          </a:p>
-          <a:p>
-            <a:pPr>
-              <a:spcAft>
-                <a:spcPts val="520"/>
-              </a:spcAft>
               <a:defRPr sz="1300" b="1">
                 <a:solidFill>
-                  <a:srgbClr val="2ECC71"/>
-                </a:solidFill>
-                <a:latin typeface="Calibri"/>
-              </a:defRPr>
-            </a:pPr>
-            <a:r>
-              <a:t>Catches: out-of-range values, logical</a:t>
-            </a:r>
-          </a:p>
-          <a:p>
-            <a:pPr>
-              <a:spcAft>
-                <a:spcPts val="520"/>
-              </a:spcAft>
-              <a:defRPr sz="1300" b="0">
-                <a:solidFill>
-                  <a:srgbClr val="2ECC71"/>
-                </a:solidFill>
-                <a:latin typeface="Calibri"/>
-              </a:defRPr>
-            </a:pPr>
-            <a:r>
-              <a:t>contradictions, business rule violations</a:t>
-            </a:r>
-          </a:p>
-          <a:p>
-            <a:pPr>
-              <a:spcAft>
-                <a:spcPts val="520"/>
-              </a:spcAft>
-              <a:defRPr sz="1300" b="0">
-                <a:solidFill>
-                  <a:srgbClr val="2C3E50"/>
-                </a:solidFill>
-                <a:latin typeface="Calibri"/>
-              </a:defRPr>
-            </a:pPr>
-            <a:endParaRPr/>
-          </a:p>
-          <a:p>
-            <a:pPr>
-              <a:spcAft>
-                <a:spcPts val="520"/>
-              </a:spcAft>
-              <a:defRPr sz="1300" b="1">
-                <a:solidFill>
                   <a:srgbClr val="E67E22"/>
                 </a:solidFill>
                 <a:latin typeface="Calibri"/>
               </a:defRPr>
             </a:pPr>
             <a:r>
+              <a:rPr dirty="0"/>
               <a:t>Needs custom code -- schema can't do it!</a:t>
             </a:r>
           </a:p>
@@ -9905,7 +9850,7 @@
         </p:nvSpPr>
         <p:spPr>
           <a:xfrm>
-            <a:off x="731520" y="1097280"/>
+            <a:off x="617220" y="868680"/>
             <a:ext cx="10058400" cy="457200"/>
           </a:xfrm>
           <a:prstGeom prst="rect">
@@ -9928,6 +9873,7 @@
               </a:defRPr>
             </a:pPr>
             <a:r>
+              <a:rPr dirty="0"/>
               <a:t>When validation fails, DON'T just retry blindly. Feed the error BACK to Claude so it can fix it:</a:t>
             </a:r>
           </a:p>
@@ -9941,7 +9887,7 @@
         </p:nvSpPr>
         <p:spPr>
           <a:xfrm>
-            <a:off x="914400" y="1737360"/>
+            <a:off x="930728" y="1402625"/>
             <a:ext cx="2286000" cy="640080"/>
           </a:xfrm>
           <a:prstGeom prst="roundRect">
@@ -9998,7 +9944,7 @@
         </p:nvSpPr>
         <p:spPr>
           <a:xfrm>
-            <a:off x="3200400" y="1920240"/>
+            <a:off x="3216728" y="1585505"/>
             <a:ext cx="457200" cy="274320"/>
           </a:xfrm>
           <a:prstGeom prst="rightArrow">
@@ -10042,7 +9988,7 @@
         </p:nvSpPr>
         <p:spPr>
           <a:xfrm>
-            <a:off x="3749039" y="1737360"/>
+            <a:off x="3765367" y="1402625"/>
             <a:ext cx="2286000" cy="640080"/>
           </a:xfrm>
           <a:prstGeom prst="roundRect">
@@ -10099,7 +10045,7 @@
         </p:nvSpPr>
         <p:spPr>
           <a:xfrm>
-            <a:off x="6035040" y="1920240"/>
+            <a:off x="6051368" y="1585505"/>
             <a:ext cx="457200" cy="274320"/>
           </a:xfrm>
           <a:prstGeom prst="rightArrow">
@@ -10143,7 +10089,7 @@
         </p:nvSpPr>
         <p:spPr>
           <a:xfrm>
-            <a:off x="6583680" y="1737360"/>
+            <a:off x="6600008" y="1402625"/>
             <a:ext cx="2286000" cy="640080"/>
           </a:xfrm>
           <a:prstGeom prst="roundRect">
@@ -10200,7 +10146,7 @@
         </p:nvSpPr>
         <p:spPr>
           <a:xfrm>
-            <a:off x="8869680" y="1920240"/>
+            <a:off x="8886008" y="1585505"/>
             <a:ext cx="457200" cy="274320"/>
           </a:xfrm>
           <a:prstGeom prst="rightArrow">
@@ -10244,7 +10190,7 @@
         </p:nvSpPr>
         <p:spPr>
           <a:xfrm>
-            <a:off x="9418320" y="1737360"/>
+            <a:off x="9434648" y="1402625"/>
             <a:ext cx="2286000" cy="640080"/>
           </a:xfrm>
           <a:prstGeom prst="roundRect">
@@ -10301,7 +10247,7 @@
         </p:nvSpPr>
         <p:spPr>
           <a:xfrm>
-            <a:off x="7543800" y="2377440"/>
+            <a:off x="7560128" y="2042705"/>
             <a:ext cx="274320" cy="365760"/>
           </a:xfrm>
           <a:prstGeom prst="downArrow">
@@ -10345,7 +10291,7 @@
         </p:nvSpPr>
         <p:spPr>
           <a:xfrm>
-            <a:off x="6126480" y="2926080"/>
+            <a:off x="6142808" y="2591345"/>
             <a:ext cx="3200400" cy="640080"/>
           </a:xfrm>
           <a:prstGeom prst="roundRect">
@@ -10402,7 +10348,7 @@
         </p:nvSpPr>
         <p:spPr>
           <a:xfrm>
-            <a:off x="6126480" y="3657600"/>
+            <a:off x="6185699" y="3337560"/>
             <a:ext cx="3200400" cy="365760"/>
           </a:xfrm>
           <a:prstGeom prst="rect">
@@ -10425,6 +10371,7 @@
               </a:defRPr>
             </a:pPr>
             <a:r>
+              <a:rPr dirty="0"/>
               <a:t>Claude reads the error and fixes it!</a:t>
             </a:r>
           </a:p>
@@ -10438,8 +10385,8 @@
         </p:nvSpPr>
         <p:spPr>
           <a:xfrm>
-            <a:off x="548640" y="4114800"/>
-            <a:ext cx="5486400" cy="2560320"/>
+            <a:off x="402337" y="2495006"/>
+            <a:ext cx="5577840" cy="4362994"/>
           </a:xfrm>
           <a:prstGeom prst="roundRect">
             <a:avLst/>
@@ -10482,8 +10429,8 @@
         </p:nvSpPr>
         <p:spPr>
           <a:xfrm>
-            <a:off x="731520" y="4206240"/>
-            <a:ext cx="5120640" cy="2377440"/>
+            <a:off x="710185" y="2560320"/>
+            <a:ext cx="5205984" cy="4231928"/>
           </a:xfrm>
           <a:prstGeom prst="rect">
             <a:avLst/>
@@ -10508,6 +10455,7 @@
               </a:defRPr>
             </a:pPr>
             <a:r>
+              <a:rPr dirty="0"/>
               <a:t># Retry loop with error feedback</a:t>
             </a:r>
           </a:p>
@@ -10523,7 +10471,7 @@
                 <a:latin typeface="Courier New"/>
               </a:defRPr>
             </a:pPr>
-            <a:endParaRPr/>
+            <a:endParaRPr dirty="0"/>
           </a:p>
           <a:p>
             <a:pPr>
@@ -10538,6 +10486,7 @@
               </a:defRPr>
             </a:pPr>
             <a:r>
+              <a:rPr dirty="0"/>
               <a:t>for attempt in range(MAX_RETRIES):</a:t>
             </a:r>
           </a:p>
@@ -10554,7 +10503,16 @@
               </a:defRPr>
             </a:pPr>
             <a:r>
-              <a:t>    response = call_claude(messages)</a:t>
+              <a:rPr dirty="0"/>
+              <a:t>    response = </a:t>
+            </a:r>
+            <a:r>
+              <a:rPr dirty="0" err="1"/>
+              <a:t>call_claude</a:t>
+            </a:r>
+            <a:r>
+              <a:rPr dirty="0"/>
+              <a:t>(messages)</a:t>
             </a:r>
           </a:p>
           <a:p>
@@ -10570,7 +10528,16 @@
               </a:defRPr>
             </a:pPr>
             <a:r>
-              <a:t>    result = parse_tool_output(response)</a:t>
+              <a:rPr dirty="0"/>
+              <a:t>    result = </a:t>
+            </a:r>
+            <a:r>
+              <a:rPr dirty="0" err="1"/>
+              <a:t>parse_tool_output</a:t>
+            </a:r>
+            <a:r>
+              <a:rPr dirty="0"/>
+              <a:t>(response)</a:t>
             </a:r>
           </a:p>
           <a:p>
@@ -10585,7 +10552,7 @@
                 <a:latin typeface="Courier New"/>
               </a:defRPr>
             </a:pPr>
-            <a:endParaRPr/>
+            <a:endParaRPr dirty="0"/>
           </a:p>
           <a:p>
             <a:pPr>
@@ -10600,6 +10567,7 @@
               </a:defRPr>
             </a:pPr>
             <a:r>
+              <a:rPr dirty="0"/>
               <a:t>    errors = validate(result)</a:t>
             </a:r>
           </a:p>
@@ -10616,6 +10584,7 @@
               </a:defRPr>
             </a:pPr>
             <a:r>
+              <a:rPr dirty="0"/>
               <a:t>    if not errors:</a:t>
             </a:r>
           </a:p>
@@ -10632,6 +10601,7 @@
               </a:defRPr>
             </a:pPr>
             <a:r>
+              <a:rPr dirty="0"/>
               <a:t>        return result  # Valid!</a:t>
             </a:r>
           </a:p>
@@ -10647,7 +10617,7 @@
                 <a:latin typeface="Courier New"/>
               </a:defRPr>
             </a:pPr>
-            <a:endParaRPr/>
+            <a:endParaRPr dirty="0"/>
           </a:p>
           <a:p>
             <a:pPr>
@@ -10662,6 +10632,7 @@
               </a:defRPr>
             </a:pPr>
             <a:r>
+              <a:rPr dirty="0"/>
               <a:t>    # Feed error BACK to Claude</a:t>
             </a:r>
           </a:p>
@@ -10678,7 +10649,16 @@
               </a:defRPr>
             </a:pPr>
             <a:r>
-              <a:t>    messages.append({</a:t>
+              <a:rPr dirty="0"/>
+              <a:t>    </a:t>
+            </a:r>
+            <a:r>
+              <a:rPr dirty="0" err="1"/>
+              <a:t>messages.append</a:t>
+            </a:r>
+            <a:r>
+              <a:rPr dirty="0"/>
+              <a:t>({</a:t>
             </a:r>
           </a:p>
           <a:p>
@@ -10694,6 +10674,7 @@
               </a:defRPr>
             </a:pPr>
             <a:r>
+              <a:rPr dirty="0"/>
               <a:t>      "role": "user",</a:t>
             </a:r>
           </a:p>
@@ -10710,6 +10691,7 @@
               </a:defRPr>
             </a:pPr>
             <a:r>
+              <a:rPr dirty="0"/>
               <a:t>      "content": [{</a:t>
             </a:r>
           </a:p>
@@ -10726,7 +10708,16 @@
               </a:defRPr>
             </a:pPr>
             <a:r>
-              <a:t>        "type": "tool_result",</a:t>
+              <a:rPr dirty="0"/>
+              <a:t>        "type": "</a:t>
+            </a:r>
+            <a:r>
+              <a:rPr dirty="0" err="1"/>
+              <a:t>tool_result</a:t>
+            </a:r>
+            <a:r>
+              <a:rPr dirty="0"/>
+              <a:t>",</a:t>
             </a:r>
           </a:p>
           <a:p>
@@ -10742,7 +10733,16 @@
               </a:defRPr>
             </a:pPr>
             <a:r>
-              <a:t>        "content": f"Error: {errors}.</a:t>
+              <a:rPr dirty="0"/>
+              <a:t>        "content": </a:t>
+            </a:r>
+            <a:r>
+              <a:rPr dirty="0" err="1"/>
+              <a:t>f"Error</a:t>
+            </a:r>
+            <a:r>
+              <a:rPr dirty="0"/>
+              <a:t>: {errors}.</a:t>
             </a:r>
           </a:p>
           <a:p>
@@ -10758,6 +10758,7 @@
               </a:defRPr>
             </a:pPr>
             <a:r>
+              <a:rPr dirty="0"/>
               <a:t>         Please fix and retry."</a:t>
             </a:r>
           </a:p>
@@ -10774,6 +10775,7 @@
               </a:defRPr>
             </a:pPr>
             <a:r>
+              <a:rPr dirty="0"/>
               <a:t>      }]</a:t>
             </a:r>
           </a:p>
@@ -10790,6 +10792,7 @@
               </a:defRPr>
             </a:pPr>
             <a:r>
+              <a:rPr dirty="0"/>
               <a:t>    })</a:t>
             </a:r>
           </a:p>
@@ -10803,7 +10806,7 @@
         </p:nvSpPr>
         <p:spPr>
           <a:xfrm>
-            <a:off x="6400800" y="4114800"/>
+            <a:off x="6376308" y="3967845"/>
             <a:ext cx="5486400" cy="457200"/>
           </a:xfrm>
           <a:prstGeom prst="rect">
@@ -10826,6 +10829,7 @@
               </a:defRPr>
             </a:pPr>
             <a:r>
+              <a:rPr dirty="0"/>
               <a:t>Key Retry Principles:</a:t>
             </a:r>
           </a:p>
@@ -10839,7 +10843,7 @@
         </p:nvSpPr>
         <p:spPr>
           <a:xfrm>
-            <a:off x="6400800" y="4572000"/>
+            <a:off x="6376308" y="4425045"/>
             <a:ext cx="2103120" cy="320040"/>
           </a:xfrm>
           <a:prstGeom prst="roundRect">
@@ -10879,6 +10883,7 @@
               </a:defRPr>
             </a:pPr>
             <a:r>
+              <a:rPr dirty="0"/>
               <a:t>Feed errors back</a:t>
             </a:r>
           </a:p>
@@ -10892,7 +10897,7 @@
         </p:nvSpPr>
         <p:spPr>
           <a:xfrm>
-            <a:off x="8686800" y="4572000"/>
+            <a:off x="8662308" y="4425045"/>
             <a:ext cx="3200400" cy="731520"/>
           </a:xfrm>
           <a:prstGeom prst="rect">
@@ -10936,7 +10941,7 @@
         </p:nvSpPr>
         <p:spPr>
           <a:xfrm>
-            <a:off x="6400800" y="5349240"/>
+            <a:off x="6376308" y="5202285"/>
             <a:ext cx="2103120" cy="320040"/>
           </a:xfrm>
           <a:prstGeom prst="roundRect">
@@ -10976,6 +10981,7 @@
               </a:defRPr>
             </a:pPr>
             <a:r>
+              <a:rPr dirty="0"/>
               <a:t>Set MAX_RETRIES</a:t>
             </a:r>
           </a:p>
@@ -10989,7 +10995,7 @@
         </p:nvSpPr>
         <p:spPr>
           <a:xfrm>
-            <a:off x="8686800" y="5349240"/>
+            <a:off x="8662308" y="5202285"/>
             <a:ext cx="3200400" cy="731520"/>
           </a:xfrm>
           <a:prstGeom prst="rect">
@@ -11033,7 +11039,7 @@
         </p:nvSpPr>
         <p:spPr>
           <a:xfrm>
-            <a:off x="6400800" y="6126480"/>
+            <a:off x="6376308" y="5979525"/>
             <a:ext cx="2103120" cy="320040"/>
           </a:xfrm>
           <a:prstGeom prst="roundRect">
@@ -11086,7 +11092,7 @@
         </p:nvSpPr>
         <p:spPr>
           <a:xfrm>
-            <a:off x="8686800" y="6126480"/>
+            <a:off x="8662308" y="5979525"/>
             <a:ext cx="3200400" cy="731520"/>
           </a:xfrm>
           <a:prstGeom prst="rect">
@@ -11390,7 +11396,7 @@
                 <a:latin typeface="Calibri"/>
               </a:defRPr>
             </a:pPr>
-            <a:endParaRPr/>
+            <a:endParaRPr dirty="0"/>
           </a:p>
           <a:p>
             <a:pPr>
@@ -11405,6 +11411,7 @@
               </a:defRPr>
             </a:pPr>
             <a:r>
+              <a:rPr dirty="0"/>
               <a:t>Checkpoint 1 -- SCHEMA VALIDATION (= ID + Boarding Pass Check):</a:t>
             </a:r>
           </a:p>
@@ -11421,6 +11428,7 @@
               </a:defRPr>
             </a:pPr>
             <a:r>
+              <a:rPr dirty="0"/>
               <a:t>  Do you have the right documents? Is your name on the boarding pass? Is the flight date correct?</a:t>
             </a:r>
           </a:p>
@@ -11437,6 +11445,7 @@
               </a:defRPr>
             </a:pPr>
             <a:r>
+              <a:rPr dirty="0"/>
               <a:t>  This catches: expired passport, wrong name, missing boarding pass.</a:t>
             </a:r>
           </a:p>
@@ -11453,6 +11462,7 @@
               </a:defRPr>
             </a:pPr>
             <a:r>
+              <a:rPr dirty="0"/>
               <a:t>  This CANNOT catch: whether you're actually a threat!</a:t>
             </a:r>
           </a:p>
@@ -11468,7 +11478,7 @@
                 <a:latin typeface="Calibri"/>
               </a:defRPr>
             </a:pPr>
-            <a:endParaRPr/>
+            <a:endParaRPr dirty="0"/>
           </a:p>
           <a:p>
             <a:pPr>
@@ -11483,6 +11493,7 @@
               </a:defRPr>
             </a:pPr>
             <a:r>
+              <a:rPr dirty="0"/>
               <a:t>Checkpoint 2 -- SEMANTIC VALIDATION (= X-Ray + Metal Detector):</a:t>
             </a:r>
           </a:p>
@@ -11499,6 +11510,7 @@
               </a:defRPr>
             </a:pPr>
             <a:r>
+              <a:rPr dirty="0"/>
               <a:t>  Is the CONTENT of your bag safe? Does anything violate the rules?</a:t>
             </a:r>
           </a:p>
@@ -11515,6 +11527,7 @@
               </a:defRPr>
             </a:pPr>
             <a:r>
+              <a:rPr dirty="0"/>
               <a:t>  This catches: prohibited items, liquids over 100ml, sharp objects.</a:t>
             </a:r>
           </a:p>
@@ -11531,6 +11544,7 @@
               </a:defRPr>
             </a:pPr>
             <a:r>
+              <a:rPr dirty="0"/>
               <a:t>  These are LOGIC checks your ID can't reveal!</a:t>
             </a:r>
           </a:p>
@@ -11546,7 +11560,7 @@
                 <a:latin typeface="Calibri"/>
               </a:defRPr>
             </a:pPr>
-            <a:endParaRPr/>
+            <a:endParaRPr dirty="0"/>
           </a:p>
           <a:p>
             <a:pPr>
@@ -11561,6 +11575,7 @@
               </a:defRPr>
             </a:pPr>
             <a:r>
+              <a:rPr dirty="0"/>
               <a:t>Retry Loop (= 'Please remove your belt and try again'):</a:t>
             </a:r>
           </a:p>
@@ -11577,6 +11592,7 @@
               </a:defRPr>
             </a:pPr>
             <a:r>
+              <a:rPr dirty="0"/>
               <a:t>  When the metal detector beeps, you don't get arrested -- you get FEEDBACK and try again.</a:t>
             </a:r>
           </a:p>
@@ -11593,6 +11609,7 @@
               </a:defRPr>
             </a:pPr>
             <a:r>
+              <a:rPr dirty="0"/>
               <a:t>  Same with Claude: validation fails, error is fed back, Claude self-corrects.</a:t>
             </a:r>
           </a:p>
@@ -11608,7 +11625,7 @@
                 <a:latin typeface="Calibri"/>
               </a:defRPr>
             </a:pPr>
-            <a:endParaRPr/>
+            <a:endParaRPr dirty="0"/>
           </a:p>
           <a:p>
             <a:pPr>
@@ -11623,6 +11640,7 @@
               </a:defRPr>
             </a:pPr>
             <a:r>
+              <a:rPr dirty="0"/>
               <a:t>MAX_RETRIES = 3 (= After 3 beeps, security pulls you aside for manual review!)</a:t>
             </a:r>
           </a:p>
@@ -11639,6 +11657,7 @@
               </a:defRPr>
             </a:pPr>
             <a:r>
+              <a:rPr dirty="0"/>
               <a:t>If Claude still fails after retries, the source data may be genuinely problematic.</a:t>
             </a:r>
           </a:p>
@@ -14123,7 +14142,7 @@
         <p:spPr>
           <a:xfrm>
             <a:off x="731520" y="3749039"/>
-            <a:ext cx="4846320" cy="1828800"/>
+            <a:ext cx="4846320" cy="1877437"/>
           </a:xfrm>
           <a:prstGeom prst="rect">
             <a:avLst/>
@@ -14148,6 +14167,7 @@
               </a:defRPr>
             </a:pPr>
             <a:r>
+              <a:rPr dirty="0"/>
               <a:t>- Classifying 10,000+ support tickets</a:t>
             </a:r>
           </a:p>
@@ -14164,6 +14184,7 @@
               </a:defRPr>
             </a:pPr>
             <a:r>
+              <a:rPr dirty="0"/>
               <a:t>- Analyzing a dataset overnight</a:t>
             </a:r>
           </a:p>
@@ -14180,6 +14201,7 @@
               </a:defRPr>
             </a:pPr>
             <a:r>
+              <a:rPr dirty="0"/>
               <a:t>- Bulk content moderation</a:t>
             </a:r>
           </a:p>
@@ -14196,6 +14218,7 @@
               </a:defRPr>
             </a:pPr>
             <a:r>
+              <a:rPr dirty="0"/>
               <a:t>- Processing log files in bulk</a:t>
             </a:r>
           </a:p>
@@ -14212,6 +14235,7 @@
               </a:defRPr>
             </a:pPr>
             <a:r>
+              <a:rPr dirty="0"/>
               <a:t>- Any workload that can wait hours</a:t>
             </a:r>
           </a:p>
@@ -14220,14 +14244,17 @@
               <a:spcAft>
                 <a:spcPts val="520"/>
               </a:spcAft>
-              <a:defRPr sz="1300" b="0">
-                <a:solidFill>
-                  <a:srgbClr val="2C3E50"/>
-                </a:solidFill>
-                <a:latin typeface="Calibri"/>
-              </a:defRPr>
-            </a:pPr>
-            <a:endParaRPr/>
+              <a:defRPr sz="1300" b="1">
+                <a:solidFill>
+                  <a:srgbClr val="2ECC71"/>
+                </a:solidFill>
+                <a:latin typeface="Calibri"/>
+              </a:defRPr>
+            </a:pPr>
+            <a:r>
+              <a:rPr dirty="0"/>
+              <a:t>Key: Non-real-time, high volume,</a:t>
+            </a:r>
           </a:p>
           <a:p>
             <a:pPr>
@@ -14242,22 +14269,7 @@
               </a:defRPr>
             </a:pPr>
             <a:r>
-              <a:t>Key: Non-real-time, high volume,</a:t>
-            </a:r>
-          </a:p>
-          <a:p>
-            <a:pPr>
-              <a:spcAft>
-                <a:spcPts val="520"/>
-              </a:spcAft>
-              <a:defRPr sz="1300" b="1">
-                <a:solidFill>
-                  <a:srgbClr val="2ECC71"/>
-                </a:solidFill>
-                <a:latin typeface="Calibri"/>
-              </a:defRPr>
-            </a:pPr>
-            <a:r>
+              <a:rPr dirty="0"/>
               <a:t>cost-sensitive workloads</a:t>
             </a:r>
           </a:p>
@@ -14354,7 +14366,7 @@
         <p:spPr>
           <a:xfrm>
             <a:off x="6492240" y="3749039"/>
-            <a:ext cx="4846320" cy="1828800"/>
+            <a:ext cx="4846320" cy="1877437"/>
           </a:xfrm>
           <a:prstGeom prst="rect">
             <a:avLst/>
@@ -14379,6 +14391,7 @@
               </a:defRPr>
             </a:pPr>
             <a:r>
+              <a:rPr dirty="0"/>
               <a:t>- User is waiting for a response</a:t>
             </a:r>
           </a:p>
@@ -14395,6 +14408,7 @@
               </a:defRPr>
             </a:pPr>
             <a:r>
+              <a:rPr dirty="0"/>
               <a:t>- Interactive chat conversations</a:t>
             </a:r>
           </a:p>
@@ -14411,6 +14425,7 @@
               </a:defRPr>
             </a:pPr>
             <a:r>
+              <a:rPr dirty="0"/>
               <a:t>- Multi-turn tool use within a batch</a:t>
             </a:r>
           </a:p>
@@ -14427,6 +14442,7 @@
               </a:defRPr>
             </a:pPr>
             <a:r>
+              <a:rPr dirty="0"/>
               <a:t>- Real-time code review in IDE</a:t>
             </a:r>
           </a:p>
@@ -14443,6 +14459,7 @@
               </a:defRPr>
             </a:pPr>
             <a:r>
+              <a:rPr dirty="0"/>
               <a:t>- Latency-sensitive applications</a:t>
             </a:r>
           </a:p>
@@ -14451,14 +14468,17 @@
               <a:spcAft>
                 <a:spcPts val="520"/>
               </a:spcAft>
-              <a:defRPr sz="1300" b="0">
-                <a:solidFill>
-                  <a:srgbClr val="2C3E50"/>
-                </a:solidFill>
-                <a:latin typeface="Calibri"/>
-              </a:defRPr>
-            </a:pPr>
-            <a:endParaRPr/>
+              <a:defRPr sz="1300" b="1">
+                <a:solidFill>
+                  <a:srgbClr val="E74C3C"/>
+                </a:solidFill>
+                <a:latin typeface="Calibri"/>
+              </a:defRPr>
+            </a:pPr>
+            <a:r>
+              <a:rPr dirty="0"/>
+              <a:t>Key: Interactive, real-time, or</a:t>
+            </a:r>
           </a:p>
           <a:p>
             <a:pPr>
@@ -14473,22 +14493,7 @@
               </a:defRPr>
             </a:pPr>
             <a:r>
-              <a:t>Key: Interactive, real-time, or</a:t>
-            </a:r>
-          </a:p>
-          <a:p>
-            <a:pPr>
-              <a:spcAft>
-                <a:spcPts val="520"/>
-              </a:spcAft>
-              <a:defRPr sz="1300" b="1">
-                <a:solidFill>
-                  <a:srgbClr val="E74C3C"/>
-                </a:solidFill>
-                <a:latin typeface="Calibri"/>
-              </a:defRPr>
-            </a:pPr>
-            <a:r>
+              <a:rPr dirty="0"/>
               <a:t>multi-turn tool use scenarios</a:t>
             </a:r>
           </a:p>
@@ -14782,7 +14787,7 @@
         <p:spPr>
           <a:xfrm>
             <a:off x="731520" y="1188720"/>
-            <a:ext cx="5577840" cy="3931920"/>
+            <a:ext cx="5577840" cy="5775940"/>
           </a:xfrm>
           <a:prstGeom prst="rect">
             <a:avLst/>
@@ -14807,6 +14812,7 @@
               </a:defRPr>
             </a:pPr>
             <a:r>
+              <a:rPr dirty="0"/>
               <a:t># Message Batches API workflow</a:t>
             </a:r>
           </a:p>
@@ -14822,7 +14828,10 @@
                 <a:latin typeface="Courier New"/>
               </a:defRPr>
             </a:pPr>
-            <a:endParaRPr/>
+            <a:r>
+              <a:rPr dirty="0"/>
+              <a:t>import anthropic</a:t>
+            </a:r>
           </a:p>
           <a:p>
             <a:pPr>
@@ -14837,7 +14846,16 @@
               </a:defRPr>
             </a:pPr>
             <a:r>
-              <a:t>import anthropic</a:t>
+              <a:rPr dirty="0"/>
+              <a:t>client = </a:t>
+            </a:r>
+            <a:r>
+              <a:rPr dirty="0" err="1"/>
+              <a:t>anthropic.Anthropic</a:t>
+            </a:r>
+            <a:r>
+              <a:rPr dirty="0"/>
+              <a:t>()</a:t>
             </a:r>
           </a:p>
           <a:p>
@@ -14852,9 +14870,7 @@
                 <a:latin typeface="Courier New"/>
               </a:defRPr>
             </a:pPr>
-            <a:r>
-              <a:t>client = anthropic.Anthropic()</a:t>
-            </a:r>
+            <a:endParaRPr dirty="0"/>
           </a:p>
           <a:p>
             <a:pPr>
@@ -14863,12 +14879,32 @@
               </a:spcAft>
               <a:defRPr sz="1100" b="0">
                 <a:solidFill>
+                  <a:srgbClr val="7F8C8D"/>
+                </a:solidFill>
+                <a:latin typeface="Courier New"/>
+              </a:defRPr>
+            </a:pPr>
+            <a:r>
+              <a:rPr dirty="0"/>
+              <a:t># 1. Prepare batch requests</a:t>
+            </a:r>
+          </a:p>
+          <a:p>
+            <a:pPr>
+              <a:spcAft>
+                <a:spcPts val="440"/>
+              </a:spcAft>
+              <a:defRPr sz="1100" b="0">
+                <a:solidFill>
                   <a:srgbClr val="FFFFFF"/>
                 </a:solidFill>
                 <a:latin typeface="Courier New"/>
               </a:defRPr>
             </a:pPr>
-            <a:endParaRPr/>
+            <a:r>
+              <a:rPr dirty="0"/>
+              <a:t>requests = [</a:t>
+            </a:r>
           </a:p>
           <a:p>
             <a:pPr>
@@ -14877,13 +14913,217 @@
               </a:spcAft>
               <a:defRPr sz="1100" b="0">
                 <a:solidFill>
+                  <a:srgbClr val="FFFFFF"/>
+                </a:solidFill>
+                <a:latin typeface="Courier New"/>
+              </a:defRPr>
+            </a:pPr>
+            <a:r>
+              <a:rPr dirty="0"/>
+              <a:t>  {</a:t>
+            </a:r>
+          </a:p>
+          <a:p>
+            <a:pPr>
+              <a:spcAft>
+                <a:spcPts val="440"/>
+              </a:spcAft>
+              <a:defRPr sz="1100" b="1">
+                <a:solidFill>
+                  <a:srgbClr val="2ECC71"/>
+                </a:solidFill>
+                <a:latin typeface="Courier New"/>
+              </a:defRPr>
+            </a:pPr>
+            <a:r>
+              <a:rPr dirty="0"/>
+              <a:t>    "</a:t>
+            </a:r>
+            <a:r>
+              <a:rPr dirty="0" err="1"/>
+              <a:t>custom_id</a:t>
+            </a:r>
+            <a:r>
+              <a:rPr dirty="0"/>
+              <a:t>": "ticket-001",</a:t>
+            </a:r>
+          </a:p>
+          <a:p>
+            <a:pPr>
+              <a:spcAft>
+                <a:spcPts val="440"/>
+              </a:spcAft>
+              <a:defRPr sz="1100" b="0">
+                <a:solidFill>
+                  <a:srgbClr val="FFFFFF"/>
+                </a:solidFill>
+                <a:latin typeface="Courier New"/>
+              </a:defRPr>
+            </a:pPr>
+            <a:r>
+              <a:rPr dirty="0"/>
+              <a:t>    "params": {</a:t>
+            </a:r>
+          </a:p>
+          <a:p>
+            <a:pPr>
+              <a:spcAft>
+                <a:spcPts val="440"/>
+              </a:spcAft>
+              <a:defRPr sz="1100" b="0">
+                <a:solidFill>
+                  <a:srgbClr val="3498DB"/>
+                </a:solidFill>
+                <a:latin typeface="Courier New"/>
+              </a:defRPr>
+            </a:pPr>
+            <a:r>
+              <a:rPr dirty="0"/>
+              <a:t>      "model": "claude-sonnet-4-6",</a:t>
+            </a:r>
+          </a:p>
+          <a:p>
+            <a:pPr>
+              <a:spcAft>
+                <a:spcPts val="440"/>
+              </a:spcAft>
+              <a:defRPr sz="1100" b="0">
+                <a:solidFill>
+                  <a:srgbClr val="FFFFFF"/>
+                </a:solidFill>
+                <a:latin typeface="Courier New"/>
+              </a:defRPr>
+            </a:pPr>
+            <a:r>
+              <a:rPr dirty="0"/>
+              <a:t>      "</a:t>
+            </a:r>
+            <a:r>
+              <a:rPr dirty="0" err="1"/>
+              <a:t>max_tokens</a:t>
+            </a:r>
+            <a:r>
+              <a:rPr dirty="0"/>
+              <a:t>": 1024,</a:t>
+            </a:r>
+          </a:p>
+          <a:p>
+            <a:pPr>
+              <a:spcAft>
+                <a:spcPts val="440"/>
+              </a:spcAft>
+              <a:defRPr sz="1100" b="0">
+                <a:solidFill>
+                  <a:srgbClr val="FFFFFF"/>
+                </a:solidFill>
+                <a:latin typeface="Courier New"/>
+              </a:defRPr>
+            </a:pPr>
+            <a:r>
+              <a:rPr dirty="0"/>
+              <a:t>      "messages": [{</a:t>
+            </a:r>
+          </a:p>
+          <a:p>
+            <a:pPr>
+              <a:spcAft>
+                <a:spcPts val="440"/>
+              </a:spcAft>
+              <a:defRPr sz="1100" b="0">
+                <a:solidFill>
+                  <a:srgbClr val="FFFFFF"/>
+                </a:solidFill>
+                <a:latin typeface="Courier New"/>
+              </a:defRPr>
+            </a:pPr>
+            <a:r>
+              <a:rPr dirty="0"/>
+              <a:t>        "role": "user",</a:t>
+            </a:r>
+          </a:p>
+          <a:p>
+            <a:pPr>
+              <a:spcAft>
+                <a:spcPts val="440"/>
+              </a:spcAft>
+              <a:defRPr sz="1100" b="0">
+                <a:solidFill>
+                  <a:srgbClr val="FFFFFF"/>
+                </a:solidFill>
+                <a:latin typeface="Courier New"/>
+              </a:defRPr>
+            </a:pPr>
+            <a:r>
+              <a:rPr dirty="0"/>
+              <a:t>        "content": "Classify: ..."</a:t>
+            </a:r>
+          </a:p>
+          <a:p>
+            <a:pPr>
+              <a:spcAft>
+                <a:spcPts val="440"/>
+              </a:spcAft>
+              <a:defRPr sz="1100" b="0">
+                <a:solidFill>
+                  <a:srgbClr val="FFFFFF"/>
+                </a:solidFill>
+                <a:latin typeface="Courier New"/>
+              </a:defRPr>
+            </a:pPr>
+            <a:r>
+              <a:rPr dirty="0"/>
+              <a:t>      }]</a:t>
+            </a:r>
+          </a:p>
+          <a:p>
+            <a:pPr>
+              <a:spcAft>
+                <a:spcPts val="440"/>
+              </a:spcAft>
+              <a:defRPr sz="1100" b="0">
+                <a:solidFill>
+                  <a:srgbClr val="FFFFFF"/>
+                </a:solidFill>
+                <a:latin typeface="Courier New"/>
+              </a:defRPr>
+            </a:pPr>
+            <a:r>
+              <a:rPr dirty="0"/>
+              <a:t>    }</a:t>
+            </a:r>
+          </a:p>
+          <a:p>
+            <a:pPr>
+              <a:spcAft>
+                <a:spcPts val="440"/>
+              </a:spcAft>
+              <a:defRPr sz="1100" b="0">
+                <a:solidFill>
+                  <a:srgbClr val="FFFFFF"/>
+                </a:solidFill>
+                <a:latin typeface="Courier New"/>
+              </a:defRPr>
+            </a:pPr>
+            <a:r>
+              <a:rPr dirty="0"/>
+              <a:t>  },</a:t>
+            </a:r>
+          </a:p>
+          <a:p>
+            <a:pPr>
+              <a:spcAft>
+                <a:spcPts val="440"/>
+              </a:spcAft>
+              <a:defRPr sz="1100" b="0">
+                <a:solidFill>
                   <a:srgbClr val="7F8C8D"/>
                 </a:solidFill>
                 <a:latin typeface="Courier New"/>
               </a:defRPr>
             </a:pPr>
             <a:r>
-              <a:t># 1. Prepare batch requests</a:t>
+              <a:rPr dirty="0"/>
+              <a:t>  # ... 10,000 more requests</a:t>
             </a:r>
           </a:p>
           <a:p>
@@ -14899,7 +15139,8 @@
               </a:defRPr>
             </a:pPr>
             <a:r>
-              <a:t>requests = [</a:t>
+              <a:rPr dirty="0"/>
+              <a:t>]</a:t>
             </a:r>
           </a:p>
           <a:p>
@@ -14914,24 +15155,23 @@
                 <a:latin typeface="Courier New"/>
               </a:defRPr>
             </a:pPr>
-            <a:r>
-              <a:t>  {</a:t>
-            </a:r>
+            <a:endParaRPr dirty="0"/>
           </a:p>
           <a:p>
             <a:pPr>
               <a:spcAft>
                 <a:spcPts val="440"/>
               </a:spcAft>
-              <a:defRPr sz="1100" b="1">
-                <a:solidFill>
-                  <a:srgbClr val="2ECC71"/>
+              <a:defRPr sz="1100" b="0">
+                <a:solidFill>
+                  <a:srgbClr val="7F8C8D"/>
                 </a:solidFill>
                 <a:latin typeface="Courier New"/>
               </a:defRPr>
             </a:pPr>
             <a:r>
-              <a:t>    "custom_id": "ticket-001",</a:t>
+              <a:rPr dirty="0"/>
+              <a:t># 2. Submit the batch</a:t>
             </a:r>
           </a:p>
           <a:p>
@@ -14947,8 +15187,14 @@
               </a:defRPr>
             </a:pPr>
             <a:r>
-              <a:t>    "params": {</a:t>
-            </a:r>
+              <a:rPr dirty="0"/>
+              <a:t>batch = </a:t>
+            </a:r>
+            <a:r>
+              <a:rPr dirty="0" err="1"/>
+              <a:t>client.messages.batches</a:t>
+            </a:r>
+            <a:endParaRPr dirty="0"/>
           </a:p>
           <a:p>
             <a:pPr>
@@ -14957,13 +15203,14 @@
               </a:spcAft>
               <a:defRPr sz="1100" b="0">
                 <a:solidFill>
-                  <a:srgbClr val="3498DB"/>
+                  <a:srgbClr val="FFFFFF"/>
                 </a:solidFill>
                 <a:latin typeface="Courier New"/>
               </a:defRPr>
             </a:pPr>
             <a:r>
-              <a:t>      "model": "claude-sonnet-4-6",</a:t>
+              <a:rPr dirty="0"/>
+              <a:t>  .create(requests=requests)</a:t>
             </a:r>
           </a:p>
           <a:p>
@@ -14978,9 +15225,7 @@
                 <a:latin typeface="Courier New"/>
               </a:defRPr>
             </a:pPr>
-            <a:r>
-              <a:t>      "max_tokens": 1024,</a:t>
-            </a:r>
+            <a:endParaRPr dirty="0"/>
           </a:p>
           <a:p>
             <a:pPr>
@@ -14989,13 +15234,14 @@
               </a:spcAft>
               <a:defRPr sz="1100" b="0">
                 <a:solidFill>
-                  <a:srgbClr val="FFFFFF"/>
+                  <a:srgbClr val="7F8C8D"/>
                 </a:solidFill>
                 <a:latin typeface="Courier New"/>
               </a:defRPr>
             </a:pPr>
             <a:r>
-              <a:t>      "messages": [{</a:t>
+              <a:rPr dirty="0"/>
+              <a:t># 3. Poll for results</a:t>
             </a:r>
           </a:p>
           <a:p>
@@ -15005,216 +15251,13 @@
               </a:spcAft>
               <a:defRPr sz="1100" b="0">
                 <a:solidFill>
-                  <a:srgbClr val="FFFFFF"/>
+                  <a:srgbClr val="7F8C8D"/>
                 </a:solidFill>
                 <a:latin typeface="Courier New"/>
               </a:defRPr>
             </a:pPr>
             <a:r>
-              <a:t>        "role": "user",</a:t>
-            </a:r>
-          </a:p>
-          <a:p>
-            <a:pPr>
-              <a:spcAft>
-                <a:spcPts val="440"/>
-              </a:spcAft>
-              <a:defRPr sz="1100" b="0">
-                <a:solidFill>
-                  <a:srgbClr val="FFFFFF"/>
-                </a:solidFill>
-                <a:latin typeface="Courier New"/>
-              </a:defRPr>
-            </a:pPr>
-            <a:r>
-              <a:t>        "content": "Classify: ..."</a:t>
-            </a:r>
-          </a:p>
-          <a:p>
-            <a:pPr>
-              <a:spcAft>
-                <a:spcPts val="440"/>
-              </a:spcAft>
-              <a:defRPr sz="1100" b="0">
-                <a:solidFill>
-                  <a:srgbClr val="FFFFFF"/>
-                </a:solidFill>
-                <a:latin typeface="Courier New"/>
-              </a:defRPr>
-            </a:pPr>
-            <a:r>
-              <a:t>      }]</a:t>
-            </a:r>
-          </a:p>
-          <a:p>
-            <a:pPr>
-              <a:spcAft>
-                <a:spcPts val="440"/>
-              </a:spcAft>
-              <a:defRPr sz="1100" b="0">
-                <a:solidFill>
-                  <a:srgbClr val="FFFFFF"/>
-                </a:solidFill>
-                <a:latin typeface="Courier New"/>
-              </a:defRPr>
-            </a:pPr>
-            <a:r>
-              <a:t>    }</a:t>
-            </a:r>
-          </a:p>
-          <a:p>
-            <a:pPr>
-              <a:spcAft>
-                <a:spcPts val="440"/>
-              </a:spcAft>
-              <a:defRPr sz="1100" b="0">
-                <a:solidFill>
-                  <a:srgbClr val="FFFFFF"/>
-                </a:solidFill>
-                <a:latin typeface="Courier New"/>
-              </a:defRPr>
-            </a:pPr>
-            <a:r>
-              <a:t>  },</a:t>
-            </a:r>
-          </a:p>
-          <a:p>
-            <a:pPr>
-              <a:spcAft>
-                <a:spcPts val="440"/>
-              </a:spcAft>
-              <a:defRPr sz="1100" b="0">
-                <a:solidFill>
-                  <a:srgbClr val="7F8C8D"/>
-                </a:solidFill>
-                <a:latin typeface="Courier New"/>
-              </a:defRPr>
-            </a:pPr>
-            <a:r>
-              <a:t>  # ... 10,000 more requests</a:t>
-            </a:r>
-          </a:p>
-          <a:p>
-            <a:pPr>
-              <a:spcAft>
-                <a:spcPts val="440"/>
-              </a:spcAft>
-              <a:defRPr sz="1100" b="0">
-                <a:solidFill>
-                  <a:srgbClr val="FFFFFF"/>
-                </a:solidFill>
-                <a:latin typeface="Courier New"/>
-              </a:defRPr>
-            </a:pPr>
-            <a:r>
-              <a:t>]</a:t>
-            </a:r>
-          </a:p>
-          <a:p>
-            <a:pPr>
-              <a:spcAft>
-                <a:spcPts val="440"/>
-              </a:spcAft>
-              <a:defRPr sz="1100" b="0">
-                <a:solidFill>
-                  <a:srgbClr val="FFFFFF"/>
-                </a:solidFill>
-                <a:latin typeface="Courier New"/>
-              </a:defRPr>
-            </a:pPr>
-            <a:endParaRPr/>
-          </a:p>
-          <a:p>
-            <a:pPr>
-              <a:spcAft>
-                <a:spcPts val="440"/>
-              </a:spcAft>
-              <a:defRPr sz="1100" b="0">
-                <a:solidFill>
-                  <a:srgbClr val="7F8C8D"/>
-                </a:solidFill>
-                <a:latin typeface="Courier New"/>
-              </a:defRPr>
-            </a:pPr>
-            <a:r>
-              <a:t># 2. Submit the batch</a:t>
-            </a:r>
-          </a:p>
-          <a:p>
-            <a:pPr>
-              <a:spcAft>
-                <a:spcPts val="440"/>
-              </a:spcAft>
-              <a:defRPr sz="1100" b="0">
-                <a:solidFill>
-                  <a:srgbClr val="FFFFFF"/>
-                </a:solidFill>
-                <a:latin typeface="Courier New"/>
-              </a:defRPr>
-            </a:pPr>
-            <a:r>
-              <a:t>batch = client.messages.batches</a:t>
-            </a:r>
-          </a:p>
-          <a:p>
-            <a:pPr>
-              <a:spcAft>
-                <a:spcPts val="440"/>
-              </a:spcAft>
-              <a:defRPr sz="1100" b="0">
-                <a:solidFill>
-                  <a:srgbClr val="FFFFFF"/>
-                </a:solidFill>
-                <a:latin typeface="Courier New"/>
-              </a:defRPr>
-            </a:pPr>
-            <a:r>
-              <a:t>  .create(requests=requests)</a:t>
-            </a:r>
-          </a:p>
-          <a:p>
-            <a:pPr>
-              <a:spcAft>
-                <a:spcPts val="440"/>
-              </a:spcAft>
-              <a:defRPr sz="1100" b="0">
-                <a:solidFill>
-                  <a:srgbClr val="FFFFFF"/>
-                </a:solidFill>
-                <a:latin typeface="Courier New"/>
-              </a:defRPr>
-            </a:pPr>
-            <a:endParaRPr/>
-          </a:p>
-          <a:p>
-            <a:pPr>
-              <a:spcAft>
-                <a:spcPts val="440"/>
-              </a:spcAft>
-              <a:defRPr sz="1100" b="0">
-                <a:solidFill>
-                  <a:srgbClr val="7F8C8D"/>
-                </a:solidFill>
-                <a:latin typeface="Courier New"/>
-              </a:defRPr>
-            </a:pPr>
-            <a:r>
-              <a:t># 3. Poll for results</a:t>
-            </a:r>
-          </a:p>
-          <a:p>
-            <a:pPr>
-              <a:spcAft>
-                <a:spcPts val="440"/>
-              </a:spcAft>
-              <a:defRPr sz="1100" b="0">
-                <a:solidFill>
-                  <a:srgbClr val="7F8C8D"/>
-                </a:solidFill>
-                <a:latin typeface="Courier New"/>
-              </a:defRPr>
-            </a:pPr>
-            <a:r>
+              <a:rPr dirty="0"/>
               <a:t># Results ready within ~24 hours</a:t>
             </a:r>
           </a:p>
@@ -15652,8 +15695,8 @@
         </p:nvSpPr>
         <p:spPr>
           <a:xfrm>
-            <a:off x="548640" y="5486400"/>
-            <a:ext cx="11064240" cy="1188720"/>
+            <a:off x="548640" y="5303520"/>
+            <a:ext cx="6064431" cy="1371600"/>
           </a:xfrm>
           <a:prstGeom prst="roundRect">
             <a:avLst/>
@@ -15686,7 +15729,7 @@
           <a:lstStyle/>
           <a:p>
             <a:pPr algn="ctr"/>
-            <a:endParaRPr/>
+            <a:endParaRPr dirty="0"/>
           </a:p>
         </p:txBody>
       </p:sp>
@@ -15698,7 +15741,7 @@
         </p:nvSpPr>
         <p:spPr>
           <a:xfrm>
-            <a:off x="822960" y="5577840"/>
+            <a:off x="731520" y="5373209"/>
             <a:ext cx="10058400" cy="365760"/>
           </a:xfrm>
           <a:prstGeom prst="rect">
@@ -15721,6 +15764,7 @@
               </a:defRPr>
             </a:pPr>
             <a:r>
+              <a:rPr dirty="0"/>
               <a:t>Real-Life Analogy: Laundromat vs Hand Washing</a:t>
             </a:r>
           </a:p>
@@ -15734,8 +15778,8 @@
         </p:nvSpPr>
         <p:spPr>
           <a:xfrm>
-            <a:off x="822960" y="5943600"/>
-            <a:ext cx="10515600" cy="640080"/>
+            <a:off x="731520" y="5693921"/>
+            <a:ext cx="5977890" cy="682238"/>
           </a:xfrm>
           <a:prstGeom prst="rect">
             <a:avLst/>
@@ -15760,6 +15804,7 @@
               </a:defRPr>
             </a:pPr>
             <a:r>
+              <a:rPr sz="1000" dirty="0"/>
               <a:t>Real-time API = Washing each shirt by hand. Fast per item, but exhausting at scale.</a:t>
             </a:r>
           </a:p>
@@ -15776,6 +15821,7 @@
               </a:defRPr>
             </a:pPr>
             <a:r>
+              <a:rPr sz="1000" dirty="0"/>
               <a:t>Batch API = Loading the washing machine with 50 shirts. Takes longer, but way cheaper and easier!</a:t>
             </a:r>
           </a:p>
@@ -15792,6 +15838,7 @@
               </a:defRPr>
             </a:pPr>
             <a:r>
+              <a:rPr sz="1000" dirty="0"/>
               <a:t>You wouldn't hand-wash 10,000 shirts. Same logic: use Batch API for large-scale processing.</a:t>
             </a:r>
           </a:p>
@@ -16379,6 +16426,7 @@
               </a:defRPr>
             </a:pPr>
             <a:r>
+              <a:rPr dirty="0"/>
               <a:t>Same Claude instance writes AND reviews.</a:t>
             </a:r>
           </a:p>
@@ -16387,21 +16435,75 @@
               <a:spcAft>
                 <a:spcPts val="560"/>
               </a:spcAft>
+              <a:defRPr sz="1400" b="1">
+                <a:solidFill>
+                  <a:srgbClr val="E74C3C"/>
+                </a:solidFill>
+                <a:latin typeface="Calibri"/>
+              </a:defRPr>
+            </a:pPr>
+            <a:r>
+              <a:rPr dirty="0"/>
+              <a:t>Problems:</a:t>
+            </a:r>
+          </a:p>
+          <a:p>
+            <a:pPr>
+              <a:spcAft>
+                <a:spcPts val="560"/>
+              </a:spcAft>
               <a:defRPr sz="1400" b="0">
                 <a:solidFill>
-                  <a:srgbClr val="2C3E50"/>
-                </a:solidFill>
-                <a:latin typeface="Calibri"/>
-              </a:defRPr>
-            </a:pPr>
-            <a:endParaRPr/>
+                  <a:srgbClr val="7F8C8D"/>
+                </a:solidFill>
+                <a:latin typeface="Calibri"/>
+              </a:defRPr>
+            </a:pPr>
+            <a:r>
+              <a:rPr dirty="0"/>
+              <a:t>- Remembers original reasoning</a:t>
+            </a:r>
           </a:p>
           <a:p>
             <a:pPr>
               <a:spcAft>
                 <a:spcPts val="560"/>
               </a:spcAft>
-              <a:defRPr sz="1400" b="1">
+              <a:defRPr sz="1400" b="0">
+                <a:solidFill>
+                  <a:srgbClr val="7F8C8D"/>
+                </a:solidFill>
+                <a:latin typeface="Calibri"/>
+              </a:defRPr>
+            </a:pPr>
+            <a:r>
+              <a:rPr dirty="0"/>
+              <a:t>- Tends to confirm its own output</a:t>
+            </a:r>
+          </a:p>
+          <a:p>
+            <a:pPr>
+              <a:spcAft>
+                <a:spcPts val="560"/>
+              </a:spcAft>
+              <a:defRPr sz="1400" b="0">
+                <a:solidFill>
+                  <a:srgbClr val="7F8C8D"/>
+                </a:solidFill>
+                <a:latin typeface="Calibri"/>
+              </a:defRPr>
+            </a:pPr>
+            <a:r>
+              <a:rPr dirty="0"/>
+              <a:t>- Misses errors it made initially</a:t>
+            </a:r>
+          </a:p>
+          <a:p>
+            <a:pPr>
+              <a:spcAft>
+                <a:spcPts val="560"/>
+              </a:spcAft>
+              <a:defRPr sz="1400" b="0">
                 <a:solidFill>
                   <a:srgbClr val="E74C3C"/>
                 </a:solidFill>
@@ -16409,70 +16511,7 @@
               </a:defRPr>
             </a:pPr>
             <a:r>
-              <a:t>Problems:</a:t>
-            </a:r>
-          </a:p>
-          <a:p>
-            <a:pPr>
-              <a:spcAft>
-                <a:spcPts val="560"/>
-              </a:spcAft>
-              <a:defRPr sz="1400" b="0">
-                <a:solidFill>
-                  <a:srgbClr val="7F8C8D"/>
-                </a:solidFill>
-                <a:latin typeface="Calibri"/>
-              </a:defRPr>
-            </a:pPr>
-            <a:r>
-              <a:t>- Remembers original reasoning</a:t>
-            </a:r>
-          </a:p>
-          <a:p>
-            <a:pPr>
-              <a:spcAft>
-                <a:spcPts val="560"/>
-              </a:spcAft>
-              <a:defRPr sz="1400" b="0">
-                <a:solidFill>
-                  <a:srgbClr val="7F8C8D"/>
-                </a:solidFill>
-                <a:latin typeface="Calibri"/>
-              </a:defRPr>
-            </a:pPr>
-            <a:r>
-              <a:t>- Tends to confirm its own output</a:t>
-            </a:r>
-          </a:p>
-          <a:p>
-            <a:pPr>
-              <a:spcAft>
-                <a:spcPts val="560"/>
-              </a:spcAft>
-              <a:defRPr sz="1400" b="0">
-                <a:solidFill>
-                  <a:srgbClr val="7F8C8D"/>
-                </a:solidFill>
-                <a:latin typeface="Calibri"/>
-              </a:defRPr>
-            </a:pPr>
-            <a:r>
-              <a:t>- Misses errors it made initially</a:t>
-            </a:r>
-          </a:p>
-          <a:p>
-            <a:pPr>
-              <a:spcAft>
-                <a:spcPts val="560"/>
-              </a:spcAft>
-              <a:defRPr sz="1400" b="0">
-                <a:solidFill>
-                  <a:srgbClr val="E74C3C"/>
-                </a:solidFill>
-                <a:latin typeface="Calibri"/>
-              </a:defRPr>
-            </a:pPr>
-            <a:r>
+              <a:rPr dirty="0"/>
               <a:t>- Like grading your own exam!</a:t>
             </a:r>
           </a:p>
@@ -16594,6 +16633,7 @@
               </a:defRPr>
             </a:pPr>
             <a:r>
+              <a:rPr dirty="0"/>
               <a:t>Fresh Claude instance reviews output.</a:t>
             </a:r>
           </a:p>
@@ -16602,21 +16642,75 @@
               <a:spcAft>
                 <a:spcPts val="560"/>
               </a:spcAft>
+              <a:defRPr sz="1400" b="1">
+                <a:solidFill>
+                  <a:srgbClr val="2ECC71"/>
+                </a:solidFill>
+                <a:latin typeface="Calibri"/>
+              </a:defRPr>
+            </a:pPr>
+            <a:r>
+              <a:rPr dirty="0"/>
+              <a:t>Benefits:</a:t>
+            </a:r>
+          </a:p>
+          <a:p>
+            <a:pPr>
+              <a:spcAft>
+                <a:spcPts val="560"/>
+              </a:spcAft>
               <a:defRPr sz="1400" b="0">
                 <a:solidFill>
-                  <a:srgbClr val="2C3E50"/>
-                </a:solidFill>
-                <a:latin typeface="Calibri"/>
-              </a:defRPr>
-            </a:pPr>
-            <a:endParaRPr/>
+                  <a:srgbClr val="7F8C8D"/>
+                </a:solidFill>
+                <a:latin typeface="Calibri"/>
+              </a:defRPr>
+            </a:pPr>
+            <a:r>
+              <a:rPr dirty="0"/>
+              <a:t>- No memory of original reasoning</a:t>
+            </a:r>
           </a:p>
           <a:p>
             <a:pPr>
               <a:spcAft>
                 <a:spcPts val="560"/>
               </a:spcAft>
-              <a:defRPr sz="1400" b="1">
+              <a:defRPr sz="1400" b="0">
+                <a:solidFill>
+                  <a:srgbClr val="7F8C8D"/>
+                </a:solidFill>
+                <a:latin typeface="Calibri"/>
+              </a:defRPr>
+            </a:pPr>
+            <a:r>
+              <a:rPr dirty="0"/>
+              <a:t>- Evaluates output on its own merit</a:t>
+            </a:r>
+          </a:p>
+          <a:p>
+            <a:pPr>
+              <a:spcAft>
+                <a:spcPts val="560"/>
+              </a:spcAft>
+              <a:defRPr sz="1400" b="0">
+                <a:solidFill>
+                  <a:srgbClr val="7F8C8D"/>
+                </a:solidFill>
+                <a:latin typeface="Calibri"/>
+              </a:defRPr>
+            </a:pPr>
+            <a:r>
+              <a:rPr dirty="0"/>
+              <a:t>- Catches blind spots and errors</a:t>
+            </a:r>
+          </a:p>
+          <a:p>
+            <a:pPr>
+              <a:spcAft>
+                <a:spcPts val="560"/>
+              </a:spcAft>
+              <a:defRPr sz="1400" b="0">
                 <a:solidFill>
                   <a:srgbClr val="2ECC71"/>
                 </a:solidFill>
@@ -16624,70 +16718,7 @@
               </a:defRPr>
             </a:pPr>
             <a:r>
-              <a:t>Benefits:</a:t>
-            </a:r>
-          </a:p>
-          <a:p>
-            <a:pPr>
-              <a:spcAft>
-                <a:spcPts val="560"/>
-              </a:spcAft>
-              <a:defRPr sz="1400" b="0">
-                <a:solidFill>
-                  <a:srgbClr val="7F8C8D"/>
-                </a:solidFill>
-                <a:latin typeface="Calibri"/>
-              </a:defRPr>
-            </a:pPr>
-            <a:r>
-              <a:t>- No memory of original reasoning</a:t>
-            </a:r>
-          </a:p>
-          <a:p>
-            <a:pPr>
-              <a:spcAft>
-                <a:spcPts val="560"/>
-              </a:spcAft>
-              <a:defRPr sz="1400" b="0">
-                <a:solidFill>
-                  <a:srgbClr val="7F8C8D"/>
-                </a:solidFill>
-                <a:latin typeface="Calibri"/>
-              </a:defRPr>
-            </a:pPr>
-            <a:r>
-              <a:t>- Evaluates output on its own merit</a:t>
-            </a:r>
-          </a:p>
-          <a:p>
-            <a:pPr>
-              <a:spcAft>
-                <a:spcPts val="560"/>
-              </a:spcAft>
-              <a:defRPr sz="1400" b="0">
-                <a:solidFill>
-                  <a:srgbClr val="7F8C8D"/>
-                </a:solidFill>
-                <a:latin typeface="Calibri"/>
-              </a:defRPr>
-            </a:pPr>
-            <a:r>
-              <a:t>- Catches blind spots and errors</a:t>
-            </a:r>
-          </a:p>
-          <a:p>
-            <a:pPr>
-              <a:spcAft>
-                <a:spcPts val="560"/>
-              </a:spcAft>
-              <a:defRPr sz="1400" b="0">
-                <a:solidFill>
-                  <a:srgbClr val="2ECC71"/>
-                </a:solidFill>
-                <a:latin typeface="Calibri"/>
-              </a:defRPr>
-            </a:pPr>
-            <a:r>
+              <a:rPr dirty="0"/>
               <a:t>- Like peer review by a colleague!</a:t>
             </a:r>
           </a:p>
@@ -17621,7 +17652,7 @@
         <p:spPr>
           <a:xfrm>
             <a:off x="822960" y="5029200"/>
-            <a:ext cx="10515600" cy="1554480"/>
+            <a:ext cx="10515600" cy="1613262"/>
           </a:xfrm>
           <a:prstGeom prst="rect">
             <a:avLst/>
@@ -17646,6 +17677,7 @@
               </a:defRPr>
             </a:pPr>
             <a:r>
+              <a:rPr dirty="0"/>
               <a:t>Pass 1 (Per-Item) = Each SPECIALIST examines the patient independently:</a:t>
             </a:r>
           </a:p>
@@ -17662,6 +17694,7 @@
               </a:defRPr>
             </a:pPr>
             <a:r>
+              <a:rPr dirty="0"/>
               <a:t>  Cardiologist checks heart, neurologist checks brain, radiologist reads scans -- each in isolation.</a:t>
             </a:r>
           </a:p>
@@ -17672,72 +17705,61 @@
               </a:spcAft>
               <a:defRPr sz="1300" b="0">
                 <a:solidFill>
+                  <a:srgbClr val="2ECC71"/>
+                </a:solidFill>
+                <a:latin typeface="Calibri"/>
+              </a:defRPr>
+            </a:pPr>
+            <a:r>
+              <a:rPr dirty="0"/>
+              <a:t>Pass 2 (Cross-Item) = The TEAM MEETING where all specialists share findings:</a:t>
+            </a:r>
+          </a:p>
+          <a:p>
+            <a:pPr>
+              <a:spcAft>
+                <a:spcPts val="520"/>
+              </a:spcAft>
+              <a:defRPr sz="1300" b="0">
+                <a:solidFill>
+                  <a:srgbClr val="7F8C8D"/>
+                </a:solidFill>
+                <a:latin typeface="Calibri"/>
+              </a:defRPr>
+            </a:pPr>
+            <a:r>
+              <a:rPr dirty="0"/>
+              <a:t>  'The heart issue + the brain scan + the blood work together suggest X'. Patterns emerge from integration!</a:t>
+            </a:r>
+          </a:p>
+          <a:p>
+            <a:pPr>
+              <a:spcAft>
+                <a:spcPts val="520"/>
+              </a:spcAft>
+              <a:defRPr sz="1300" b="0">
+                <a:solidFill>
                   <a:srgbClr val="2C3E50"/>
                 </a:solidFill>
                 <a:latin typeface="Calibri"/>
               </a:defRPr>
             </a:pPr>
-            <a:endParaRPr/>
+            <a:endParaRPr dirty="0"/>
           </a:p>
           <a:p>
             <a:pPr>
               <a:spcAft>
                 <a:spcPts val="520"/>
               </a:spcAft>
-              <a:defRPr sz="1300" b="0">
-                <a:solidFill>
-                  <a:srgbClr val="2ECC71"/>
-                </a:solidFill>
-                <a:latin typeface="Calibri"/>
-              </a:defRPr>
-            </a:pPr>
-            <a:r>
-              <a:t>Pass 2 (Cross-Item) = The TEAM MEETING where all specialists share findings:</a:t>
-            </a:r>
-          </a:p>
-          <a:p>
-            <a:pPr>
-              <a:spcAft>
-                <a:spcPts val="520"/>
-              </a:spcAft>
-              <a:defRPr sz="1300" b="0">
-                <a:solidFill>
-                  <a:srgbClr val="7F8C8D"/>
-                </a:solidFill>
-                <a:latin typeface="Calibri"/>
-              </a:defRPr>
-            </a:pPr>
-            <a:r>
-              <a:t>  'The heart issue + the brain scan + the blood work together suggest X'. Patterns emerge from integration!</a:t>
-            </a:r>
-          </a:p>
-          <a:p>
-            <a:pPr>
-              <a:spcAft>
-                <a:spcPts val="520"/>
-              </a:spcAft>
-              <a:defRPr sz="1300" b="0">
+              <a:defRPr sz="1300" b="1">
                 <a:solidFill>
                   <a:srgbClr val="2C3E50"/>
                 </a:solidFill>
                 <a:latin typeface="Calibri"/>
               </a:defRPr>
             </a:pPr>
-            <a:endParaRPr/>
-          </a:p>
-          <a:p>
-            <a:pPr>
-              <a:spcAft>
-                <a:spcPts val="520"/>
-              </a:spcAft>
-              <a:defRPr sz="1300" b="1">
-                <a:solidFill>
-                  <a:srgbClr val="2C3E50"/>
-                </a:solidFill>
-                <a:latin typeface="Calibri"/>
-              </a:defRPr>
-            </a:pPr>
-            <a:r>
+            <a:r>
+              <a:rPr dirty="0"/>
               <a:t>Single-pass = asking ONE doctor to do everything. Multi-pass = a specialist team. Quality goes up!</a:t>
             </a:r>
           </a:p>
@@ -18213,8 +18235,8 @@
         </p:nvSpPr>
         <p:spPr>
           <a:xfrm>
-            <a:off x="6309360" y="1737360"/>
-            <a:ext cx="5303520" cy="2743200"/>
+            <a:off x="6309360" y="1737359"/>
+            <a:ext cx="5303520" cy="2867297"/>
           </a:xfrm>
           <a:prstGeom prst="roundRect">
             <a:avLst/>
@@ -18296,7 +18318,7 @@
         <p:spPr>
           <a:xfrm>
             <a:off x="6492240" y="2194560"/>
-            <a:ext cx="4846320" cy="2286000"/>
+            <a:ext cx="4846320" cy="3198311"/>
           </a:xfrm>
           <a:prstGeom prst="rect">
             <a:avLst/>
@@ -18321,6 +18343,7 @@
               </a:defRPr>
             </a:pPr>
             <a:r>
+              <a:rPr dirty="0"/>
               <a:t>Output of one Claude call becomes</a:t>
             </a:r>
           </a:p>
@@ -18337,6 +18360,7 @@
               </a:defRPr>
             </a:pPr>
             <a:r>
+              <a:rPr dirty="0"/>
               <a:t>INPUT to the next Claude call.</a:t>
             </a:r>
           </a:p>
@@ -18347,168 +18371,163 @@
               </a:spcAft>
               <a:defRPr sz="1300" b="0">
                 <a:solidFill>
+                  <a:srgbClr val="3498DB"/>
+                </a:solidFill>
+                <a:latin typeface="Courier New"/>
+              </a:defRPr>
+            </a:pPr>
+            <a:r>
+              <a:rPr dirty="0"/>
+              <a:t>  Claude Pass 1 (Draft)</a:t>
+            </a:r>
+          </a:p>
+          <a:p>
+            <a:pPr>
+              <a:spcAft>
+                <a:spcPts val="520"/>
+              </a:spcAft>
+              <a:defRPr sz="1300" b="0">
+                <a:solidFill>
+                  <a:srgbClr val="7F8C8D"/>
+                </a:solidFill>
+                <a:latin typeface="Courier New"/>
+              </a:defRPr>
+            </a:pPr>
+            <a:r>
+              <a:rPr dirty="0"/>
+              <a:t>         |</a:t>
+            </a:r>
+          </a:p>
+          <a:p>
+            <a:pPr>
+              <a:spcAft>
+                <a:spcPts val="520"/>
+              </a:spcAft>
+              <a:defRPr sz="1300" b="0">
+                <a:solidFill>
+                  <a:srgbClr val="7F8C8D"/>
+                </a:solidFill>
+                <a:latin typeface="Courier New"/>
+              </a:defRPr>
+            </a:pPr>
+            <a:r>
+              <a:rPr dirty="0"/>
+              <a:t>         v</a:t>
+            </a:r>
+          </a:p>
+          <a:p>
+            <a:pPr>
+              <a:spcAft>
+                <a:spcPts val="520"/>
+              </a:spcAft>
+              <a:defRPr sz="1300" b="0">
+                <a:solidFill>
+                  <a:srgbClr val="2ECC71"/>
+                </a:solidFill>
+                <a:latin typeface="Courier New"/>
+              </a:defRPr>
+            </a:pPr>
+            <a:r>
+              <a:rPr dirty="0"/>
+              <a:t>  Claude Pass 2 (Critique)</a:t>
+            </a:r>
+          </a:p>
+          <a:p>
+            <a:pPr>
+              <a:spcAft>
+                <a:spcPts val="520"/>
+              </a:spcAft>
+              <a:defRPr sz="1300" b="0">
+                <a:solidFill>
+                  <a:srgbClr val="7F8C8D"/>
+                </a:solidFill>
+                <a:latin typeface="Courier New"/>
+              </a:defRPr>
+            </a:pPr>
+            <a:r>
+              <a:rPr dirty="0"/>
+              <a:t>         |</a:t>
+            </a:r>
+          </a:p>
+          <a:p>
+            <a:pPr>
+              <a:spcAft>
+                <a:spcPts val="520"/>
+              </a:spcAft>
+              <a:defRPr sz="1300" b="0">
+                <a:solidFill>
+                  <a:srgbClr val="7F8C8D"/>
+                </a:solidFill>
+                <a:latin typeface="Courier New"/>
+              </a:defRPr>
+            </a:pPr>
+            <a:r>
+              <a:rPr dirty="0"/>
+              <a:t>         v</a:t>
+            </a:r>
+          </a:p>
+          <a:p>
+            <a:pPr>
+              <a:spcAft>
+                <a:spcPts val="520"/>
+              </a:spcAft>
+              <a:defRPr sz="1300" b="0">
+                <a:solidFill>
+                  <a:srgbClr val="E67E22"/>
+                </a:solidFill>
+                <a:latin typeface="Courier New"/>
+              </a:defRPr>
+            </a:pPr>
+            <a:r>
+              <a:rPr dirty="0"/>
+              <a:t>  Claude Pass 3 (Refine)</a:t>
+            </a:r>
+          </a:p>
+          <a:p>
+            <a:pPr>
+              <a:spcAft>
+                <a:spcPts val="520"/>
+              </a:spcAft>
+              <a:defRPr sz="1300" b="0">
+                <a:solidFill>
                   <a:srgbClr val="2C3E50"/>
                 </a:solidFill>
                 <a:latin typeface="Courier New"/>
               </a:defRPr>
             </a:pPr>
-            <a:endParaRPr/>
+            <a:endParaRPr dirty="0"/>
           </a:p>
           <a:p>
             <a:pPr>
               <a:spcAft>
                 <a:spcPts val="520"/>
               </a:spcAft>
+              <a:defRPr sz="1300" b="1">
+                <a:solidFill>
+                  <a:srgbClr val="2C3E50"/>
+                </a:solidFill>
+                <a:latin typeface="Courier New"/>
+              </a:defRPr>
+            </a:pPr>
+            <a:r>
+              <a:rPr dirty="0"/>
+              <a:t>Use for: draft-critique-refine,</a:t>
+            </a:r>
+          </a:p>
+          <a:p>
+            <a:pPr>
+              <a:spcAft>
+                <a:spcPts val="520"/>
+              </a:spcAft>
               <a:defRPr sz="1300" b="0">
                 <a:solidFill>
-                  <a:srgbClr val="3498DB"/>
+                  <a:srgbClr val="2C3E50"/>
                 </a:solidFill>
                 <a:latin typeface="Courier New"/>
               </a:defRPr>
             </a:pPr>
             <a:r>
-              <a:t>  Claude Pass 1 (Draft)</a:t>
-            </a:r>
-          </a:p>
-          <a:p>
-            <a:pPr>
-              <a:spcAft>
-                <a:spcPts val="520"/>
-              </a:spcAft>
-              <a:defRPr sz="1300" b="0">
-                <a:solidFill>
-                  <a:srgbClr val="7F8C8D"/>
-                </a:solidFill>
-                <a:latin typeface="Courier New"/>
-              </a:defRPr>
-            </a:pPr>
-            <a:r>
-              <a:t>         |</a:t>
-            </a:r>
-          </a:p>
-          <a:p>
-            <a:pPr>
-              <a:spcAft>
-                <a:spcPts val="520"/>
-              </a:spcAft>
-              <a:defRPr sz="1300" b="0">
-                <a:solidFill>
-                  <a:srgbClr val="7F8C8D"/>
-                </a:solidFill>
-                <a:latin typeface="Courier New"/>
-              </a:defRPr>
-            </a:pPr>
-            <a:r>
-              <a:t>         v</a:t>
-            </a:r>
-          </a:p>
-          <a:p>
-            <a:pPr>
-              <a:spcAft>
-                <a:spcPts val="520"/>
-              </a:spcAft>
-              <a:defRPr sz="1300" b="0">
-                <a:solidFill>
-                  <a:srgbClr val="2ECC71"/>
-                </a:solidFill>
-                <a:latin typeface="Courier New"/>
-              </a:defRPr>
-            </a:pPr>
-            <a:r>
-              <a:t>  Claude Pass 2 (Critique)</a:t>
-            </a:r>
-          </a:p>
-          <a:p>
-            <a:pPr>
-              <a:spcAft>
-                <a:spcPts val="520"/>
-              </a:spcAft>
-              <a:defRPr sz="1300" b="0">
-                <a:solidFill>
-                  <a:srgbClr val="7F8C8D"/>
-                </a:solidFill>
-                <a:latin typeface="Courier New"/>
-              </a:defRPr>
-            </a:pPr>
-            <a:r>
-              <a:t>         |</a:t>
-            </a:r>
-          </a:p>
-          <a:p>
-            <a:pPr>
-              <a:spcAft>
-                <a:spcPts val="520"/>
-              </a:spcAft>
-              <a:defRPr sz="1300" b="0">
-                <a:solidFill>
-                  <a:srgbClr val="7F8C8D"/>
-                </a:solidFill>
-                <a:latin typeface="Courier New"/>
-              </a:defRPr>
-            </a:pPr>
-            <a:r>
-              <a:t>         v</a:t>
-            </a:r>
-          </a:p>
-          <a:p>
-            <a:pPr>
-              <a:spcAft>
-                <a:spcPts val="520"/>
-              </a:spcAft>
-              <a:defRPr sz="1300" b="0">
-                <a:solidFill>
-                  <a:srgbClr val="E67E22"/>
-                </a:solidFill>
-                <a:latin typeface="Courier New"/>
-              </a:defRPr>
-            </a:pPr>
-            <a:r>
-              <a:t>  Claude Pass 3 (Refine)</a:t>
-            </a:r>
-          </a:p>
-          <a:p>
-            <a:pPr>
-              <a:spcAft>
-                <a:spcPts val="520"/>
-              </a:spcAft>
-              <a:defRPr sz="1300" b="0">
-                <a:solidFill>
-                  <a:srgbClr val="2C3E50"/>
-                </a:solidFill>
-                <a:latin typeface="Courier New"/>
-              </a:defRPr>
-            </a:pPr>
-            <a:endParaRPr/>
-          </a:p>
-          <a:p>
-            <a:pPr>
-              <a:spcAft>
-                <a:spcPts val="520"/>
-              </a:spcAft>
-              <a:defRPr sz="1300" b="1">
-                <a:solidFill>
-                  <a:srgbClr val="2C3E50"/>
-                </a:solidFill>
-                <a:latin typeface="Courier New"/>
-              </a:defRPr>
-            </a:pPr>
-            <a:r>
-              <a:t>Use for: draft-critique-refine,</a:t>
-            </a:r>
-          </a:p>
-          <a:p>
-            <a:pPr>
-              <a:spcAft>
-                <a:spcPts val="520"/>
-              </a:spcAft>
-              <a:defRPr sz="1300" b="0">
-                <a:solidFill>
-                  <a:srgbClr val="2C3E50"/>
-                </a:solidFill>
-                <a:latin typeface="Courier New"/>
-              </a:defRPr>
-            </a:pPr>
-            <a:r>
+              <a:rPr dirty="0"/>
               <a:t>multi-pass review, quality gates</a:t>
             </a:r>
           </a:p>
@@ -18522,7 +18541,7 @@
         </p:nvSpPr>
         <p:spPr>
           <a:xfrm>
-            <a:off x="548640" y="4754880"/>
+            <a:off x="548640" y="4846320"/>
             <a:ext cx="11064240" cy="1920240"/>
           </a:xfrm>
           <a:prstGeom prst="roundRect">
@@ -23129,8 +23148,8 @@
         </p:nvSpPr>
         <p:spPr>
           <a:xfrm>
-            <a:off x="6858000" y="2743200"/>
-            <a:ext cx="5029200" cy="548640"/>
+            <a:off x="6858000" y="2676529"/>
+            <a:ext cx="2286000" cy="492443"/>
           </a:xfrm>
           <a:prstGeom prst="rect">
             <a:avLst/>
@@ -23152,10 +23171,14 @@
               </a:defRPr>
             </a:pPr>
             <a:r>
+              <a:rPr dirty="0"/>
               <a:t>Each tier has specific, testable</a:t>
             </a:r>
-            <a:br/>
-            <a:r>
+            <a:br>
+              <a:rPr dirty="0"/>
+            </a:br>
+            <a:r>
+              <a:rPr dirty="0"/>
               <a:t>criteria -- no guessing needed</a:t>
             </a:r>
           </a:p>
@@ -23222,8 +23245,8 @@
         </p:nvSpPr>
         <p:spPr>
           <a:xfrm>
-            <a:off x="6858000" y="3794760"/>
-            <a:ext cx="5029200" cy="548640"/>
+            <a:off x="6858000" y="3728089"/>
+            <a:ext cx="2286000" cy="492443"/>
           </a:xfrm>
           <a:prstGeom prst="rect">
             <a:avLst/>
@@ -23245,10 +23268,14 @@
               </a:defRPr>
             </a:pPr>
             <a:r>
+              <a:rPr dirty="0"/>
               <a:t>If unsure between tiers, the</a:t>
             </a:r>
-            <a:br/>
-            <a:r>
+            <a:br>
+              <a:rPr dirty="0"/>
+            </a:br>
+            <a:r>
+              <a:rPr dirty="0"/>
               <a:t>examples guide the decision</a:t>
             </a:r>
           </a:p>
@@ -23262,7 +23289,7 @@
         </p:nvSpPr>
         <p:spPr>
           <a:xfrm>
-            <a:off x="6858000" y="4389120"/>
+            <a:off x="6858000" y="4297681"/>
             <a:ext cx="2286000" cy="365760"/>
           </a:xfrm>
           <a:prstGeom prst="roundRect">
@@ -23302,6 +23329,7 @@
               </a:defRPr>
             </a:pPr>
             <a:r>
+              <a:rPr dirty="0"/>
               <a:t>Iterate to Improve</a:t>
             </a:r>
           </a:p>
@@ -23315,8 +23343,8 @@
         </p:nvSpPr>
         <p:spPr>
           <a:xfrm>
-            <a:off x="6858000" y="4846320"/>
-            <a:ext cx="5029200" cy="548640"/>
+            <a:off x="6858000" y="4656296"/>
+            <a:ext cx="2286000" cy="492443"/>
           </a:xfrm>
           <a:prstGeom prst="rect">
             <a:avLst/>
@@ -23338,10 +23366,14 @@
               </a:defRPr>
             </a:pPr>
             <a:r>
+              <a:rPr dirty="0"/>
               <a:t>Run the prompt, check false</a:t>
             </a:r>
-            <a:br/>
-            <a:r>
+            <a:br>
+              <a:rPr dirty="0"/>
+            </a:br>
+            <a:r>
+              <a:rPr dirty="0"/>
               <a:t>positives, tighten criteria</a:t>
             </a:r>
           </a:p>
@@ -23355,7 +23387,7 @@
         </p:nvSpPr>
         <p:spPr>
           <a:xfrm>
-            <a:off x="6858000" y="5440679"/>
+            <a:off x="6858000" y="5224465"/>
             <a:ext cx="2286000" cy="365760"/>
           </a:xfrm>
           <a:prstGeom prst="roundRect">
@@ -23395,6 +23427,7 @@
               </a:defRPr>
             </a:pPr>
             <a:r>
+              <a:rPr dirty="0"/>
               <a:t>Consistent Output</a:t>
             </a:r>
           </a:p>
@@ -23408,8 +23441,8 @@
         </p:nvSpPr>
         <p:spPr>
           <a:xfrm>
-            <a:off x="6858000" y="5897879"/>
-            <a:ext cx="5029200" cy="548640"/>
+            <a:off x="6858000" y="5599515"/>
+            <a:ext cx="2286000" cy="492443"/>
           </a:xfrm>
           <a:prstGeom prst="rect">
             <a:avLst/>
@@ -23431,10 +23464,14 @@
               </a:defRPr>
             </a:pPr>
             <a:r>
+              <a:rPr dirty="0"/>
               <a:t>Same input = same severity</a:t>
             </a:r>
-            <a:br/>
-            <a:r>
+            <a:br>
+              <a:rPr dirty="0"/>
+            </a:br>
+            <a:r>
+              <a:rPr dirty="0"/>
               <a:t>across multiple runs</a:t>
             </a:r>
           </a:p>
@@ -25060,7 +25097,7 @@
         <p:spPr>
           <a:xfrm>
             <a:off x="731520" y="1828800"/>
-            <a:ext cx="6035040" cy="4389120"/>
+            <a:ext cx="6035040" cy="4226798"/>
           </a:xfrm>
           <a:prstGeom prst="rect">
             <a:avLst/>
@@ -25085,6 +25122,7 @@
               </a:defRPr>
             </a:pPr>
             <a:r>
+              <a:rPr sz="800" dirty="0"/>
               <a:t># Few-shot: sentiment classification</a:t>
             </a:r>
           </a:p>
@@ -25100,7 +25138,7 @@
                 <a:latin typeface="Courier New"/>
               </a:defRPr>
             </a:pPr>
-            <a:endParaRPr/>
+            <a:endParaRPr sz="800" dirty="0"/>
           </a:p>
           <a:p>
             <a:pPr>
@@ -25115,6 +25153,7 @@
               </a:defRPr>
             </a:pPr>
             <a:r>
+              <a:rPr sz="800" dirty="0"/>
               <a:t>messages = [</a:t>
             </a:r>
           </a:p>
@@ -25131,6 +25170,7 @@
               </a:defRPr>
             </a:pPr>
             <a:r>
+              <a:rPr sz="800" dirty="0"/>
               <a:t>  # Example 1 - Clear positive</a:t>
             </a:r>
           </a:p>
@@ -25147,7 +25187,16 @@
               </a:defRPr>
             </a:pPr>
             <a:r>
-              <a:t>  {"role":"user","content":</a:t>
+              <a:rPr sz="800" dirty="0"/>
+              <a:t>  {"</a:t>
+            </a:r>
+            <a:r>
+              <a:rPr sz="800" dirty="0" err="1"/>
+              <a:t>role":"user","content</a:t>
+            </a:r>
+            <a:r>
+              <a:rPr sz="800" dirty="0"/>
+              <a:t>":</a:t>
             </a:r>
           </a:p>
           <a:p>
@@ -25163,6 +25212,7 @@
               </a:defRPr>
             </a:pPr>
             <a:r>
+              <a:rPr sz="800" dirty="0"/>
               <a:t>   "Review: Great product!"},</a:t>
             </a:r>
           </a:p>
@@ -25179,7 +25229,16 @@
               </a:defRPr>
             </a:pPr>
             <a:r>
-              <a:t>  {"role":"assistant","content":</a:t>
+              <a:rPr sz="800" dirty="0"/>
+              <a:t>  {"</a:t>
+            </a:r>
+            <a:r>
+              <a:rPr sz="800" dirty="0" err="1"/>
+              <a:t>role":"assistant","content</a:t>
+            </a:r>
+            <a:r>
+              <a:rPr sz="800" dirty="0"/>
+              <a:t>":</a:t>
             </a:r>
           </a:p>
           <a:p>
@@ -25195,6 +25254,7 @@
               </a:defRPr>
             </a:pPr>
             <a:r>
+              <a:rPr sz="800" dirty="0"/>
               <a:t>   "sentiment:positive|conf:0.95"},</a:t>
             </a:r>
           </a:p>
@@ -25205,12 +25265,40 @@
               </a:spcAft>
               <a:defRPr sz="1100" b="0">
                 <a:solidFill>
+                  <a:srgbClr val="7F8C8D"/>
+                </a:solidFill>
+                <a:latin typeface="Courier New"/>
+              </a:defRPr>
+            </a:pPr>
+            <a:r>
+              <a:rPr sz="800" dirty="0"/>
+              <a:t>  # Example 2 - Tricky sarcasm</a:t>
+            </a:r>
+          </a:p>
+          <a:p>
+            <a:pPr>
+              <a:spcAft>
+                <a:spcPts val="440"/>
+              </a:spcAft>
+              <a:defRPr sz="1100" b="0">
+                <a:solidFill>
                   <a:srgbClr val="FFFFFF"/>
                 </a:solidFill>
                 <a:latin typeface="Courier New"/>
               </a:defRPr>
             </a:pPr>
-            <a:endParaRPr/>
+            <a:r>
+              <a:rPr sz="800" dirty="0"/>
+              <a:t>  {"</a:t>
+            </a:r>
+            <a:r>
+              <a:rPr sz="800" dirty="0" err="1"/>
+              <a:t>role":"user","content</a:t>
+            </a:r>
+            <a:r>
+              <a:rPr sz="800" dirty="0"/>
+              <a:t>":</a:t>
+            </a:r>
           </a:p>
           <a:p>
             <a:pPr>
@@ -25219,13 +25307,90 @@
               </a:spcAft>
               <a:defRPr sz="1100" b="0">
                 <a:solidFill>
+                  <a:srgbClr val="3498DB"/>
+                </a:solidFill>
+                <a:latin typeface="Courier New"/>
+              </a:defRPr>
+            </a:pPr>
+            <a:r>
+              <a:rPr sz="800" dirty="0"/>
+              <a:t>   "Review: Oh sure, it works GREAT</a:t>
+            </a:r>
+          </a:p>
+          <a:p>
+            <a:pPr>
+              <a:spcAft>
+                <a:spcPts val="440"/>
+              </a:spcAft>
+              <a:defRPr sz="1100" b="0">
+                <a:solidFill>
+                  <a:srgbClr val="3498DB"/>
+                </a:solidFill>
+                <a:latin typeface="Courier New"/>
+              </a:defRPr>
+            </a:pPr>
+            <a:r>
+              <a:rPr sz="800" dirty="0"/>
+              <a:t>    if you enjoy waiting 10 min"},</a:t>
+            </a:r>
+          </a:p>
+          <a:p>
+            <a:pPr>
+              <a:spcAft>
+                <a:spcPts val="440"/>
+              </a:spcAft>
+              <a:defRPr sz="1100" b="0">
+                <a:solidFill>
+                  <a:srgbClr val="FFFFFF"/>
+                </a:solidFill>
+                <a:latin typeface="Courier New"/>
+              </a:defRPr>
+            </a:pPr>
+            <a:r>
+              <a:rPr sz="800" dirty="0"/>
+              <a:t>  {"</a:t>
+            </a:r>
+            <a:r>
+              <a:rPr sz="800" dirty="0" err="1"/>
+              <a:t>role":"assistant","content</a:t>
+            </a:r>
+            <a:r>
+              <a:rPr sz="800" dirty="0"/>
+              <a:t>":</a:t>
+            </a:r>
+          </a:p>
+          <a:p>
+            <a:pPr>
+              <a:spcAft>
+                <a:spcPts val="440"/>
+              </a:spcAft>
+              <a:defRPr sz="1100" b="0">
+                <a:solidFill>
+                  <a:srgbClr val="E74C3C"/>
+                </a:solidFill>
+                <a:latin typeface="Courier New"/>
+              </a:defRPr>
+            </a:pPr>
+            <a:r>
+              <a:rPr sz="800" dirty="0"/>
+              <a:t>   "sentiment:negative|conf:0.85"},</a:t>
+            </a:r>
+          </a:p>
+          <a:p>
+            <a:pPr>
+              <a:spcAft>
+                <a:spcPts val="440"/>
+              </a:spcAft>
+              <a:defRPr sz="1100" b="0">
+                <a:solidFill>
                   <a:srgbClr val="7F8C8D"/>
                 </a:solidFill>
                 <a:latin typeface="Courier New"/>
               </a:defRPr>
             </a:pPr>
             <a:r>
-              <a:t>  # Example 2 - Tricky sarcasm</a:t>
+              <a:rPr sz="800" dirty="0"/>
+              <a:t>  # Example 3 - Genuinely mixed</a:t>
             </a:r>
           </a:p>
           <a:p>
@@ -25241,7 +25406,16 @@
               </a:defRPr>
             </a:pPr>
             <a:r>
-              <a:t>  {"role":"user","content":</a:t>
+              <a:rPr sz="800" dirty="0"/>
+              <a:t>  {"</a:t>
+            </a:r>
+            <a:r>
+              <a:rPr sz="800" dirty="0" err="1"/>
+              <a:t>role":"user","content</a:t>
+            </a:r>
+            <a:r>
+              <a:rPr sz="800" dirty="0"/>
+              <a:t>":</a:t>
             </a:r>
           </a:p>
           <a:p>
@@ -25257,7 +25431,8 @@
               </a:defRPr>
             </a:pPr>
             <a:r>
-              <a:t>   "Review: Oh sure, it works GREAT</a:t>
+              <a:rPr sz="800" dirty="0"/>
+              <a:t>   "Review: Fast shipping, but item</a:t>
             </a:r>
           </a:p>
           <a:p>
@@ -25273,7 +25448,8 @@
               </a:defRPr>
             </a:pPr>
             <a:r>
-              <a:t>    if you enjoy waiting 10 min"},</a:t>
+              <a:rPr sz="800" dirty="0"/>
+              <a:t>    was damaged on arrival"},</a:t>
             </a:r>
           </a:p>
           <a:p>
@@ -25289,7 +25465,16 @@
               </a:defRPr>
             </a:pPr>
             <a:r>
-              <a:t>  {"role":"assistant","content":</a:t>
+              <a:rPr sz="800" dirty="0"/>
+              <a:t>  {"</a:t>
+            </a:r>
+            <a:r>
+              <a:rPr sz="800" dirty="0" err="1"/>
+              <a:t>role":"assistant","content</a:t>
+            </a:r>
+            <a:r>
+              <a:rPr sz="800" dirty="0"/>
+              <a:t>":</a:t>
             </a:r>
           </a:p>
           <a:p>
@@ -25299,13 +25484,22 @@
               </a:spcAft>
               <a:defRPr sz="1100" b="0">
                 <a:solidFill>
-                  <a:srgbClr val="E74C3C"/>
+                  <a:srgbClr val="E67E22"/>
                 </a:solidFill>
                 <a:latin typeface="Courier New"/>
               </a:defRPr>
             </a:pPr>
             <a:r>
-              <a:t>   "sentiment:negative|conf:0.85"},</a:t>
+              <a:rPr sz="800" dirty="0"/>
+              <a:t> </a:t>
+            </a:r>
+            <a:r>
+              <a:rPr lang="en-US" sz="800" dirty="0"/>
+              <a:t> </a:t>
+            </a:r>
+            <a:r>
+              <a:rPr sz="800" dirty="0"/>
+              <a:t> "sentiment:mixed|conf:0.80"},</a:t>
             </a:r>
           </a:p>
           <a:p>
@@ -25315,12 +25509,40 @@
               </a:spcAft>
               <a:defRPr sz="1100" b="0">
                 <a:solidFill>
+                  <a:srgbClr val="7F8C8D"/>
+                </a:solidFill>
+                <a:latin typeface="Courier New"/>
+              </a:defRPr>
+            </a:pPr>
+            <a:r>
+              <a:rPr sz="800" dirty="0"/>
+              <a:t>  # NOW the real task</a:t>
+            </a:r>
+          </a:p>
+          <a:p>
+            <a:pPr>
+              <a:spcAft>
+                <a:spcPts val="440"/>
+              </a:spcAft>
+              <a:defRPr sz="1100" b="0">
+                <a:solidFill>
                   <a:srgbClr val="FFFFFF"/>
                 </a:solidFill>
                 <a:latin typeface="Courier New"/>
               </a:defRPr>
             </a:pPr>
-            <a:endParaRPr/>
+            <a:r>
+              <a:rPr sz="800" dirty="0"/>
+              <a:t>  {"</a:t>
+            </a:r>
+            <a:r>
+              <a:rPr sz="800" dirty="0" err="1"/>
+              <a:t>role":"user","content</a:t>
+            </a:r>
+            <a:r>
+              <a:rPr sz="800" dirty="0"/>
+              <a:t>":</a:t>
+            </a:r>
           </a:p>
           <a:p>
             <a:pPr>
@@ -25329,13 +25551,14 @@
               </a:spcAft>
               <a:defRPr sz="1100" b="0">
                 <a:solidFill>
-                  <a:srgbClr val="7F8C8D"/>
+                  <a:srgbClr val="3498DB"/>
                 </a:solidFill>
                 <a:latin typeface="Courier New"/>
               </a:defRPr>
             </a:pPr>
             <a:r>
-              <a:t>  # Example 3 - Genuinely mixed</a:t>
+              <a:rPr sz="800" dirty="0"/>
+              <a:t>   "Review: Decent for the price"},</a:t>
             </a:r>
           </a:p>
           <a:p>
@@ -25351,148 +25574,7 @@
               </a:defRPr>
             </a:pPr>
             <a:r>
-              <a:t>  {"role":"user","content":</a:t>
-            </a:r>
-          </a:p>
-          <a:p>
-            <a:pPr>
-              <a:spcAft>
-                <a:spcPts val="440"/>
-              </a:spcAft>
-              <a:defRPr sz="1100" b="0">
-                <a:solidFill>
-                  <a:srgbClr val="3498DB"/>
-                </a:solidFill>
-                <a:latin typeface="Courier New"/>
-              </a:defRPr>
-            </a:pPr>
-            <a:r>
-              <a:t>   "Review: Fast shipping, but item</a:t>
-            </a:r>
-          </a:p>
-          <a:p>
-            <a:pPr>
-              <a:spcAft>
-                <a:spcPts val="440"/>
-              </a:spcAft>
-              <a:defRPr sz="1100" b="0">
-                <a:solidFill>
-                  <a:srgbClr val="3498DB"/>
-                </a:solidFill>
-                <a:latin typeface="Courier New"/>
-              </a:defRPr>
-            </a:pPr>
-            <a:r>
-              <a:t>    was damaged on arrival"},</a:t>
-            </a:r>
-          </a:p>
-          <a:p>
-            <a:pPr>
-              <a:spcAft>
-                <a:spcPts val="440"/>
-              </a:spcAft>
-              <a:defRPr sz="1100" b="0">
-                <a:solidFill>
-                  <a:srgbClr val="FFFFFF"/>
-                </a:solidFill>
-                <a:latin typeface="Courier New"/>
-              </a:defRPr>
-            </a:pPr>
-            <a:r>
-              <a:t>  {"role":"assistant","content":</a:t>
-            </a:r>
-          </a:p>
-          <a:p>
-            <a:pPr>
-              <a:spcAft>
-                <a:spcPts val="440"/>
-              </a:spcAft>
-              <a:defRPr sz="1100" b="0">
-                <a:solidFill>
-                  <a:srgbClr val="E67E22"/>
-                </a:solidFill>
-                <a:latin typeface="Courier New"/>
-              </a:defRPr>
-            </a:pPr>
-            <a:r>
-              <a:t>   "sentiment:mixed|conf:0.80"},</a:t>
-            </a:r>
-          </a:p>
-          <a:p>
-            <a:pPr>
-              <a:spcAft>
-                <a:spcPts val="440"/>
-              </a:spcAft>
-              <a:defRPr sz="1100" b="0">
-                <a:solidFill>
-                  <a:srgbClr val="FFFFFF"/>
-                </a:solidFill>
-                <a:latin typeface="Courier New"/>
-              </a:defRPr>
-            </a:pPr>
-            <a:endParaRPr/>
-          </a:p>
-          <a:p>
-            <a:pPr>
-              <a:spcAft>
-                <a:spcPts val="440"/>
-              </a:spcAft>
-              <a:defRPr sz="1100" b="0">
-                <a:solidFill>
-                  <a:srgbClr val="7F8C8D"/>
-                </a:solidFill>
-                <a:latin typeface="Courier New"/>
-              </a:defRPr>
-            </a:pPr>
-            <a:r>
-              <a:t>  # NOW the real task</a:t>
-            </a:r>
-          </a:p>
-          <a:p>
-            <a:pPr>
-              <a:spcAft>
-                <a:spcPts val="440"/>
-              </a:spcAft>
-              <a:defRPr sz="1100" b="0">
-                <a:solidFill>
-                  <a:srgbClr val="FFFFFF"/>
-                </a:solidFill>
-                <a:latin typeface="Courier New"/>
-              </a:defRPr>
-            </a:pPr>
-            <a:r>
-              <a:t>  {"role":"user","content":</a:t>
-            </a:r>
-          </a:p>
-          <a:p>
-            <a:pPr>
-              <a:spcAft>
-                <a:spcPts val="440"/>
-              </a:spcAft>
-              <a:defRPr sz="1100" b="0">
-                <a:solidFill>
-                  <a:srgbClr val="3498DB"/>
-                </a:solidFill>
-                <a:latin typeface="Courier New"/>
-              </a:defRPr>
-            </a:pPr>
-            <a:r>
-              <a:t>   "Review: Decent for the price"},</a:t>
-            </a:r>
-          </a:p>
-          <a:p>
-            <a:pPr>
-              <a:spcAft>
-                <a:spcPts val="440"/>
-              </a:spcAft>
-              <a:defRPr sz="1100" b="0">
-                <a:solidFill>
-                  <a:srgbClr val="FFFFFF"/>
-                </a:solidFill>
-                <a:latin typeface="Courier New"/>
-              </a:defRPr>
-            </a:pPr>
-            <a:r>
+              <a:rPr sz="800" dirty="0"/>
               <a:t>]</a:t>
             </a:r>
           </a:p>
@@ -25596,7 +25678,7 @@
         <p:spPr>
           <a:xfrm>
             <a:off x="7315200" y="2743200"/>
-            <a:ext cx="4572000" cy="640080"/>
+            <a:ext cx="4572000" cy="461665"/>
           </a:xfrm>
           <a:prstGeom prst="rect">
             <a:avLst/>
@@ -25618,14 +25700,22 @@
               </a:defRPr>
             </a:pPr>
             <a:r>
+              <a:rPr dirty="0"/>
               <a:t>Example 2 handles sarcasm --</a:t>
             </a:r>
-            <a:br/>
-            <a:r>
+            <a:r>
+              <a:rPr lang="en-US" dirty="0"/>
+              <a:t> </a:t>
+            </a:r>
+            <a:r>
+              <a:rPr dirty="0"/>
               <a:t>the hardest case. Claude now</a:t>
             </a:r>
-            <a:br/>
-            <a:r>
+            <a:br>
+              <a:rPr dirty="0"/>
+            </a:br>
+            <a:r>
+              <a:rPr dirty="0"/>
               <a:t>knows HOW to handle it.</a:t>
             </a:r>
           </a:p>
@@ -25693,7 +25783,7 @@
         <p:spPr>
           <a:xfrm>
             <a:off x="7315200" y="3840480"/>
-            <a:ext cx="4572000" cy="640080"/>
+            <a:ext cx="4572000" cy="461665"/>
           </a:xfrm>
           <a:prstGeom prst="rect">
             <a:avLst/>
@@ -25715,14 +25805,22 @@
               </a:defRPr>
             </a:pPr>
             <a:r>
+              <a:rPr dirty="0"/>
               <a:t>The pipe-delimited format is</a:t>
             </a:r>
-            <a:br/>
-            <a:r>
+            <a:r>
+              <a:rPr lang="en-US" dirty="0"/>
+              <a:t> </a:t>
+            </a:r>
+            <a:r>
+              <a:rPr dirty="0"/>
               <a:t>consistent across all examples.</a:t>
             </a:r>
-            <a:br/>
-            <a:r>
+            <a:br>
+              <a:rPr dirty="0"/>
+            </a:br>
+            <a:r>
+              <a:rPr dirty="0"/>
               <a:t>Claude matches it exactly.</a:t>
             </a:r>
           </a:p>
@@ -25790,7 +25888,7 @@
         <p:spPr>
           <a:xfrm>
             <a:off x="7315200" y="4937760"/>
-            <a:ext cx="4572000" cy="640080"/>
+            <a:ext cx="4572000" cy="461665"/>
           </a:xfrm>
           <a:prstGeom prst="rect">
             <a:avLst/>
@@ -25812,14 +25910,22 @@
               </a:defRPr>
             </a:pPr>
             <a:r>
+              <a:rPr dirty="0"/>
               <a:t>Each example includes a</a:t>
             </a:r>
-            <a:br/>
-            <a:r>
+            <a:r>
+              <a:rPr lang="en-US" dirty="0"/>
+              <a:t> </a:t>
+            </a:r>
+            <a:r>
+              <a:rPr dirty="0"/>
               <a:t>confidence score. Claude learns</a:t>
             </a:r>
-            <a:br/>
-            <a:r>
+            <a:br>
+              <a:rPr dirty="0"/>
+            </a:br>
+            <a:r>
+              <a:rPr dirty="0"/>
               <a:t>to self-assess certainty.</a:t>
             </a:r>
           </a:p>
@@ -25833,7 +25939,7 @@
         </p:nvSpPr>
         <p:spPr>
           <a:xfrm>
-            <a:off x="7315200" y="5577840"/>
+            <a:off x="7315200" y="5463544"/>
             <a:ext cx="2103120" cy="365760"/>
           </a:xfrm>
           <a:prstGeom prst="roundRect">
@@ -25886,8 +25992,8 @@
         </p:nvSpPr>
         <p:spPr>
           <a:xfrm>
-            <a:off x="7315200" y="6035040"/>
-            <a:ext cx="4572000" cy="640080"/>
+            <a:off x="7315200" y="5818838"/>
+            <a:ext cx="4572000" cy="461665"/>
           </a:xfrm>
           <a:prstGeom prst="rect">
             <a:avLst/>
@@ -25909,14 +26015,22 @@
               </a:defRPr>
             </a:pPr>
             <a:r>
+              <a:rPr dirty="0"/>
               <a:t>Claude can now classify unseen</a:t>
             </a:r>
-            <a:br/>
-            <a:r>
+            <a:r>
+              <a:rPr lang="en-US" dirty="0"/>
+              <a:t> </a:t>
+            </a:r>
+            <a:r>
+              <a:rPr dirty="0"/>
               <a:t>reviews by PATTERN MATCHING</a:t>
             </a:r>
-            <a:br/>
-            <a:r>
+            <a:br>
+              <a:rPr dirty="0"/>
+            </a:br>
+            <a:r>
+              <a:rPr dirty="0"/>
               <a:t>the logic from examples.</a:t>
             </a:r>
           </a:p>
